--- a/downloads/presentations/modules/lesson-15-public-health-interoperability-hl7-v2-cda-fhir-and-apis.pptx
+++ b/downloads/presentations/modules/lesson-15-public-health-interoperability-hl7-v2-cda-fhir-and-apis.pptx
@@ -3089,6 +3089,45 @@
           </a:p>
         </p:txBody>
       </p:sp>
+      <p:sp>
+        <p:nvSpPr>
+          <p:cNvPr id="8" name="Text 5"/>
+          <p:cNvSpPr/>
+          <p:nvPr/>
+        </p:nvSpPr>
+        <p:spPr>
+          <a:xfrm>
+            <a:off x="11137392" y="6510528"/>
+            <a:ext cx="411480" cy="201168"/>
+          </a:xfrm>
+          <a:prstGeom prst="rect">
+            <a:avLst/>
+          </a:prstGeom>
+          <a:noFill/>
+          <a:ln/>
+        </p:spPr>
+        <p:txBody>
+          <a:bodyPr wrap="square" lIns="0" tIns="0" rIns="0" bIns="0" rtlCol="0" anchor="ctr"/>
+          <a:lstStyle/>
+          <a:p>
+            <a:pPr algn="r" indent="0" marL="0">
+              <a:buNone/>
+            </a:pPr>
+            <a:r>
+              <a:rPr lang="en-US" sz="900" dirty="0">
+                <a:solidFill>
+                  <a:srgbClr val="5F7181"/>
+                </a:solidFill>
+                <a:latin typeface="Aptos" pitchFamily="34" charset="0"/>
+                <a:ea typeface="Aptos" pitchFamily="34" charset="-122"/>
+                <a:cs typeface="Aptos" pitchFamily="34" charset="-120"/>
+              </a:rPr>
+              <a:t>1</a:t>
+            </a:r>
+            <a:endParaRPr lang="en-US" sz="900" dirty="0"/>
+          </a:p>
+        </p:txBody>
+      </p:sp>
     </p:spTree>
   </p:cSld>
   <p:clrMapOvr>
@@ -3282,7 +3321,7 @@
                 <a:ea typeface="Aptos" pitchFamily="34" charset="-122"/>
                 <a:cs typeface="Aptos" pitchFamily="34" charset="-120"/>
               </a:rPr>
-              <a:t>© Paula Soper</a:t>
+              <a:t>Â© Paula Soper</a:t>
             </a:r>
             <a:endParaRPr lang="en-US" sz="800" dirty="0"/>
           </a:p>
@@ -3296,8 +3335,47 @@
         </p:nvSpPr>
         <p:spPr>
           <a:xfrm>
+            <a:off x="11137392" y="6510528"/>
+            <a:ext cx="411480" cy="201168"/>
+          </a:xfrm>
+          <a:prstGeom prst="rect">
+            <a:avLst/>
+          </a:prstGeom>
+          <a:noFill/>
+          <a:ln/>
+        </p:spPr>
+        <p:txBody>
+          <a:bodyPr wrap="square" lIns="0" tIns="0" rIns="0" bIns="0" rtlCol="0" anchor="ctr"/>
+          <a:lstStyle/>
+          <a:p>
+            <a:pPr algn="r" indent="0" marL="0">
+              <a:buNone/>
+            </a:pPr>
+            <a:r>
+              <a:rPr lang="en-US" sz="900" dirty="0">
+                <a:solidFill>
+                  <a:srgbClr val="5F7181"/>
+                </a:solidFill>
+                <a:latin typeface="Aptos" pitchFamily="34" charset="0"/>
+                <a:ea typeface="Aptos" pitchFamily="34" charset="-122"/>
+                <a:cs typeface="Aptos" pitchFamily="34" charset="-120"/>
+              </a:rPr>
+              <a:t>10</a:t>
+            </a:r>
+            <a:endParaRPr lang="en-US" sz="900" dirty="0"/>
+          </a:p>
+        </p:txBody>
+      </p:sp>
+      <p:sp>
+        <p:nvSpPr>
+          <p:cNvPr id="8" name="Text 6"/>
+          <p:cNvSpPr/>
+          <p:nvPr/>
+        </p:nvSpPr>
+        <p:spPr>
+          <a:xfrm>
             <a:off x="640080" y="658368"/>
-            <a:ext cx="10881360" cy="566928"/>
+            <a:ext cx="10881360" cy="713232"/>
           </a:xfrm>
           <a:prstGeom prst="rect">
             <a:avLst/>
@@ -3315,7 +3393,7 @@
               <a:buNone/>
             </a:pPr>
             <a:r>
-              <a:rPr lang="en-US" sz="2700" b="1" dirty="0">
+              <a:rPr lang="en-US" sz="3400" b="1" dirty="0">
                 <a:solidFill>
                   <a:srgbClr val="003A63"/>
                 </a:solidFill>
@@ -3325,20 +3403,20 @@
               </a:rPr>
               <a:t>Core Concepts Continued</a:t>
             </a:r>
-            <a:endParaRPr lang="en-US" sz="2700" dirty="0"/>
-          </a:p>
-        </p:txBody>
-      </p:sp>
-      <p:sp>
-        <p:nvSpPr>
-          <p:cNvPr id="8" name="Text 6"/>
-          <p:cNvSpPr/>
-          <p:nvPr/>
-        </p:nvSpPr>
-        <p:spPr>
-          <a:xfrm>
-            <a:off x="868680" y="1417320"/>
-            <a:ext cx="6675120" cy="4434840"/>
+            <a:endParaRPr lang="en-US" sz="3400" dirty="0"/>
+          </a:p>
+        </p:txBody>
+      </p:sp>
+      <p:sp>
+        <p:nvSpPr>
+          <p:cNvPr id="9" name="Text 7"/>
+          <p:cNvSpPr/>
+          <p:nvPr/>
+        </p:nvSpPr>
+        <p:spPr>
+          <a:xfrm>
+            <a:off x="868680" y="1508760"/>
+            <a:ext cx="6537960" cy="4160520"/>
           </a:xfrm>
           <a:prstGeom prst="rect">
             <a:avLst/>
@@ -3353,7 +3431,7 @@
           <a:lstStyle/>
           <a:p>
             <a:r>
-              <a:rPr lang="en-US" sz="1700" dirty="0">
+              <a:rPr lang="en-US" sz="2100" dirty="0">
                 <a:solidFill>
                   <a:srgbClr val="17364A"/>
                 </a:solidFill>
@@ -3363,11 +3441,11 @@
               </a:rPr>
               <a:t>API.</a:t>
             </a:r>
-            <a:endParaRPr lang="en-US" sz="1700" dirty="0"/>
-          </a:p>
-          <a:p>
-            <a:r>
-              <a:rPr lang="en-US" sz="1700" dirty="0">
+            <a:endParaRPr lang="en-US" sz="2100" dirty="0"/>
+          </a:p>
+          <a:p>
+            <a:r>
+              <a:rPr lang="en-US" sz="2100" dirty="0">
                 <a:solidFill>
                   <a:srgbClr val="17364A"/>
                 </a:solidFill>
@@ -3377,11 +3455,11 @@
               </a:rPr>
               <a:t>An API allows one system to request data or services from another system.</a:t>
             </a:r>
-            <a:endParaRPr lang="en-US" sz="1700" dirty="0"/>
-          </a:p>
-          <a:p>
-            <a:r>
-              <a:rPr lang="en-US" sz="1700" dirty="0">
+            <a:endParaRPr lang="en-US" sz="2100" dirty="0"/>
+          </a:p>
+          <a:p>
+            <a:r>
+              <a:rPr lang="en-US" sz="2100" dirty="0">
                 <a:solidFill>
                   <a:srgbClr val="17364A"/>
                 </a:solidFill>
@@ -3389,29 +3467,15 @@
                 <a:ea typeface="Aptos" pitchFamily="34" charset="-122"/>
                 <a:cs typeface="Aptos" pitchFamily="34" charset="-120"/>
               </a:rPr>
-              <a:t>In AI workflows, APIs may support retrieval, task creation, status updates, or integration with systems of record.</a:t>
-            </a:r>
-            <a:endParaRPr lang="en-US" sz="1700" dirty="0"/>
-          </a:p>
-          <a:p>
-            <a:r>
-              <a:rPr lang="en-US" sz="1700" dirty="0">
-                <a:solidFill>
-                  <a:srgbClr val="17364A"/>
-                </a:solidFill>
-                <a:latin typeface="Aptos" pitchFamily="34" charset="0"/>
-                <a:ea typeface="Aptos" pitchFamily="34" charset="-122"/>
-                <a:cs typeface="Aptos" pitchFamily="34" charset="-120"/>
-              </a:rPr>
-              <a:t>API access must be governed by permissions, authentication, rate limits, logging, and intended use.</a:t>
-            </a:r>
-            <a:endParaRPr lang="en-US" sz="1700" dirty="0"/>
-          </a:p>
-        </p:txBody>
-      </p:sp>
-      <p:sp>
-        <p:nvSpPr>
-          <p:cNvPr id="9" name="Shape 7"/>
+              <a:t>In AI workflows, APIs may support retrieval, task creation, status updates, or integration with systems.</a:t>
+            </a:r>
+            <a:endParaRPr lang="en-US" sz="2100" dirty="0"/>
+          </a:p>
+        </p:txBody>
+      </p:sp>
+      <p:sp>
+        <p:nvSpPr>
+          <p:cNvPr id="10" name="Shape 8"/>
           <p:cNvSpPr/>
           <p:nvPr/>
         </p:nvSpPr>
@@ -3438,14 +3502,14 @@
       </p:sp>
       <p:sp>
         <p:nvSpPr>
-          <p:cNvPr id="10" name="Text 8"/>
+          <p:cNvPr id="11" name="Text 9"/>
           <p:cNvSpPr/>
           <p:nvPr/>
         </p:nvSpPr>
         <p:spPr>
           <a:xfrm>
             <a:off x="8074152" y="1563624"/>
-            <a:ext cx="2825496" cy="201168"/>
+            <a:ext cx="2825496" cy="256032"/>
           </a:xfrm>
           <a:prstGeom prst="rect">
             <a:avLst/>
@@ -3461,7 +3525,7 @@
               <a:buNone/>
             </a:pPr>
             <a:r>
-              <a:rPr lang="en-US" sz="950" b="1" dirty="0">
+              <a:rPr lang="en-US" sz="1300" b="1" dirty="0">
                 <a:solidFill>
                   <a:srgbClr val="0068B7"/>
                 </a:solidFill>
@@ -3471,20 +3535,20 @@
               </a:rPr>
               <a:t>Key idea</a:t>
             </a:r>
-            <a:endParaRPr lang="en-US" sz="950" dirty="0"/>
-          </a:p>
-        </p:txBody>
-      </p:sp>
-      <p:sp>
-        <p:nvSpPr>
-          <p:cNvPr id="11" name="Text 9"/>
-          <p:cNvSpPr/>
-          <p:nvPr/>
-        </p:nvSpPr>
-        <p:spPr>
-          <a:xfrm>
-            <a:off x="8074152" y="1856232"/>
-            <a:ext cx="2825496" cy="1261872"/>
+            <a:endParaRPr lang="en-US" sz="1300" dirty="0"/>
+          </a:p>
+        </p:txBody>
+      </p:sp>
+      <p:sp>
+        <p:nvSpPr>
+          <p:cNvPr id="12" name="Text 10"/>
+          <p:cNvSpPr/>
+          <p:nvPr/>
+        </p:nvSpPr>
+        <p:spPr>
+          <a:xfrm>
+            <a:off x="8074152" y="1920240"/>
+            <a:ext cx="2825496" cy="1188720"/>
           </a:xfrm>
           <a:prstGeom prst="rect">
             <a:avLst/>
@@ -3502,7 +3566,7 @@
               <a:buNone/>
             </a:pPr>
             <a:r>
-              <a:rPr lang="en-US" sz="1250" dirty="0">
+              <a:rPr lang="en-US" sz="1550" dirty="0">
                 <a:solidFill>
                   <a:srgbClr val="17364A"/>
                 </a:solidFill>
@@ -3512,13 +3576,13 @@
               </a:rPr>
               <a:t>API.</a:t>
             </a:r>
-            <a:endParaRPr lang="en-US" sz="1250" dirty="0"/>
-          </a:p>
-        </p:txBody>
-      </p:sp>
-      <p:sp>
-        <p:nvSpPr>
-          <p:cNvPr id="12" name="Shape 10"/>
+            <a:endParaRPr lang="en-US" sz="1550" dirty="0"/>
+          </a:p>
+        </p:txBody>
+      </p:sp>
+      <p:sp>
+        <p:nvSpPr>
+          <p:cNvPr id="13" name="Shape 11"/>
           <p:cNvSpPr/>
           <p:nvPr/>
         </p:nvSpPr>
@@ -3545,14 +3609,14 @@
       </p:sp>
       <p:sp>
         <p:nvSpPr>
-          <p:cNvPr id="13" name="Text 11"/>
+          <p:cNvPr id="14" name="Text 12"/>
           <p:cNvSpPr/>
           <p:nvPr/>
         </p:nvSpPr>
         <p:spPr>
           <a:xfrm>
             <a:off x="8074152" y="3666744"/>
-            <a:ext cx="2825496" cy="201168"/>
+            <a:ext cx="2825496" cy="256032"/>
           </a:xfrm>
           <a:prstGeom prst="rect">
             <a:avLst/>
@@ -3568,7 +3632,7 @@
               <a:buNone/>
             </a:pPr>
             <a:r>
-              <a:rPr lang="en-US" sz="950" b="1" dirty="0">
+              <a:rPr lang="en-US" sz="1300" b="1" dirty="0">
                 <a:solidFill>
                   <a:srgbClr val="0068B7"/>
                 </a:solidFill>
@@ -3578,20 +3642,20 @@
               </a:rPr>
               <a:t>Use this for</a:t>
             </a:r>
-            <a:endParaRPr lang="en-US" sz="950" dirty="0"/>
-          </a:p>
-        </p:txBody>
-      </p:sp>
-      <p:sp>
-        <p:nvSpPr>
-          <p:cNvPr id="14" name="Text 12"/>
-          <p:cNvSpPr/>
-          <p:nvPr/>
-        </p:nvSpPr>
-        <p:spPr>
-          <a:xfrm>
-            <a:off x="8074152" y="3959352"/>
-            <a:ext cx="2825496" cy="1170432"/>
+            <a:endParaRPr lang="en-US" sz="1300" dirty="0"/>
+          </a:p>
+        </p:txBody>
+      </p:sp>
+      <p:sp>
+        <p:nvSpPr>
+          <p:cNvPr id="15" name="Text 13"/>
+          <p:cNvSpPr/>
+          <p:nvPr/>
+        </p:nvSpPr>
+        <p:spPr>
+          <a:xfrm>
+            <a:off x="8074152" y="4023360"/>
+            <a:ext cx="2825496" cy="1097280"/>
           </a:xfrm>
           <a:prstGeom prst="rect">
             <a:avLst/>
@@ -3609,7 +3673,7 @@
               <a:buNone/>
             </a:pPr>
             <a:r>
-              <a:rPr lang="en-US" sz="1250" dirty="0">
+              <a:rPr lang="en-US" sz="1550" dirty="0">
                 <a:solidFill>
                   <a:srgbClr val="17364A"/>
                 </a:solidFill>
@@ -3619,7 +3683,7 @@
               </a:rPr>
               <a:t>Connect the concept to public health decisions, safeguards, documentation, or implementation work.</a:t>
             </a:r>
-            <a:endParaRPr lang="en-US" sz="1250" dirty="0"/>
+            <a:endParaRPr lang="en-US" sz="1550" dirty="0"/>
           </a:p>
         </p:txBody>
       </p:sp>
@@ -3816,7 +3880,7 @@
                 <a:ea typeface="Aptos" pitchFamily="34" charset="-122"/>
                 <a:cs typeface="Aptos" pitchFamily="34" charset="-120"/>
               </a:rPr>
-              <a:t>© Paula Soper</a:t>
+              <a:t>Â© Paula Soper</a:t>
             </a:r>
             <a:endParaRPr lang="en-US" sz="800" dirty="0"/>
           </a:p>
@@ -3824,7 +3888,46 @@
       </p:sp>
       <p:sp>
         <p:nvSpPr>
-          <p:cNvPr id="7" name="Shape 5"/>
+          <p:cNvPr id="7" name="Text 5"/>
+          <p:cNvSpPr/>
+          <p:nvPr/>
+        </p:nvSpPr>
+        <p:spPr>
+          <a:xfrm>
+            <a:off x="11137392" y="6510528"/>
+            <a:ext cx="411480" cy="201168"/>
+          </a:xfrm>
+          <a:prstGeom prst="rect">
+            <a:avLst/>
+          </a:prstGeom>
+          <a:noFill/>
+          <a:ln/>
+        </p:spPr>
+        <p:txBody>
+          <a:bodyPr wrap="square" lIns="0" tIns="0" rIns="0" bIns="0" rtlCol="0" anchor="ctr"/>
+          <a:lstStyle/>
+          <a:p>
+            <a:pPr algn="r" indent="0" marL="0">
+              <a:buNone/>
+            </a:pPr>
+            <a:r>
+              <a:rPr lang="en-US" sz="900" dirty="0">
+                <a:solidFill>
+                  <a:srgbClr val="5F7181"/>
+                </a:solidFill>
+                <a:latin typeface="Aptos" pitchFamily="34" charset="0"/>
+                <a:ea typeface="Aptos" pitchFamily="34" charset="-122"/>
+                <a:cs typeface="Aptos" pitchFamily="34" charset="-120"/>
+              </a:rPr>
+              <a:t>11</a:t>
+            </a:r>
+            <a:endParaRPr lang="en-US" sz="900" dirty="0"/>
+          </a:p>
+        </p:txBody>
+      </p:sp>
+      <p:sp>
+        <p:nvSpPr>
+          <p:cNvPr id="8" name="Shape 6"/>
           <p:cNvSpPr/>
           <p:nvPr/>
         </p:nvSpPr>
@@ -3849,7 +3952,7 @@
       </p:sp>
       <p:sp>
         <p:nvSpPr>
-          <p:cNvPr id="8" name="Text 6"/>
+          <p:cNvPr id="9" name="Text 7"/>
           <p:cNvSpPr/>
           <p:nvPr/>
         </p:nvSpPr>
@@ -3888,14 +3991,14 @@
       </p:sp>
       <p:sp>
         <p:nvSpPr>
-          <p:cNvPr id="9" name="Text 7"/>
+          <p:cNvPr id="10" name="Text 8"/>
           <p:cNvSpPr/>
           <p:nvPr/>
         </p:nvSpPr>
         <p:spPr>
           <a:xfrm>
             <a:off x="640080" y="621792"/>
-            <a:ext cx="10881360" cy="566928"/>
+            <a:ext cx="10881360" cy="713232"/>
           </a:xfrm>
           <a:prstGeom prst="rect">
             <a:avLst/>
@@ -3913,7 +4016,7 @@
               <a:buNone/>
             </a:pPr>
             <a:r>
-              <a:rPr lang="en-US" sz="2700" b="1" dirty="0">
+              <a:rPr lang="en-US" sz="3400" b="1" dirty="0">
                 <a:solidFill>
                   <a:srgbClr val="003A63"/>
                 </a:solidFill>
@@ -3923,20 +4026,20 @@
               </a:rPr>
               <a:t>Public Health Example</a:t>
             </a:r>
-            <a:endParaRPr lang="en-US" sz="2700" dirty="0"/>
-          </a:p>
-        </p:txBody>
-      </p:sp>
-      <p:sp>
-        <p:nvSpPr>
-          <p:cNvPr id="10" name="Text 8"/>
-          <p:cNvSpPr/>
-          <p:nvPr/>
-        </p:nvSpPr>
-        <p:spPr>
-          <a:xfrm>
-            <a:off x="868680" y="1417320"/>
-            <a:ext cx="6675120" cy="4434840"/>
+            <a:endParaRPr lang="en-US" sz="3400" dirty="0"/>
+          </a:p>
+        </p:txBody>
+      </p:sp>
+      <p:sp>
+        <p:nvSpPr>
+          <p:cNvPr id="11" name="Text 9"/>
+          <p:cNvSpPr/>
+          <p:nvPr/>
+        </p:nvSpPr>
+        <p:spPr>
+          <a:xfrm>
+            <a:off x="868680" y="1508760"/>
+            <a:ext cx="6537960" cy="4160520"/>
           </a:xfrm>
           <a:prstGeom prst="rect">
             <a:avLst/>
@@ -3951,7 +4054,7 @@
           <a:lstStyle/>
           <a:p>
             <a:r>
-              <a:rPr lang="en-US" sz="1700" dirty="0">
+              <a:rPr lang="en-US" sz="2100" dirty="0">
                 <a:solidFill>
                   <a:srgbClr val="17364A"/>
                 </a:solidFill>
@@ -3961,11 +4064,11 @@
               </a:rPr>
               <a:t>An immunization information system may receive HL7 v2 VXU messages from providers and pharmacies.</a:t>
             </a:r>
-            <a:endParaRPr lang="en-US" sz="1700" dirty="0"/>
-          </a:p>
-          <a:p>
-            <a:r>
-              <a:rPr lang="en-US" sz="1700" dirty="0">
+            <a:endParaRPr lang="en-US" sz="2100" dirty="0"/>
+          </a:p>
+          <a:p>
+            <a:r>
+              <a:rPr lang="en-US" sz="2100" dirty="0">
                 <a:solidFill>
                   <a:srgbClr val="17364A"/>
                 </a:solidFill>
@@ -3973,13 +4076,13 @@
                 <a:ea typeface="Aptos" pitchFamily="34" charset="-122"/>
                 <a:cs typeface="Aptos" pitchFamily="34" charset="-120"/>
               </a:rPr>
-              <a:t>If an AI tool is used to identify vaccination gaps or generate reminder lists, it depends on correctly parsed vaccine.</a:t>
-            </a:r>
-            <a:endParaRPr lang="en-US" sz="1700" dirty="0"/>
-          </a:p>
-          <a:p>
-            <a:r>
-              <a:rPr lang="en-US" sz="1700" dirty="0">
+              <a:t>If an AI tool is used to identify vaccination gaps or generate reminder lists, it depends on correctly.</a:t>
+            </a:r>
+            <a:endParaRPr lang="en-US" sz="2100" dirty="0"/>
+          </a:p>
+          <a:p>
+            <a:r>
+              <a:rPr lang="en-US" sz="2100" dirty="0">
                 <a:solidFill>
                   <a:srgbClr val="17364A"/>
                 </a:solidFill>
@@ -3987,29 +4090,15 @@
                 <a:ea typeface="Aptos" pitchFamily="34" charset="-122"/>
                 <a:cs typeface="Aptos" pitchFamily="34" charset="-120"/>
               </a:rPr>
-              <a:t>Interoperability failures can look like epidemiologic gaps even when the problem is actually message quality.</a:t>
-            </a:r>
-            <a:endParaRPr lang="en-US" sz="1700" dirty="0"/>
-          </a:p>
-          <a:p>
-            <a:r>
-              <a:rPr lang="en-US" sz="1700" dirty="0">
-                <a:solidFill>
-                  <a:srgbClr val="17364A"/>
-                </a:solidFill>
-                <a:latin typeface="Aptos" pitchFamily="34" charset="0"/>
-                <a:ea typeface="Aptos" pitchFamily="34" charset="-122"/>
-                <a:cs typeface="Aptos" pitchFamily="34" charset="-120"/>
-              </a:rPr>
-              <a:t>A public health agency exploring AI-supported case summaries from EHR data may need to understand whether the data arrive.</a:t>
-            </a:r>
-            <a:endParaRPr lang="en-US" sz="1700" dirty="0"/>
-          </a:p>
-        </p:txBody>
-      </p:sp>
-      <p:sp>
-        <p:nvSpPr>
-          <p:cNvPr id="11" name="Shape 9"/>
+              <a:t>Interoperability failures can look like epidemiologic gaps even when the problem is actually message.</a:t>
+            </a:r>
+            <a:endParaRPr lang="en-US" sz="2100" dirty="0"/>
+          </a:p>
+        </p:txBody>
+      </p:sp>
+      <p:sp>
+        <p:nvSpPr>
+          <p:cNvPr id="12" name="Shape 10"/>
           <p:cNvSpPr/>
           <p:nvPr/>
         </p:nvSpPr>
@@ -4036,14 +4125,14 @@
       </p:sp>
       <p:sp>
         <p:nvSpPr>
-          <p:cNvPr id="12" name="Text 10"/>
+          <p:cNvPr id="13" name="Text 11"/>
           <p:cNvSpPr/>
           <p:nvPr/>
         </p:nvSpPr>
         <p:spPr>
           <a:xfrm>
             <a:off x="8074152" y="1563624"/>
-            <a:ext cx="2825496" cy="201168"/>
+            <a:ext cx="2825496" cy="256032"/>
           </a:xfrm>
           <a:prstGeom prst="rect">
             <a:avLst/>
@@ -4059,7 +4148,7 @@
               <a:buNone/>
             </a:pPr>
             <a:r>
-              <a:rPr lang="en-US" sz="950" b="1" dirty="0">
+              <a:rPr lang="en-US" sz="1300" b="1" dirty="0">
                 <a:solidFill>
                   <a:srgbClr val="0068B7"/>
                 </a:solidFill>
@@ -4069,20 +4158,20 @@
               </a:rPr>
               <a:t>Key idea</a:t>
             </a:r>
-            <a:endParaRPr lang="en-US" sz="950" dirty="0"/>
-          </a:p>
-        </p:txBody>
-      </p:sp>
-      <p:sp>
-        <p:nvSpPr>
-          <p:cNvPr id="13" name="Text 11"/>
-          <p:cNvSpPr/>
-          <p:nvPr/>
-        </p:nvSpPr>
-        <p:spPr>
-          <a:xfrm>
-            <a:off x="8074152" y="1856232"/>
-            <a:ext cx="2825496" cy="1261872"/>
+            <a:endParaRPr lang="en-US" sz="1300" dirty="0"/>
+          </a:p>
+        </p:txBody>
+      </p:sp>
+      <p:sp>
+        <p:nvSpPr>
+          <p:cNvPr id="14" name="Text 12"/>
+          <p:cNvSpPr/>
+          <p:nvPr/>
+        </p:nvSpPr>
+        <p:spPr>
+          <a:xfrm>
+            <a:off x="8074152" y="1920240"/>
+            <a:ext cx="2825496" cy="1188720"/>
           </a:xfrm>
           <a:prstGeom prst="rect">
             <a:avLst/>
@@ -4100,7 +4189,7 @@
               <a:buNone/>
             </a:pPr>
             <a:r>
-              <a:rPr lang="en-US" sz="1250" dirty="0">
+              <a:rPr lang="en-US" sz="1550" dirty="0">
                 <a:solidFill>
                   <a:srgbClr val="17364A"/>
                 </a:solidFill>
@@ -4110,13 +4199,13 @@
               </a:rPr>
               <a:t>An immunization information system may receive HL7 v2 VXU messages from providers and pharmacies.</a:t>
             </a:r>
-            <a:endParaRPr lang="en-US" sz="1250" dirty="0"/>
-          </a:p>
-        </p:txBody>
-      </p:sp>
-      <p:sp>
-        <p:nvSpPr>
-          <p:cNvPr id="14" name="Shape 12"/>
+            <a:endParaRPr lang="en-US" sz="1550" dirty="0"/>
+          </a:p>
+        </p:txBody>
+      </p:sp>
+      <p:sp>
+        <p:nvSpPr>
+          <p:cNvPr id="15" name="Shape 13"/>
           <p:cNvSpPr/>
           <p:nvPr/>
         </p:nvSpPr>
@@ -4143,14 +4232,14 @@
       </p:sp>
       <p:sp>
         <p:nvSpPr>
-          <p:cNvPr id="15" name="Text 13"/>
+          <p:cNvPr id="16" name="Text 14"/>
           <p:cNvSpPr/>
           <p:nvPr/>
         </p:nvSpPr>
         <p:spPr>
           <a:xfrm>
             <a:off x="8074152" y="3666744"/>
-            <a:ext cx="2825496" cy="201168"/>
+            <a:ext cx="2825496" cy="256032"/>
           </a:xfrm>
           <a:prstGeom prst="rect">
             <a:avLst/>
@@ -4166,7 +4255,7 @@
               <a:buNone/>
             </a:pPr>
             <a:r>
-              <a:rPr lang="en-US" sz="950" b="1" dirty="0">
+              <a:rPr lang="en-US" sz="1300" b="1" dirty="0">
                 <a:solidFill>
                   <a:srgbClr val="0068B7"/>
                 </a:solidFill>
@@ -4176,20 +4265,20 @@
               </a:rPr>
               <a:t>Use this for</a:t>
             </a:r>
-            <a:endParaRPr lang="en-US" sz="950" dirty="0"/>
-          </a:p>
-        </p:txBody>
-      </p:sp>
-      <p:sp>
-        <p:nvSpPr>
-          <p:cNvPr id="16" name="Text 14"/>
-          <p:cNvSpPr/>
-          <p:nvPr/>
-        </p:nvSpPr>
-        <p:spPr>
-          <a:xfrm>
-            <a:off x="8074152" y="3959352"/>
-            <a:ext cx="2825496" cy="1170432"/>
+            <a:endParaRPr lang="en-US" sz="1300" dirty="0"/>
+          </a:p>
+        </p:txBody>
+      </p:sp>
+      <p:sp>
+        <p:nvSpPr>
+          <p:cNvPr id="17" name="Text 15"/>
+          <p:cNvSpPr/>
+          <p:nvPr/>
+        </p:nvSpPr>
+        <p:spPr>
+          <a:xfrm>
+            <a:off x="8074152" y="4023360"/>
+            <a:ext cx="2825496" cy="1097280"/>
           </a:xfrm>
           <a:prstGeom prst="rect">
             <a:avLst/>
@@ -4207,7 +4296,7 @@
               <a:buNone/>
             </a:pPr>
             <a:r>
-              <a:rPr lang="en-US" sz="1250" dirty="0">
+              <a:rPr lang="en-US" sz="1550" dirty="0">
                 <a:solidFill>
                   <a:srgbClr val="17364A"/>
                 </a:solidFill>
@@ -4217,7 +4306,7 @@
               </a:rPr>
               <a:t>Connect the concept to public health decisions, safeguards, documentation, or implementation work.</a:t>
             </a:r>
-            <a:endParaRPr lang="en-US" sz="1250" dirty="0"/>
+            <a:endParaRPr lang="en-US" sz="1550" dirty="0"/>
           </a:p>
         </p:txBody>
       </p:sp>
@@ -4414,7 +4503,7 @@
                 <a:ea typeface="Aptos" pitchFamily="34" charset="-122"/>
                 <a:cs typeface="Aptos" pitchFamily="34" charset="-120"/>
               </a:rPr>
-              <a:t>© Paula Soper</a:t>
+              <a:t>Â© Paula Soper</a:t>
             </a:r>
             <a:endParaRPr lang="en-US" sz="800" dirty="0"/>
           </a:p>
@@ -4422,7 +4511,46 @@
       </p:sp>
       <p:sp>
         <p:nvSpPr>
-          <p:cNvPr id="7" name="Shape 5"/>
+          <p:cNvPr id="7" name="Text 5"/>
+          <p:cNvSpPr/>
+          <p:nvPr/>
+        </p:nvSpPr>
+        <p:spPr>
+          <a:xfrm>
+            <a:off x="11137392" y="6510528"/>
+            <a:ext cx="411480" cy="201168"/>
+          </a:xfrm>
+          <a:prstGeom prst="rect">
+            <a:avLst/>
+          </a:prstGeom>
+          <a:noFill/>
+          <a:ln/>
+        </p:spPr>
+        <p:txBody>
+          <a:bodyPr wrap="square" lIns="0" tIns="0" rIns="0" bIns="0" rtlCol="0" anchor="ctr"/>
+          <a:lstStyle/>
+          <a:p>
+            <a:pPr algn="r" indent="0" marL="0">
+              <a:buNone/>
+            </a:pPr>
+            <a:r>
+              <a:rPr lang="en-US" sz="900" dirty="0">
+                <a:solidFill>
+                  <a:srgbClr val="5F7181"/>
+                </a:solidFill>
+                <a:latin typeface="Aptos" pitchFamily="34" charset="0"/>
+                <a:ea typeface="Aptos" pitchFamily="34" charset="-122"/>
+                <a:cs typeface="Aptos" pitchFamily="34" charset="-120"/>
+              </a:rPr>
+              <a:t>12</a:t>
+            </a:r>
+            <a:endParaRPr lang="en-US" sz="900" dirty="0"/>
+          </a:p>
+        </p:txBody>
+      </p:sp>
+      <p:sp>
+        <p:nvSpPr>
+          <p:cNvPr id="8" name="Shape 6"/>
           <p:cNvSpPr/>
           <p:nvPr/>
         </p:nvSpPr>
@@ -4447,7 +4575,7 @@
       </p:sp>
       <p:sp>
         <p:nvSpPr>
-          <p:cNvPr id="8" name="Text 6"/>
+          <p:cNvPr id="9" name="Text 7"/>
           <p:cNvSpPr/>
           <p:nvPr/>
         </p:nvSpPr>
@@ -4486,14 +4614,14 @@
       </p:sp>
       <p:sp>
         <p:nvSpPr>
-          <p:cNvPr id="9" name="Text 7"/>
+          <p:cNvPr id="10" name="Text 8"/>
           <p:cNvSpPr/>
           <p:nvPr/>
         </p:nvSpPr>
         <p:spPr>
           <a:xfrm>
             <a:off x="640080" y="621792"/>
-            <a:ext cx="10881360" cy="566928"/>
+            <a:ext cx="10881360" cy="713232"/>
           </a:xfrm>
           <a:prstGeom prst="rect">
             <a:avLst/>
@@ -4511,7 +4639,7 @@
               <a:buNone/>
             </a:pPr>
             <a:r>
-              <a:rPr lang="en-US" sz="2700" b="1" dirty="0">
+              <a:rPr lang="en-US" sz="3400" b="1" dirty="0">
                 <a:solidFill>
                   <a:srgbClr val="003A63"/>
                 </a:solidFill>
@@ -4521,20 +4649,20 @@
               </a:rPr>
               <a:t>Technical Deep Dive</a:t>
             </a:r>
-            <a:endParaRPr lang="en-US" sz="2700" dirty="0"/>
-          </a:p>
-        </p:txBody>
-      </p:sp>
-      <p:sp>
-        <p:nvSpPr>
-          <p:cNvPr id="10" name="Text 8"/>
-          <p:cNvSpPr/>
-          <p:nvPr/>
-        </p:nvSpPr>
-        <p:spPr>
-          <a:xfrm>
-            <a:off x="868680" y="1417320"/>
-            <a:ext cx="6675120" cy="4434840"/>
+            <a:endParaRPr lang="en-US" sz="3400" dirty="0"/>
+          </a:p>
+        </p:txBody>
+      </p:sp>
+      <p:sp>
+        <p:nvSpPr>
+          <p:cNvPr id="11" name="Text 9"/>
+          <p:cNvSpPr/>
+          <p:nvPr/>
+        </p:nvSpPr>
+        <p:spPr>
+          <a:xfrm>
+            <a:off x="868680" y="1508760"/>
+            <a:ext cx="6537960" cy="4160520"/>
           </a:xfrm>
           <a:prstGeom prst="rect">
             <a:avLst/>
@@ -4549,7 +4677,7 @@
           <a:lstStyle/>
           <a:p>
             <a:r>
-              <a:rPr lang="en-US" sz="1700" dirty="0">
+              <a:rPr lang="en-US" sz="2100" dirty="0">
                 <a:solidFill>
                   <a:srgbClr val="17364A"/>
                 </a:solidFill>
@@ -4557,13 +4685,13 @@
                 <a:ea typeface="Aptos" pitchFamily="34" charset="-122"/>
                 <a:cs typeface="Aptos" pitchFamily="34" charset="-120"/>
               </a:rPr>
-              <a:t>Interoperability review starts by identifying the sending system, receiving system, exchange standard, data elements, and.</a:t>
-            </a:r>
-            <a:endParaRPr lang="en-US" sz="1700" dirty="0"/>
-          </a:p>
-          <a:p>
-            <a:r>
-              <a:rPr lang="en-US" sz="1700" dirty="0">
+              <a:t>Interoperability review starts by identifying the sending system, receiving system, exchange standard,.</a:t>
+            </a:r>
+            <a:endParaRPr lang="en-US" sz="2100" dirty="0"/>
+          </a:p>
+          <a:p>
+            <a:r>
+              <a:rPr lang="en-US" sz="2100" dirty="0">
                 <a:solidFill>
                   <a:srgbClr val="17364A"/>
                 </a:solidFill>
@@ -4573,11 +4701,11 @@
               </a:rPr>
               <a:t>Staff should ask whether the workflow uses messages, documents, resources, files, or manual entry.</a:t>
             </a:r>
-            <a:endParaRPr lang="en-US" sz="1700" dirty="0"/>
-          </a:p>
-          <a:p>
-            <a:r>
-              <a:rPr lang="en-US" sz="1700" dirty="0">
+            <a:endParaRPr lang="en-US" sz="2100" dirty="0"/>
+          </a:p>
+          <a:p>
+            <a:r>
+              <a:rPr lang="en-US" sz="2100" dirty="0">
                 <a:solidFill>
                   <a:srgbClr val="17364A"/>
                 </a:solidFill>
@@ -4585,29 +4713,15 @@
                 <a:ea typeface="Aptos" pitchFamily="34" charset="-122"/>
                 <a:cs typeface="Aptos" pitchFamily="34" charset="-120"/>
               </a:rPr>
-              <a:t>They should also identify required terminology systems, such as LOINC, SNOMED CT, CVX, ICD-10-CM, UCUM, or local codes.</a:t>
-            </a:r>
-            <a:endParaRPr lang="en-US" sz="1700" dirty="0"/>
-          </a:p>
-          <a:p>
-            <a:r>
-              <a:rPr lang="en-US" sz="1700" dirty="0">
-                <a:solidFill>
-                  <a:srgbClr val="17364A"/>
-                </a:solidFill>
-                <a:latin typeface="Aptos" pitchFamily="34" charset="0"/>
-                <a:ea typeface="Aptos" pitchFamily="34" charset="-122"/>
-                <a:cs typeface="Aptos" pitchFamily="34" charset="-120"/>
-              </a:rPr>
-              <a:t>Validation is a central part of interoperability.</a:t>
-            </a:r>
-            <a:endParaRPr lang="en-US" sz="1700" dirty="0"/>
-          </a:p>
-        </p:txBody>
-      </p:sp>
-      <p:sp>
-        <p:nvSpPr>
-          <p:cNvPr id="11" name="Shape 9"/>
+              <a:t>They should also identify required terminology systems, such as LOINC, SNOMED CT, CVX, ICD-10-CM, UCUM,.</a:t>
+            </a:r>
+            <a:endParaRPr lang="en-US" sz="2100" dirty="0"/>
+          </a:p>
+        </p:txBody>
+      </p:sp>
+      <p:sp>
+        <p:nvSpPr>
+          <p:cNvPr id="12" name="Shape 10"/>
           <p:cNvSpPr/>
           <p:nvPr/>
         </p:nvSpPr>
@@ -4634,14 +4748,14 @@
       </p:sp>
       <p:sp>
         <p:nvSpPr>
-          <p:cNvPr id="12" name="Text 10"/>
+          <p:cNvPr id="13" name="Text 11"/>
           <p:cNvSpPr/>
           <p:nvPr/>
         </p:nvSpPr>
         <p:spPr>
           <a:xfrm>
             <a:off x="8074152" y="1563624"/>
-            <a:ext cx="2825496" cy="201168"/>
+            <a:ext cx="2825496" cy="256032"/>
           </a:xfrm>
           <a:prstGeom prst="rect">
             <a:avLst/>
@@ -4657,7 +4771,7 @@
               <a:buNone/>
             </a:pPr>
             <a:r>
-              <a:rPr lang="en-US" sz="950" b="1" dirty="0">
+              <a:rPr lang="en-US" sz="1300" b="1" dirty="0">
                 <a:solidFill>
                   <a:srgbClr val="0068B7"/>
                 </a:solidFill>
@@ -4667,20 +4781,20 @@
               </a:rPr>
               <a:t>Key idea</a:t>
             </a:r>
-            <a:endParaRPr lang="en-US" sz="950" dirty="0"/>
-          </a:p>
-        </p:txBody>
-      </p:sp>
-      <p:sp>
-        <p:nvSpPr>
-          <p:cNvPr id="13" name="Text 11"/>
-          <p:cNvSpPr/>
-          <p:nvPr/>
-        </p:nvSpPr>
-        <p:spPr>
-          <a:xfrm>
-            <a:off x="8074152" y="1856232"/>
-            <a:ext cx="2825496" cy="1261872"/>
+            <a:endParaRPr lang="en-US" sz="1300" dirty="0"/>
+          </a:p>
+        </p:txBody>
+      </p:sp>
+      <p:sp>
+        <p:nvSpPr>
+          <p:cNvPr id="14" name="Text 12"/>
+          <p:cNvSpPr/>
+          <p:nvPr/>
+        </p:nvSpPr>
+        <p:spPr>
+          <a:xfrm>
+            <a:off x="8074152" y="1920240"/>
+            <a:ext cx="2825496" cy="1188720"/>
           </a:xfrm>
           <a:prstGeom prst="rect">
             <a:avLst/>
@@ -4698,7 +4812,7 @@
               <a:buNone/>
             </a:pPr>
             <a:r>
-              <a:rPr lang="en-US" sz="1250" dirty="0">
+              <a:rPr lang="en-US" sz="1550" dirty="0">
                 <a:solidFill>
                   <a:srgbClr val="17364A"/>
                 </a:solidFill>
@@ -4706,15 +4820,15 @@
                 <a:ea typeface="Aptos" pitchFamily="34" charset="-122"/>
                 <a:cs typeface="Aptos" pitchFamily="34" charset="-120"/>
               </a:rPr>
-              <a:t>Interoperability review starts by identifying the sending system, receiving system, exchange standard, data elements, and.</a:t>
-            </a:r>
-            <a:endParaRPr lang="en-US" sz="1250" dirty="0"/>
-          </a:p>
-        </p:txBody>
-      </p:sp>
-      <p:sp>
-        <p:nvSpPr>
-          <p:cNvPr id="14" name="Shape 12"/>
+              <a:t>Interoperability review starts by identifying the sending system, receiving system, exchange standard,.</a:t>
+            </a:r>
+            <a:endParaRPr lang="en-US" sz="1550" dirty="0"/>
+          </a:p>
+        </p:txBody>
+      </p:sp>
+      <p:sp>
+        <p:nvSpPr>
+          <p:cNvPr id="15" name="Shape 13"/>
           <p:cNvSpPr/>
           <p:nvPr/>
         </p:nvSpPr>
@@ -4741,14 +4855,14 @@
       </p:sp>
       <p:sp>
         <p:nvSpPr>
-          <p:cNvPr id="15" name="Text 13"/>
+          <p:cNvPr id="16" name="Text 14"/>
           <p:cNvSpPr/>
           <p:nvPr/>
         </p:nvSpPr>
         <p:spPr>
           <a:xfrm>
             <a:off x="8074152" y="3666744"/>
-            <a:ext cx="2825496" cy="201168"/>
+            <a:ext cx="2825496" cy="256032"/>
           </a:xfrm>
           <a:prstGeom prst="rect">
             <a:avLst/>
@@ -4764,7 +4878,7 @@
               <a:buNone/>
             </a:pPr>
             <a:r>
-              <a:rPr lang="en-US" sz="950" b="1" dirty="0">
+              <a:rPr lang="en-US" sz="1300" b="1" dirty="0">
                 <a:solidFill>
                   <a:srgbClr val="0068B7"/>
                 </a:solidFill>
@@ -4774,20 +4888,20 @@
               </a:rPr>
               <a:t>Use this for</a:t>
             </a:r>
-            <a:endParaRPr lang="en-US" sz="950" dirty="0"/>
-          </a:p>
-        </p:txBody>
-      </p:sp>
-      <p:sp>
-        <p:nvSpPr>
-          <p:cNvPr id="16" name="Text 14"/>
-          <p:cNvSpPr/>
-          <p:nvPr/>
-        </p:nvSpPr>
-        <p:spPr>
-          <a:xfrm>
-            <a:off x="8074152" y="3959352"/>
-            <a:ext cx="2825496" cy="1170432"/>
+            <a:endParaRPr lang="en-US" sz="1300" dirty="0"/>
+          </a:p>
+        </p:txBody>
+      </p:sp>
+      <p:sp>
+        <p:nvSpPr>
+          <p:cNvPr id="17" name="Text 15"/>
+          <p:cNvSpPr/>
+          <p:nvPr/>
+        </p:nvSpPr>
+        <p:spPr>
+          <a:xfrm>
+            <a:off x="8074152" y="4023360"/>
+            <a:ext cx="2825496" cy="1097280"/>
           </a:xfrm>
           <a:prstGeom prst="rect">
             <a:avLst/>
@@ -4805,7 +4919,7 @@
               <a:buNone/>
             </a:pPr>
             <a:r>
-              <a:rPr lang="en-US" sz="1250" dirty="0">
+              <a:rPr lang="en-US" sz="1550" dirty="0">
                 <a:solidFill>
                   <a:srgbClr val="17364A"/>
                 </a:solidFill>
@@ -4815,7 +4929,7 @@
               </a:rPr>
               <a:t>Connect the concept to public health decisions, safeguards, documentation, or implementation work.</a:t>
             </a:r>
-            <a:endParaRPr lang="en-US" sz="1250" dirty="0"/>
+            <a:endParaRPr lang="en-US" sz="1550" dirty="0"/>
           </a:p>
         </p:txBody>
       </p:sp>
@@ -5012,7 +5126,7 @@
                 <a:ea typeface="Aptos" pitchFamily="34" charset="-122"/>
                 <a:cs typeface="Aptos" pitchFamily="34" charset="-120"/>
               </a:rPr>
-              <a:t>© Paula Soper</a:t>
+              <a:t>Â© Paula Soper</a:t>
             </a:r>
             <a:endParaRPr lang="en-US" sz="800" dirty="0"/>
           </a:p>
@@ -5020,7 +5134,46 @@
       </p:sp>
       <p:sp>
         <p:nvSpPr>
-          <p:cNvPr id="7" name="Shape 5"/>
+          <p:cNvPr id="7" name="Text 5"/>
+          <p:cNvSpPr/>
+          <p:nvPr/>
+        </p:nvSpPr>
+        <p:spPr>
+          <a:xfrm>
+            <a:off x="11137392" y="6510528"/>
+            <a:ext cx="411480" cy="201168"/>
+          </a:xfrm>
+          <a:prstGeom prst="rect">
+            <a:avLst/>
+          </a:prstGeom>
+          <a:noFill/>
+          <a:ln/>
+        </p:spPr>
+        <p:txBody>
+          <a:bodyPr wrap="square" lIns="0" tIns="0" rIns="0" bIns="0" rtlCol="0" anchor="ctr"/>
+          <a:lstStyle/>
+          <a:p>
+            <a:pPr algn="r" indent="0" marL="0">
+              <a:buNone/>
+            </a:pPr>
+            <a:r>
+              <a:rPr lang="en-US" sz="900" dirty="0">
+                <a:solidFill>
+                  <a:srgbClr val="5F7181"/>
+                </a:solidFill>
+                <a:latin typeface="Aptos" pitchFamily="34" charset="0"/>
+                <a:ea typeface="Aptos" pitchFamily="34" charset="-122"/>
+                <a:cs typeface="Aptos" pitchFamily="34" charset="-120"/>
+              </a:rPr>
+              <a:t>13</a:t>
+            </a:r>
+            <a:endParaRPr lang="en-US" sz="900" dirty="0"/>
+          </a:p>
+        </p:txBody>
+      </p:sp>
+      <p:sp>
+        <p:nvSpPr>
+          <p:cNvPr id="8" name="Shape 6"/>
           <p:cNvSpPr/>
           <p:nvPr/>
         </p:nvSpPr>
@@ -5045,7 +5198,7 @@
       </p:sp>
       <p:sp>
         <p:nvSpPr>
-          <p:cNvPr id="8" name="Text 6"/>
+          <p:cNvPr id="9" name="Text 7"/>
           <p:cNvSpPr/>
           <p:nvPr/>
         </p:nvSpPr>
@@ -5084,14 +5237,14 @@
       </p:sp>
       <p:sp>
         <p:nvSpPr>
-          <p:cNvPr id="9" name="Text 7"/>
+          <p:cNvPr id="10" name="Text 8"/>
           <p:cNvSpPr/>
           <p:nvPr/>
         </p:nvSpPr>
         <p:spPr>
           <a:xfrm>
             <a:off x="640080" y="621792"/>
-            <a:ext cx="10881360" cy="566928"/>
+            <a:ext cx="10881360" cy="713232"/>
           </a:xfrm>
           <a:prstGeom prst="rect">
             <a:avLst/>
@@ -5109,7 +5262,7 @@
               <a:buNone/>
             </a:pPr>
             <a:r>
-              <a:rPr lang="en-US" sz="2700" b="1" dirty="0">
+              <a:rPr lang="en-US" sz="3400" b="1" dirty="0">
                 <a:solidFill>
                   <a:srgbClr val="003A63"/>
                 </a:solidFill>
@@ -5119,20 +5272,20 @@
               </a:rPr>
               <a:t>Risks, Failure Modes, and Guardrails</a:t>
             </a:r>
-            <a:endParaRPr lang="en-US" sz="2700" dirty="0"/>
-          </a:p>
-        </p:txBody>
-      </p:sp>
-      <p:sp>
-        <p:nvSpPr>
-          <p:cNvPr id="10" name="Text 8"/>
-          <p:cNvSpPr/>
-          <p:nvPr/>
-        </p:nvSpPr>
-        <p:spPr>
-          <a:xfrm>
-            <a:off x="868680" y="1417320"/>
-            <a:ext cx="6675120" cy="4434840"/>
+            <a:endParaRPr lang="en-US" sz="3400" dirty="0"/>
+          </a:p>
+        </p:txBody>
+      </p:sp>
+      <p:sp>
+        <p:nvSpPr>
+          <p:cNvPr id="11" name="Text 9"/>
+          <p:cNvSpPr/>
+          <p:nvPr/>
+        </p:nvSpPr>
+        <p:spPr>
+          <a:xfrm>
+            <a:off x="868680" y="1508760"/>
+            <a:ext cx="6537960" cy="4160520"/>
           </a:xfrm>
           <a:prstGeom prst="rect">
             <a:avLst/>
@@ -5147,7 +5300,7 @@
           <a:lstStyle/>
           <a:p>
             <a:r>
-              <a:rPr lang="en-US" sz="1700" dirty="0">
+              <a:rPr lang="en-US" sz="2100" dirty="0">
                 <a:solidFill>
                   <a:srgbClr val="17364A"/>
                 </a:solidFill>
@@ -5157,11 +5310,11 @@
               </a:rPr>
               <a:t>Vague standards claims.</a:t>
             </a:r>
-            <a:endParaRPr lang="en-US" sz="1700" dirty="0"/>
-          </a:p>
-          <a:p>
-            <a:r>
-              <a:rPr lang="en-US" sz="1700" dirty="0">
+            <a:endParaRPr lang="en-US" sz="2100" dirty="0"/>
+          </a:p>
+          <a:p>
+            <a:r>
+              <a:rPr lang="en-US" sz="2100" dirty="0">
                 <a:solidFill>
                   <a:srgbClr val="17364A"/>
                 </a:solidFill>
@@ -5171,11 +5324,11 @@
               </a:rPr>
               <a:t>Vendors may claim standards support without demonstrating required profiles, data elements, or workflows.</a:t>
             </a:r>
-            <a:endParaRPr lang="en-US" sz="1700" dirty="0"/>
-          </a:p>
-          <a:p>
-            <a:r>
-              <a:rPr lang="en-US" sz="1700" dirty="0">
+            <a:endParaRPr lang="en-US" sz="2100" dirty="0"/>
+          </a:p>
+          <a:p>
+            <a:r>
+              <a:rPr lang="en-US" sz="2100" dirty="0">
                 <a:solidFill>
                   <a:srgbClr val="17364A"/>
                 </a:solidFill>
@@ -5183,29 +5336,15 @@
                 <a:ea typeface="Aptos" pitchFamily="34" charset="-122"/>
                 <a:cs typeface="Aptos" pitchFamily="34" charset="-120"/>
               </a:rPr>
-              <a:t>Guardrails include conformance testing, test messages, implementation guide references, and acceptance criteria.</a:t>
-            </a:r>
-            <a:endParaRPr lang="en-US" sz="1700" dirty="0"/>
-          </a:p>
-          <a:p>
-            <a:r>
-              <a:rPr lang="en-US" sz="1700" dirty="0">
-                <a:solidFill>
-                  <a:srgbClr val="17364A"/>
-                </a:solidFill>
-                <a:latin typeface="Aptos" pitchFamily="34" charset="0"/>
-                <a:ea typeface="Aptos" pitchFamily="34" charset="-122"/>
-                <a:cs typeface="Aptos" pitchFamily="34" charset="-120"/>
-              </a:rPr>
-              <a:t>Manual workarounds.</a:t>
-            </a:r>
-            <a:endParaRPr lang="en-US" sz="1700" dirty="0"/>
-          </a:p>
-        </p:txBody>
-      </p:sp>
-      <p:sp>
-        <p:nvSpPr>
-          <p:cNvPr id="11" name="Shape 9"/>
+              <a:t>Guardrails include conformance testing, test messages, implementation guide references, and acceptance.</a:t>
+            </a:r>
+            <a:endParaRPr lang="en-US" sz="2100" dirty="0"/>
+          </a:p>
+        </p:txBody>
+      </p:sp>
+      <p:sp>
+        <p:nvSpPr>
+          <p:cNvPr id="12" name="Shape 10"/>
           <p:cNvSpPr/>
           <p:nvPr/>
         </p:nvSpPr>
@@ -5232,14 +5371,14 @@
       </p:sp>
       <p:sp>
         <p:nvSpPr>
-          <p:cNvPr id="12" name="Text 10"/>
+          <p:cNvPr id="13" name="Text 11"/>
           <p:cNvSpPr/>
           <p:nvPr/>
         </p:nvSpPr>
         <p:spPr>
           <a:xfrm>
             <a:off x="8074152" y="1563624"/>
-            <a:ext cx="2825496" cy="201168"/>
+            <a:ext cx="2825496" cy="256032"/>
           </a:xfrm>
           <a:prstGeom prst="rect">
             <a:avLst/>
@@ -5255,7 +5394,7 @@
               <a:buNone/>
             </a:pPr>
             <a:r>
-              <a:rPr lang="en-US" sz="950" b="1" dirty="0">
+              <a:rPr lang="en-US" sz="1300" b="1" dirty="0">
                 <a:solidFill>
                   <a:srgbClr val="0068B7"/>
                 </a:solidFill>
@@ -5265,20 +5404,20 @@
               </a:rPr>
               <a:t>Key idea</a:t>
             </a:r>
-            <a:endParaRPr lang="en-US" sz="950" dirty="0"/>
-          </a:p>
-        </p:txBody>
-      </p:sp>
-      <p:sp>
-        <p:nvSpPr>
-          <p:cNvPr id="13" name="Text 11"/>
-          <p:cNvSpPr/>
-          <p:nvPr/>
-        </p:nvSpPr>
-        <p:spPr>
-          <a:xfrm>
-            <a:off x="8074152" y="1856232"/>
-            <a:ext cx="2825496" cy="1261872"/>
+            <a:endParaRPr lang="en-US" sz="1300" dirty="0"/>
+          </a:p>
+        </p:txBody>
+      </p:sp>
+      <p:sp>
+        <p:nvSpPr>
+          <p:cNvPr id="14" name="Text 12"/>
+          <p:cNvSpPr/>
+          <p:nvPr/>
+        </p:nvSpPr>
+        <p:spPr>
+          <a:xfrm>
+            <a:off x="8074152" y="1920240"/>
+            <a:ext cx="2825496" cy="1188720"/>
           </a:xfrm>
           <a:prstGeom prst="rect">
             <a:avLst/>
@@ -5296,7 +5435,7 @@
               <a:buNone/>
             </a:pPr>
             <a:r>
-              <a:rPr lang="en-US" sz="1250" dirty="0">
+              <a:rPr lang="en-US" sz="1550" dirty="0">
                 <a:solidFill>
                   <a:srgbClr val="17364A"/>
                 </a:solidFill>
@@ -5306,13 +5445,13 @@
               </a:rPr>
               <a:t>Vague standards claims.</a:t>
             </a:r>
-            <a:endParaRPr lang="en-US" sz="1250" dirty="0"/>
-          </a:p>
-        </p:txBody>
-      </p:sp>
-      <p:sp>
-        <p:nvSpPr>
-          <p:cNvPr id="14" name="Shape 12"/>
+            <a:endParaRPr lang="en-US" sz="1550" dirty="0"/>
+          </a:p>
+        </p:txBody>
+      </p:sp>
+      <p:sp>
+        <p:nvSpPr>
+          <p:cNvPr id="15" name="Shape 13"/>
           <p:cNvSpPr/>
           <p:nvPr/>
         </p:nvSpPr>
@@ -5339,14 +5478,14 @@
       </p:sp>
       <p:sp>
         <p:nvSpPr>
-          <p:cNvPr id="15" name="Text 13"/>
+          <p:cNvPr id="16" name="Text 14"/>
           <p:cNvSpPr/>
           <p:nvPr/>
         </p:nvSpPr>
         <p:spPr>
           <a:xfrm>
             <a:off x="8074152" y="3666744"/>
-            <a:ext cx="2825496" cy="201168"/>
+            <a:ext cx="2825496" cy="256032"/>
           </a:xfrm>
           <a:prstGeom prst="rect">
             <a:avLst/>
@@ -5362,7 +5501,7 @@
               <a:buNone/>
             </a:pPr>
             <a:r>
-              <a:rPr lang="en-US" sz="950" b="1" dirty="0">
+              <a:rPr lang="en-US" sz="1300" b="1" dirty="0">
                 <a:solidFill>
                   <a:srgbClr val="0068B7"/>
                 </a:solidFill>
@@ -5372,20 +5511,20 @@
               </a:rPr>
               <a:t>Use this for</a:t>
             </a:r>
-            <a:endParaRPr lang="en-US" sz="950" dirty="0"/>
-          </a:p>
-        </p:txBody>
-      </p:sp>
-      <p:sp>
-        <p:nvSpPr>
-          <p:cNvPr id="16" name="Text 14"/>
-          <p:cNvSpPr/>
-          <p:nvPr/>
-        </p:nvSpPr>
-        <p:spPr>
-          <a:xfrm>
-            <a:off x="8074152" y="3959352"/>
-            <a:ext cx="2825496" cy="1170432"/>
+            <a:endParaRPr lang="en-US" sz="1300" dirty="0"/>
+          </a:p>
+        </p:txBody>
+      </p:sp>
+      <p:sp>
+        <p:nvSpPr>
+          <p:cNvPr id="17" name="Text 15"/>
+          <p:cNvSpPr/>
+          <p:nvPr/>
+        </p:nvSpPr>
+        <p:spPr>
+          <a:xfrm>
+            <a:off x="8074152" y="4023360"/>
+            <a:ext cx="2825496" cy="1097280"/>
           </a:xfrm>
           <a:prstGeom prst="rect">
             <a:avLst/>
@@ -5403,7 +5542,7 @@
               <a:buNone/>
             </a:pPr>
             <a:r>
-              <a:rPr lang="en-US" sz="1250" dirty="0">
+              <a:rPr lang="en-US" sz="1550" dirty="0">
                 <a:solidFill>
                   <a:srgbClr val="17364A"/>
                 </a:solidFill>
@@ -5413,7 +5552,7 @@
               </a:rPr>
               <a:t>Connect the concept to public health decisions, safeguards, documentation, or implementation work.</a:t>
             </a:r>
-            <a:endParaRPr lang="en-US" sz="1250" dirty="0"/>
+            <a:endParaRPr lang="en-US" sz="1550" dirty="0"/>
           </a:p>
         </p:txBody>
       </p:sp>
@@ -5610,7 +5749,7 @@
                 <a:ea typeface="Aptos" pitchFamily="34" charset="-122"/>
                 <a:cs typeface="Aptos" pitchFamily="34" charset="-120"/>
               </a:rPr>
-              <a:t>© Paula Soper</a:t>
+              <a:t>Â© Paula Soper</a:t>
             </a:r>
             <a:endParaRPr lang="en-US" sz="800" dirty="0"/>
           </a:p>
@@ -5624,8 +5763,47 @@
         </p:nvSpPr>
         <p:spPr>
           <a:xfrm>
+            <a:off x="11137392" y="6510528"/>
+            <a:ext cx="411480" cy="201168"/>
+          </a:xfrm>
+          <a:prstGeom prst="rect">
+            <a:avLst/>
+          </a:prstGeom>
+          <a:noFill/>
+          <a:ln/>
+        </p:spPr>
+        <p:txBody>
+          <a:bodyPr wrap="square" lIns="0" tIns="0" rIns="0" bIns="0" rtlCol="0" anchor="ctr"/>
+          <a:lstStyle/>
+          <a:p>
+            <a:pPr algn="r" indent="0" marL="0">
+              <a:buNone/>
+            </a:pPr>
+            <a:r>
+              <a:rPr lang="en-US" sz="900" dirty="0">
+                <a:solidFill>
+                  <a:srgbClr val="5F7181"/>
+                </a:solidFill>
+                <a:latin typeface="Aptos" pitchFamily="34" charset="0"/>
+                <a:ea typeface="Aptos" pitchFamily="34" charset="-122"/>
+                <a:cs typeface="Aptos" pitchFamily="34" charset="-120"/>
+              </a:rPr>
+              <a:t>14</a:t>
+            </a:r>
+            <a:endParaRPr lang="en-US" sz="900" dirty="0"/>
+          </a:p>
+        </p:txBody>
+      </p:sp>
+      <p:sp>
+        <p:nvSpPr>
+          <p:cNvPr id="8" name="Text 6"/>
+          <p:cNvSpPr/>
+          <p:nvPr/>
+        </p:nvSpPr>
+        <p:spPr>
+          <a:xfrm>
             <a:off x="640080" y="658368"/>
-            <a:ext cx="10881360" cy="566928"/>
+            <a:ext cx="10881360" cy="713232"/>
           </a:xfrm>
           <a:prstGeom prst="rect">
             <a:avLst/>
@@ -5643,7 +5821,7 @@
               <a:buNone/>
             </a:pPr>
             <a:r>
-              <a:rPr lang="en-US" sz="2700" b="1" dirty="0">
+              <a:rPr lang="en-US" sz="3400" b="1" dirty="0">
                 <a:solidFill>
                   <a:srgbClr val="003A63"/>
                 </a:solidFill>
@@ -5653,20 +5831,20 @@
               </a:rPr>
               <a:t>Risks, Failure Modes, and Guardrails Continued</a:t>
             </a:r>
-            <a:endParaRPr lang="en-US" sz="2700" dirty="0"/>
-          </a:p>
-        </p:txBody>
-      </p:sp>
-      <p:sp>
-        <p:nvSpPr>
-          <p:cNvPr id="8" name="Text 6"/>
-          <p:cNvSpPr/>
-          <p:nvPr/>
-        </p:nvSpPr>
-        <p:spPr>
-          <a:xfrm>
-            <a:off x="868680" y="1417320"/>
-            <a:ext cx="6675120" cy="4434840"/>
+            <a:endParaRPr lang="en-US" sz="3400" dirty="0"/>
+          </a:p>
+        </p:txBody>
+      </p:sp>
+      <p:sp>
+        <p:nvSpPr>
+          <p:cNvPr id="9" name="Text 7"/>
+          <p:cNvSpPr/>
+          <p:nvPr/>
+        </p:nvSpPr>
+        <p:spPr>
+          <a:xfrm>
+            <a:off x="868680" y="1508760"/>
+            <a:ext cx="6537960" cy="4160520"/>
           </a:xfrm>
           <a:prstGeom prst="rect">
             <a:avLst/>
@@ -5681,7 +5859,7 @@
           <a:lstStyle/>
           <a:p>
             <a:r>
-              <a:rPr lang="en-US" sz="1700" dirty="0">
+              <a:rPr lang="en-US" sz="2100" dirty="0">
                 <a:solidFill>
                   <a:srgbClr val="17364A"/>
                 </a:solidFill>
@@ -5691,11 +5869,11 @@
               </a:rPr>
               <a:t>Over-reliance on structured data.</a:t>
             </a:r>
-            <a:endParaRPr lang="en-US" sz="1700" dirty="0"/>
-          </a:p>
-          <a:p>
-            <a:r>
-              <a:rPr lang="en-US" sz="1700" dirty="0">
+            <a:endParaRPr lang="en-US" sz="2100" dirty="0"/>
+          </a:p>
+          <a:p>
+            <a:r>
+              <a:rPr lang="en-US" sz="2100" dirty="0">
                 <a:solidFill>
                   <a:srgbClr val="17364A"/>
                 </a:solidFill>
@@ -5705,11 +5883,11 @@
               </a:rPr>
               <a:t>Structured exchange may omit context found in notes or local fields.</a:t>
             </a:r>
-            <a:endParaRPr lang="en-US" sz="1700" dirty="0"/>
-          </a:p>
-          <a:p>
-            <a:r>
-              <a:rPr lang="en-US" sz="1700" dirty="0">
+            <a:endParaRPr lang="en-US" sz="2100" dirty="0"/>
+          </a:p>
+          <a:p>
+            <a:r>
+              <a:rPr lang="en-US" sz="2100" dirty="0">
                 <a:solidFill>
                   <a:srgbClr val="17364A"/>
                 </a:solidFill>
@@ -5719,13 +5897,13 @@
               </a:rPr>
               <a:t>Guardrails include source review, workflow validation, and documentation of known data gaps.</a:t>
             </a:r>
-            <a:endParaRPr lang="en-US" sz="1700" dirty="0"/>
-          </a:p>
-        </p:txBody>
-      </p:sp>
-      <p:sp>
-        <p:nvSpPr>
-          <p:cNvPr id="9" name="Shape 7"/>
+            <a:endParaRPr lang="en-US" sz="2100" dirty="0"/>
+          </a:p>
+        </p:txBody>
+      </p:sp>
+      <p:sp>
+        <p:nvSpPr>
+          <p:cNvPr id="10" name="Shape 8"/>
           <p:cNvSpPr/>
           <p:nvPr/>
         </p:nvSpPr>
@@ -5752,14 +5930,14 @@
       </p:sp>
       <p:sp>
         <p:nvSpPr>
-          <p:cNvPr id="10" name="Text 8"/>
+          <p:cNvPr id="11" name="Text 9"/>
           <p:cNvSpPr/>
           <p:nvPr/>
         </p:nvSpPr>
         <p:spPr>
           <a:xfrm>
             <a:off x="8074152" y="1563624"/>
-            <a:ext cx="2825496" cy="201168"/>
+            <a:ext cx="2825496" cy="256032"/>
           </a:xfrm>
           <a:prstGeom prst="rect">
             <a:avLst/>
@@ -5775,7 +5953,7 @@
               <a:buNone/>
             </a:pPr>
             <a:r>
-              <a:rPr lang="en-US" sz="950" b="1" dirty="0">
+              <a:rPr lang="en-US" sz="1300" b="1" dirty="0">
                 <a:solidFill>
                   <a:srgbClr val="0068B7"/>
                 </a:solidFill>
@@ -5785,20 +5963,20 @@
               </a:rPr>
               <a:t>Key idea</a:t>
             </a:r>
-            <a:endParaRPr lang="en-US" sz="950" dirty="0"/>
-          </a:p>
-        </p:txBody>
-      </p:sp>
-      <p:sp>
-        <p:nvSpPr>
-          <p:cNvPr id="11" name="Text 9"/>
-          <p:cNvSpPr/>
-          <p:nvPr/>
-        </p:nvSpPr>
-        <p:spPr>
-          <a:xfrm>
-            <a:off x="8074152" y="1856232"/>
-            <a:ext cx="2825496" cy="1261872"/>
+            <a:endParaRPr lang="en-US" sz="1300" dirty="0"/>
+          </a:p>
+        </p:txBody>
+      </p:sp>
+      <p:sp>
+        <p:nvSpPr>
+          <p:cNvPr id="12" name="Text 10"/>
+          <p:cNvSpPr/>
+          <p:nvPr/>
+        </p:nvSpPr>
+        <p:spPr>
+          <a:xfrm>
+            <a:off x="8074152" y="1920240"/>
+            <a:ext cx="2825496" cy="1188720"/>
           </a:xfrm>
           <a:prstGeom prst="rect">
             <a:avLst/>
@@ -5816,7 +5994,7 @@
               <a:buNone/>
             </a:pPr>
             <a:r>
-              <a:rPr lang="en-US" sz="1250" dirty="0">
+              <a:rPr lang="en-US" sz="1550" dirty="0">
                 <a:solidFill>
                   <a:srgbClr val="17364A"/>
                 </a:solidFill>
@@ -5826,13 +6004,13 @@
               </a:rPr>
               <a:t>Over-reliance on structured data.</a:t>
             </a:r>
-            <a:endParaRPr lang="en-US" sz="1250" dirty="0"/>
-          </a:p>
-        </p:txBody>
-      </p:sp>
-      <p:sp>
-        <p:nvSpPr>
-          <p:cNvPr id="12" name="Shape 10"/>
+            <a:endParaRPr lang="en-US" sz="1550" dirty="0"/>
+          </a:p>
+        </p:txBody>
+      </p:sp>
+      <p:sp>
+        <p:nvSpPr>
+          <p:cNvPr id="13" name="Shape 11"/>
           <p:cNvSpPr/>
           <p:nvPr/>
         </p:nvSpPr>
@@ -5859,14 +6037,14 @@
       </p:sp>
       <p:sp>
         <p:nvSpPr>
-          <p:cNvPr id="13" name="Text 11"/>
+          <p:cNvPr id="14" name="Text 12"/>
           <p:cNvSpPr/>
           <p:nvPr/>
         </p:nvSpPr>
         <p:spPr>
           <a:xfrm>
             <a:off x="8074152" y="3666744"/>
-            <a:ext cx="2825496" cy="201168"/>
+            <a:ext cx="2825496" cy="256032"/>
           </a:xfrm>
           <a:prstGeom prst="rect">
             <a:avLst/>
@@ -5882,7 +6060,7 @@
               <a:buNone/>
             </a:pPr>
             <a:r>
-              <a:rPr lang="en-US" sz="950" b="1" dirty="0">
+              <a:rPr lang="en-US" sz="1300" b="1" dirty="0">
                 <a:solidFill>
                   <a:srgbClr val="0068B7"/>
                 </a:solidFill>
@@ -5892,20 +6070,20 @@
               </a:rPr>
               <a:t>Use this for</a:t>
             </a:r>
-            <a:endParaRPr lang="en-US" sz="950" dirty="0"/>
-          </a:p>
-        </p:txBody>
-      </p:sp>
-      <p:sp>
-        <p:nvSpPr>
-          <p:cNvPr id="14" name="Text 12"/>
-          <p:cNvSpPr/>
-          <p:nvPr/>
-        </p:nvSpPr>
-        <p:spPr>
-          <a:xfrm>
-            <a:off x="8074152" y="3959352"/>
-            <a:ext cx="2825496" cy="1170432"/>
+            <a:endParaRPr lang="en-US" sz="1300" dirty="0"/>
+          </a:p>
+        </p:txBody>
+      </p:sp>
+      <p:sp>
+        <p:nvSpPr>
+          <p:cNvPr id="15" name="Text 13"/>
+          <p:cNvSpPr/>
+          <p:nvPr/>
+        </p:nvSpPr>
+        <p:spPr>
+          <a:xfrm>
+            <a:off x="8074152" y="4023360"/>
+            <a:ext cx="2825496" cy="1097280"/>
           </a:xfrm>
           <a:prstGeom prst="rect">
             <a:avLst/>
@@ -5923,7 +6101,7 @@
               <a:buNone/>
             </a:pPr>
             <a:r>
-              <a:rPr lang="en-US" sz="1250" dirty="0">
+              <a:rPr lang="en-US" sz="1550" dirty="0">
                 <a:solidFill>
                   <a:srgbClr val="17364A"/>
                 </a:solidFill>
@@ -5933,7 +6111,7 @@
               </a:rPr>
               <a:t>Connect the concept to public health decisions, safeguards, documentation, or implementation work.</a:t>
             </a:r>
-            <a:endParaRPr lang="en-US" sz="1250" dirty="0"/>
+            <a:endParaRPr lang="en-US" sz="1550" dirty="0"/>
           </a:p>
         </p:txBody>
       </p:sp>
@@ -6130,7 +6308,7 @@
                 <a:ea typeface="Aptos" pitchFamily="34" charset="-122"/>
                 <a:cs typeface="Aptos" pitchFamily="34" charset="-120"/>
               </a:rPr>
-              <a:t>© Paula Soper</a:t>
+              <a:t>Â© Paula Soper</a:t>
             </a:r>
             <a:endParaRPr lang="en-US" sz="800" dirty="0"/>
           </a:p>
@@ -6138,7 +6316,46 @@
       </p:sp>
       <p:sp>
         <p:nvSpPr>
-          <p:cNvPr id="7" name="Shape 5"/>
+          <p:cNvPr id="7" name="Text 5"/>
+          <p:cNvSpPr/>
+          <p:nvPr/>
+        </p:nvSpPr>
+        <p:spPr>
+          <a:xfrm>
+            <a:off x="11137392" y="6510528"/>
+            <a:ext cx="411480" cy="201168"/>
+          </a:xfrm>
+          <a:prstGeom prst="rect">
+            <a:avLst/>
+          </a:prstGeom>
+          <a:noFill/>
+          <a:ln/>
+        </p:spPr>
+        <p:txBody>
+          <a:bodyPr wrap="square" lIns="0" tIns="0" rIns="0" bIns="0" rtlCol="0" anchor="ctr"/>
+          <a:lstStyle/>
+          <a:p>
+            <a:pPr algn="r" indent="0" marL="0">
+              <a:buNone/>
+            </a:pPr>
+            <a:r>
+              <a:rPr lang="en-US" sz="900" dirty="0">
+                <a:solidFill>
+                  <a:srgbClr val="5F7181"/>
+                </a:solidFill>
+                <a:latin typeface="Aptos" pitchFamily="34" charset="0"/>
+                <a:ea typeface="Aptos" pitchFamily="34" charset="-122"/>
+                <a:cs typeface="Aptos" pitchFamily="34" charset="-120"/>
+              </a:rPr>
+              <a:t>15</a:t>
+            </a:r>
+            <a:endParaRPr lang="en-US" sz="900" dirty="0"/>
+          </a:p>
+        </p:txBody>
+      </p:sp>
+      <p:sp>
+        <p:nvSpPr>
+          <p:cNvPr id="8" name="Shape 6"/>
           <p:cNvSpPr/>
           <p:nvPr/>
         </p:nvSpPr>
@@ -6163,7 +6380,7 @@
       </p:sp>
       <p:sp>
         <p:nvSpPr>
-          <p:cNvPr id="8" name="Text 6"/>
+          <p:cNvPr id="9" name="Text 7"/>
           <p:cNvSpPr/>
           <p:nvPr/>
         </p:nvSpPr>
@@ -6202,14 +6419,14 @@
       </p:sp>
       <p:sp>
         <p:nvSpPr>
-          <p:cNvPr id="9" name="Text 7"/>
+          <p:cNvPr id="10" name="Text 8"/>
           <p:cNvSpPr/>
           <p:nvPr/>
         </p:nvSpPr>
         <p:spPr>
           <a:xfrm>
             <a:off x="640080" y="621792"/>
-            <a:ext cx="10881360" cy="566928"/>
+            <a:ext cx="10881360" cy="713232"/>
           </a:xfrm>
           <a:prstGeom prst="rect">
             <a:avLst/>
@@ -6227,7 +6444,7 @@
               <a:buNone/>
             </a:pPr>
             <a:r>
-              <a:rPr lang="en-US" sz="2700" b="1" dirty="0">
+              <a:rPr lang="en-US" sz="3400" b="1" dirty="0">
                 <a:solidFill>
                   <a:srgbClr val="003A63"/>
                 </a:solidFill>
@@ -6237,20 +6454,20 @@
               </a:rPr>
               <a:t>Application to AI-Supported Workflows</a:t>
             </a:r>
-            <a:endParaRPr lang="en-US" sz="2700" dirty="0"/>
-          </a:p>
-        </p:txBody>
-      </p:sp>
-      <p:sp>
-        <p:nvSpPr>
-          <p:cNvPr id="10" name="Text 8"/>
-          <p:cNvSpPr/>
-          <p:nvPr/>
-        </p:nvSpPr>
-        <p:spPr>
-          <a:xfrm>
-            <a:off x="868680" y="1417320"/>
-            <a:ext cx="6675120" cy="4434840"/>
+            <a:endParaRPr lang="en-US" sz="3400" dirty="0"/>
+          </a:p>
+        </p:txBody>
+      </p:sp>
+      <p:sp>
+        <p:nvSpPr>
+          <p:cNvPr id="11" name="Text 9"/>
+          <p:cNvSpPr/>
+          <p:nvPr/>
+        </p:nvSpPr>
+        <p:spPr>
+          <a:xfrm>
+            <a:off x="868680" y="1508760"/>
+            <a:ext cx="6537960" cy="4160520"/>
           </a:xfrm>
           <a:prstGeom prst="rect">
             <a:avLst/>
@@ -6265,7 +6482,7 @@
           <a:lstStyle/>
           <a:p>
             <a:r>
-              <a:rPr lang="en-US" sz="1700" dirty="0">
+              <a:rPr lang="en-US" sz="2100" dirty="0">
                 <a:solidFill>
                   <a:srgbClr val="17364A"/>
                 </a:solidFill>
@@ -6273,13 +6490,13 @@
                 <a:ea typeface="Aptos" pitchFamily="34" charset="-122"/>
                 <a:cs typeface="Aptos" pitchFamily="34" charset="-120"/>
               </a:rPr>
-              <a:t>Generative AI may summarize structured and narrative data received through interoperable exchange, but it must preserve.</a:t>
-            </a:r>
-            <a:endParaRPr lang="en-US" sz="1700" dirty="0"/>
-          </a:p>
-          <a:p>
-            <a:r>
-              <a:rPr lang="en-US" sz="1700" dirty="0">
+              <a:t>Generative AI may summarize structured and narrative data received through interoperable exchange, but.</a:t>
+            </a:r>
+            <a:endParaRPr lang="en-US" sz="2100" dirty="0"/>
+          </a:p>
+          <a:p>
+            <a:r>
+              <a:rPr lang="en-US" sz="2100" dirty="0">
                 <a:solidFill>
                   <a:srgbClr val="17364A"/>
                 </a:solidFill>
@@ -6287,13 +6504,13 @@
                 <a:ea typeface="Aptos" pitchFamily="34" charset="-122"/>
                 <a:cs typeface="Aptos" pitchFamily="34" charset="-120"/>
               </a:rPr>
-              <a:t>Predictive analytics may depend on standardized fields and terminology, so interoperability gaps can affect model validity.</a:t>
-            </a:r>
-            <a:endParaRPr lang="en-US" sz="1700" dirty="0"/>
-          </a:p>
-          <a:p>
-            <a:r>
-              <a:rPr lang="en-US" sz="1700" dirty="0">
+              <a:t>Predictive analytics may depend on standardized fields and terminology, so interoperability gaps can.</a:t>
+            </a:r>
+            <a:endParaRPr lang="en-US" sz="2100" dirty="0"/>
+          </a:p>
+          <a:p>
+            <a:r>
+              <a:rPr lang="en-US" sz="2100" dirty="0">
                 <a:solidFill>
                   <a:srgbClr val="17364A"/>
                 </a:solidFill>
@@ -6301,29 +6518,15 @@
                 <a:ea typeface="Aptos" pitchFamily="34" charset="-122"/>
                 <a:cs typeface="Aptos" pitchFamily="34" charset="-120"/>
               </a:rPr>
-              <a:t>RAG tools may retrieve implementation guides or agency protocols, but document governance is needed to avoid stale guidance.</a:t>
-            </a:r>
-            <a:endParaRPr lang="en-US" sz="1700" dirty="0"/>
-          </a:p>
-          <a:p>
-            <a:r>
-              <a:rPr lang="en-US" sz="1700" dirty="0">
-                <a:solidFill>
-                  <a:srgbClr val="17364A"/>
-                </a:solidFill>
-                <a:latin typeface="Aptos" pitchFamily="34" charset="0"/>
-                <a:ea typeface="Aptos" pitchFamily="34" charset="-122"/>
-                <a:cs typeface="Aptos" pitchFamily="34" charset="-120"/>
-              </a:rPr>
-              <a:t>Agentic AI may use APIs to take actions, making permissions, audit logs, and write-back controls essential.</a:t>
-            </a:r>
-            <a:endParaRPr lang="en-US" sz="1700" dirty="0"/>
-          </a:p>
-        </p:txBody>
-      </p:sp>
-      <p:sp>
-        <p:nvSpPr>
-          <p:cNvPr id="11" name="Shape 9"/>
+              <a:t>RAG tools may retrieve implementation guides or agency protocols, but document governance is needed to.</a:t>
+            </a:r>
+            <a:endParaRPr lang="en-US" sz="2100" dirty="0"/>
+          </a:p>
+        </p:txBody>
+      </p:sp>
+      <p:sp>
+        <p:nvSpPr>
+          <p:cNvPr id="12" name="Shape 10"/>
           <p:cNvSpPr/>
           <p:nvPr/>
         </p:nvSpPr>
@@ -6350,14 +6553,14 @@
       </p:sp>
       <p:sp>
         <p:nvSpPr>
-          <p:cNvPr id="12" name="Text 10"/>
+          <p:cNvPr id="13" name="Text 11"/>
           <p:cNvSpPr/>
           <p:nvPr/>
         </p:nvSpPr>
         <p:spPr>
           <a:xfrm>
             <a:off x="8074152" y="1563624"/>
-            <a:ext cx="2825496" cy="201168"/>
+            <a:ext cx="2825496" cy="256032"/>
           </a:xfrm>
           <a:prstGeom prst="rect">
             <a:avLst/>
@@ -6373,7 +6576,7 @@
               <a:buNone/>
             </a:pPr>
             <a:r>
-              <a:rPr lang="en-US" sz="950" b="1" dirty="0">
+              <a:rPr lang="en-US" sz="1300" b="1" dirty="0">
                 <a:solidFill>
                   <a:srgbClr val="0068B7"/>
                 </a:solidFill>
@@ -6383,20 +6586,20 @@
               </a:rPr>
               <a:t>Key idea</a:t>
             </a:r>
-            <a:endParaRPr lang="en-US" sz="950" dirty="0"/>
-          </a:p>
-        </p:txBody>
-      </p:sp>
-      <p:sp>
-        <p:nvSpPr>
-          <p:cNvPr id="13" name="Text 11"/>
-          <p:cNvSpPr/>
-          <p:nvPr/>
-        </p:nvSpPr>
-        <p:spPr>
-          <a:xfrm>
-            <a:off x="8074152" y="1856232"/>
-            <a:ext cx="2825496" cy="1261872"/>
+            <a:endParaRPr lang="en-US" sz="1300" dirty="0"/>
+          </a:p>
+        </p:txBody>
+      </p:sp>
+      <p:sp>
+        <p:nvSpPr>
+          <p:cNvPr id="14" name="Text 12"/>
+          <p:cNvSpPr/>
+          <p:nvPr/>
+        </p:nvSpPr>
+        <p:spPr>
+          <a:xfrm>
+            <a:off x="8074152" y="1920240"/>
+            <a:ext cx="2825496" cy="1188720"/>
           </a:xfrm>
           <a:prstGeom prst="rect">
             <a:avLst/>
@@ -6414,7 +6617,7 @@
               <a:buNone/>
             </a:pPr>
             <a:r>
-              <a:rPr lang="en-US" sz="1250" dirty="0">
+              <a:rPr lang="en-US" sz="1550" dirty="0">
                 <a:solidFill>
                   <a:srgbClr val="17364A"/>
                 </a:solidFill>
@@ -6422,15 +6625,15 @@
                 <a:ea typeface="Aptos" pitchFamily="34" charset="-122"/>
                 <a:cs typeface="Aptos" pitchFamily="34" charset="-120"/>
               </a:rPr>
-              <a:t>Generative AI may summarize structured and narrative data received through interoperable exchange, but it must preserve.</a:t>
-            </a:r>
-            <a:endParaRPr lang="en-US" sz="1250" dirty="0"/>
-          </a:p>
-        </p:txBody>
-      </p:sp>
-      <p:sp>
-        <p:nvSpPr>
-          <p:cNvPr id="14" name="Shape 12"/>
+              <a:t>Generative AI may summarize structured and narrative data received through interoperable exchange, but.</a:t>
+            </a:r>
+            <a:endParaRPr lang="en-US" sz="1550" dirty="0"/>
+          </a:p>
+        </p:txBody>
+      </p:sp>
+      <p:sp>
+        <p:nvSpPr>
+          <p:cNvPr id="15" name="Shape 13"/>
           <p:cNvSpPr/>
           <p:nvPr/>
         </p:nvSpPr>
@@ -6457,14 +6660,14 @@
       </p:sp>
       <p:sp>
         <p:nvSpPr>
-          <p:cNvPr id="15" name="Text 13"/>
+          <p:cNvPr id="16" name="Text 14"/>
           <p:cNvSpPr/>
           <p:nvPr/>
         </p:nvSpPr>
         <p:spPr>
           <a:xfrm>
             <a:off x="8074152" y="3666744"/>
-            <a:ext cx="2825496" cy="201168"/>
+            <a:ext cx="2825496" cy="256032"/>
           </a:xfrm>
           <a:prstGeom prst="rect">
             <a:avLst/>
@@ -6480,7 +6683,7 @@
               <a:buNone/>
             </a:pPr>
             <a:r>
-              <a:rPr lang="en-US" sz="950" b="1" dirty="0">
+              <a:rPr lang="en-US" sz="1300" b="1" dirty="0">
                 <a:solidFill>
                   <a:srgbClr val="0068B7"/>
                 </a:solidFill>
@@ -6490,20 +6693,20 @@
               </a:rPr>
               <a:t>Use this for</a:t>
             </a:r>
-            <a:endParaRPr lang="en-US" sz="950" dirty="0"/>
-          </a:p>
-        </p:txBody>
-      </p:sp>
-      <p:sp>
-        <p:nvSpPr>
-          <p:cNvPr id="16" name="Text 14"/>
-          <p:cNvSpPr/>
-          <p:nvPr/>
-        </p:nvSpPr>
-        <p:spPr>
-          <a:xfrm>
-            <a:off x="8074152" y="3959352"/>
-            <a:ext cx="2825496" cy="1170432"/>
+            <a:endParaRPr lang="en-US" sz="1300" dirty="0"/>
+          </a:p>
+        </p:txBody>
+      </p:sp>
+      <p:sp>
+        <p:nvSpPr>
+          <p:cNvPr id="17" name="Text 15"/>
+          <p:cNvSpPr/>
+          <p:nvPr/>
+        </p:nvSpPr>
+        <p:spPr>
+          <a:xfrm>
+            <a:off x="8074152" y="4023360"/>
+            <a:ext cx="2825496" cy="1097280"/>
           </a:xfrm>
           <a:prstGeom prst="rect">
             <a:avLst/>
@@ -6521,7 +6724,7 @@
               <a:buNone/>
             </a:pPr>
             <a:r>
-              <a:rPr lang="en-US" sz="1250" dirty="0">
+              <a:rPr lang="en-US" sz="1550" dirty="0">
                 <a:solidFill>
                   <a:srgbClr val="17364A"/>
                 </a:solidFill>
@@ -6531,7 +6734,7 @@
               </a:rPr>
               <a:t>Connect the concept to public health decisions, safeguards, documentation, or implementation work.</a:t>
             </a:r>
-            <a:endParaRPr lang="en-US" sz="1250" dirty="0"/>
+            <a:endParaRPr lang="en-US" sz="1550" dirty="0"/>
           </a:p>
         </p:txBody>
       </p:sp>
@@ -6728,7 +6931,7 @@
                 <a:ea typeface="Aptos" pitchFamily="34" charset="-122"/>
                 <a:cs typeface="Aptos" pitchFamily="34" charset="-120"/>
               </a:rPr>
-              <a:t>© Paula Soper</a:t>
+              <a:t>Â© Paula Soper</a:t>
             </a:r>
             <a:endParaRPr lang="en-US" sz="800" dirty="0"/>
           </a:p>
@@ -6736,7 +6939,46 @@
       </p:sp>
       <p:sp>
         <p:nvSpPr>
-          <p:cNvPr id="7" name="Shape 5"/>
+          <p:cNvPr id="7" name="Text 5"/>
+          <p:cNvSpPr/>
+          <p:nvPr/>
+        </p:nvSpPr>
+        <p:spPr>
+          <a:xfrm>
+            <a:off x="11137392" y="6510528"/>
+            <a:ext cx="411480" cy="201168"/>
+          </a:xfrm>
+          <a:prstGeom prst="rect">
+            <a:avLst/>
+          </a:prstGeom>
+          <a:noFill/>
+          <a:ln/>
+        </p:spPr>
+        <p:txBody>
+          <a:bodyPr wrap="square" lIns="0" tIns="0" rIns="0" bIns="0" rtlCol="0" anchor="ctr"/>
+          <a:lstStyle/>
+          <a:p>
+            <a:pPr algn="r" indent="0" marL="0">
+              <a:buNone/>
+            </a:pPr>
+            <a:r>
+              <a:rPr lang="en-US" sz="900" dirty="0">
+                <a:solidFill>
+                  <a:srgbClr val="5F7181"/>
+                </a:solidFill>
+                <a:latin typeface="Aptos" pitchFamily="34" charset="0"/>
+                <a:ea typeface="Aptos" pitchFamily="34" charset="-122"/>
+                <a:cs typeface="Aptos" pitchFamily="34" charset="-120"/>
+              </a:rPr>
+              <a:t>16</a:t>
+            </a:r>
+            <a:endParaRPr lang="en-US" sz="900" dirty="0"/>
+          </a:p>
+        </p:txBody>
+      </p:sp>
+      <p:sp>
+        <p:nvSpPr>
+          <p:cNvPr id="8" name="Shape 6"/>
           <p:cNvSpPr/>
           <p:nvPr/>
         </p:nvSpPr>
@@ -6761,7 +7003,7 @@
       </p:sp>
       <p:sp>
         <p:nvSpPr>
-          <p:cNvPr id="8" name="Text 6"/>
+          <p:cNvPr id="9" name="Text 7"/>
           <p:cNvSpPr/>
           <p:nvPr/>
         </p:nvSpPr>
@@ -6800,14 +7042,14 @@
       </p:sp>
       <p:sp>
         <p:nvSpPr>
-          <p:cNvPr id="9" name="Text 7"/>
+          <p:cNvPr id="10" name="Text 8"/>
           <p:cNvSpPr/>
           <p:nvPr/>
         </p:nvSpPr>
         <p:spPr>
           <a:xfrm>
             <a:off x="640080" y="621792"/>
-            <a:ext cx="10881360" cy="566928"/>
+            <a:ext cx="10881360" cy="713232"/>
           </a:xfrm>
           <a:prstGeom prst="rect">
             <a:avLst/>
@@ -6825,7 +7067,7 @@
               <a:buNone/>
             </a:pPr>
             <a:r>
-              <a:rPr lang="en-US" sz="2700" b="1" dirty="0">
+              <a:rPr lang="en-US" sz="3400" b="1" dirty="0">
                 <a:solidFill>
                   <a:srgbClr val="003A63"/>
                 </a:solidFill>
@@ -6835,20 +7077,20 @@
               </a:rPr>
               <a:t>Reflection Questions</a:t>
             </a:r>
-            <a:endParaRPr lang="en-US" sz="2700" dirty="0"/>
-          </a:p>
-        </p:txBody>
-      </p:sp>
-      <p:sp>
-        <p:nvSpPr>
-          <p:cNvPr id="10" name="Text 8"/>
-          <p:cNvSpPr/>
-          <p:nvPr/>
-        </p:nvSpPr>
-        <p:spPr>
-          <a:xfrm>
-            <a:off x="868680" y="1417320"/>
-            <a:ext cx="6675120" cy="4434840"/>
+            <a:endParaRPr lang="en-US" sz="3400" dirty="0"/>
+          </a:p>
+        </p:txBody>
+      </p:sp>
+      <p:sp>
+        <p:nvSpPr>
+          <p:cNvPr id="11" name="Text 9"/>
+          <p:cNvSpPr/>
+          <p:nvPr/>
+        </p:nvSpPr>
+        <p:spPr>
+          <a:xfrm>
+            <a:off x="868680" y="1508760"/>
+            <a:ext cx="6537960" cy="4160520"/>
           </a:xfrm>
           <a:prstGeom prst="rect">
             <a:avLst/>
@@ -6863,7 +7105,7 @@
           <a:lstStyle/>
           <a:p>
             <a:r>
-              <a:rPr lang="en-US" sz="1700" dirty="0">
+              <a:rPr lang="en-US" sz="2100" dirty="0">
                 <a:solidFill>
                   <a:srgbClr val="17364A"/>
                 </a:solidFill>
@@ -6873,11 +7115,11 @@
               </a:rPr>
               <a:t>Which standards are used in your agency’s major data exchange workflows?</a:t>
             </a:r>
-            <a:endParaRPr lang="en-US" sz="1700" dirty="0"/>
-          </a:p>
-          <a:p>
-            <a:r>
-              <a:rPr lang="en-US" sz="1700" dirty="0">
+            <a:endParaRPr lang="en-US" sz="2100" dirty="0"/>
+          </a:p>
+          <a:p>
+            <a:r>
+              <a:rPr lang="en-US" sz="2100" dirty="0">
                 <a:solidFill>
                   <a:srgbClr val="17364A"/>
                 </a:solidFill>
@@ -6887,11 +7129,11 @@
               </a:rPr>
               <a:t>Which workflows still depend on manual uploads or copy-paste processes?</a:t>
             </a:r>
-            <a:endParaRPr lang="en-US" sz="1700" dirty="0"/>
-          </a:p>
-          <a:p>
-            <a:r>
-              <a:rPr lang="en-US" sz="1700" dirty="0">
+            <a:endParaRPr lang="en-US" sz="2100" dirty="0"/>
+          </a:p>
+          <a:p>
+            <a:r>
+              <a:rPr lang="en-US" sz="2100" dirty="0">
                 <a:solidFill>
                   <a:srgbClr val="17364A"/>
                 </a:solidFill>
@@ -6901,13 +7143,13 @@
               </a:rPr>
               <a:t>What vendor claims would need to be tested before implementation?</a:t>
             </a:r>
-            <a:endParaRPr lang="en-US" sz="1700" dirty="0"/>
-          </a:p>
-        </p:txBody>
-      </p:sp>
-      <p:sp>
-        <p:nvSpPr>
-          <p:cNvPr id="11" name="Shape 9"/>
+            <a:endParaRPr lang="en-US" sz="2100" dirty="0"/>
+          </a:p>
+        </p:txBody>
+      </p:sp>
+      <p:sp>
+        <p:nvSpPr>
+          <p:cNvPr id="12" name="Shape 10"/>
           <p:cNvSpPr/>
           <p:nvPr/>
         </p:nvSpPr>
@@ -6934,14 +7176,14 @@
       </p:sp>
       <p:sp>
         <p:nvSpPr>
-          <p:cNvPr id="12" name="Text 10"/>
+          <p:cNvPr id="13" name="Text 11"/>
           <p:cNvSpPr/>
           <p:nvPr/>
         </p:nvSpPr>
         <p:spPr>
           <a:xfrm>
             <a:off x="8074152" y="1563624"/>
-            <a:ext cx="2825496" cy="201168"/>
+            <a:ext cx="2825496" cy="256032"/>
           </a:xfrm>
           <a:prstGeom prst="rect">
             <a:avLst/>
@@ -6957,7 +7199,7 @@
               <a:buNone/>
             </a:pPr>
             <a:r>
-              <a:rPr lang="en-US" sz="950" b="1" dirty="0">
+              <a:rPr lang="en-US" sz="1300" b="1" dirty="0">
                 <a:solidFill>
                   <a:srgbClr val="0068B7"/>
                 </a:solidFill>
@@ -6967,20 +7209,20 @@
               </a:rPr>
               <a:t>Key idea</a:t>
             </a:r>
-            <a:endParaRPr lang="en-US" sz="950" dirty="0"/>
-          </a:p>
-        </p:txBody>
-      </p:sp>
-      <p:sp>
-        <p:nvSpPr>
-          <p:cNvPr id="13" name="Text 11"/>
-          <p:cNvSpPr/>
-          <p:nvPr/>
-        </p:nvSpPr>
-        <p:spPr>
-          <a:xfrm>
-            <a:off x="8074152" y="1856232"/>
-            <a:ext cx="2825496" cy="1261872"/>
+            <a:endParaRPr lang="en-US" sz="1300" dirty="0"/>
+          </a:p>
+        </p:txBody>
+      </p:sp>
+      <p:sp>
+        <p:nvSpPr>
+          <p:cNvPr id="14" name="Text 12"/>
+          <p:cNvSpPr/>
+          <p:nvPr/>
+        </p:nvSpPr>
+        <p:spPr>
+          <a:xfrm>
+            <a:off x="8074152" y="1920240"/>
+            <a:ext cx="2825496" cy="1188720"/>
           </a:xfrm>
           <a:prstGeom prst="rect">
             <a:avLst/>
@@ -6998,7 +7240,7 @@
               <a:buNone/>
             </a:pPr>
             <a:r>
-              <a:rPr lang="en-US" sz="1250" dirty="0">
+              <a:rPr lang="en-US" sz="1550" dirty="0">
                 <a:solidFill>
                   <a:srgbClr val="17364A"/>
                 </a:solidFill>
@@ -7008,13 +7250,13 @@
               </a:rPr>
               <a:t>Which standards are used in your agency’s major data exchange workflows?</a:t>
             </a:r>
-            <a:endParaRPr lang="en-US" sz="1250" dirty="0"/>
-          </a:p>
-        </p:txBody>
-      </p:sp>
-      <p:sp>
-        <p:nvSpPr>
-          <p:cNvPr id="14" name="Shape 12"/>
+            <a:endParaRPr lang="en-US" sz="1550" dirty="0"/>
+          </a:p>
+        </p:txBody>
+      </p:sp>
+      <p:sp>
+        <p:nvSpPr>
+          <p:cNvPr id="15" name="Shape 13"/>
           <p:cNvSpPr/>
           <p:nvPr/>
         </p:nvSpPr>
@@ -7041,14 +7283,14 @@
       </p:sp>
       <p:sp>
         <p:nvSpPr>
-          <p:cNvPr id="15" name="Text 13"/>
+          <p:cNvPr id="16" name="Text 14"/>
           <p:cNvSpPr/>
           <p:nvPr/>
         </p:nvSpPr>
         <p:spPr>
           <a:xfrm>
             <a:off x="8074152" y="3666744"/>
-            <a:ext cx="2825496" cy="201168"/>
+            <a:ext cx="2825496" cy="256032"/>
           </a:xfrm>
           <a:prstGeom prst="rect">
             <a:avLst/>
@@ -7064,7 +7306,7 @@
               <a:buNone/>
             </a:pPr>
             <a:r>
-              <a:rPr lang="en-US" sz="950" b="1" dirty="0">
+              <a:rPr lang="en-US" sz="1300" b="1" dirty="0">
                 <a:solidFill>
                   <a:srgbClr val="0068B7"/>
                 </a:solidFill>
@@ -7074,20 +7316,20 @@
               </a:rPr>
               <a:t>Use this for</a:t>
             </a:r>
-            <a:endParaRPr lang="en-US" sz="950" dirty="0"/>
-          </a:p>
-        </p:txBody>
-      </p:sp>
-      <p:sp>
-        <p:nvSpPr>
-          <p:cNvPr id="16" name="Text 14"/>
-          <p:cNvSpPr/>
-          <p:nvPr/>
-        </p:nvSpPr>
-        <p:spPr>
-          <a:xfrm>
-            <a:off x="8074152" y="3959352"/>
-            <a:ext cx="2825496" cy="1170432"/>
+            <a:endParaRPr lang="en-US" sz="1300" dirty="0"/>
+          </a:p>
+        </p:txBody>
+      </p:sp>
+      <p:sp>
+        <p:nvSpPr>
+          <p:cNvPr id="17" name="Text 15"/>
+          <p:cNvSpPr/>
+          <p:nvPr/>
+        </p:nvSpPr>
+        <p:spPr>
+          <a:xfrm>
+            <a:off x="8074152" y="4023360"/>
+            <a:ext cx="2825496" cy="1097280"/>
           </a:xfrm>
           <a:prstGeom prst="rect">
             <a:avLst/>
@@ -7105,7 +7347,7 @@
               <a:buNone/>
             </a:pPr>
             <a:r>
-              <a:rPr lang="en-US" sz="1250" dirty="0">
+              <a:rPr lang="en-US" sz="1550" dirty="0">
                 <a:solidFill>
                   <a:srgbClr val="17364A"/>
                 </a:solidFill>
@@ -7115,7 +7357,7 @@
               </a:rPr>
               <a:t>Connect the concept to public health decisions, safeguards, documentation, or implementation work.</a:t>
             </a:r>
-            <a:endParaRPr lang="en-US" sz="1250" dirty="0"/>
+            <a:endParaRPr lang="en-US" sz="1550" dirty="0"/>
           </a:p>
         </p:txBody>
       </p:sp>
@@ -7312,7 +7554,7 @@
                 <a:ea typeface="Aptos" pitchFamily="34" charset="-122"/>
                 <a:cs typeface="Aptos" pitchFamily="34" charset="-120"/>
               </a:rPr>
-              <a:t>© Paula Soper</a:t>
+              <a:t>Â© Paula Soper</a:t>
             </a:r>
             <a:endParaRPr lang="en-US" sz="800" dirty="0"/>
           </a:p>
@@ -7326,8 +7568,47 @@
         </p:nvSpPr>
         <p:spPr>
           <a:xfrm>
+            <a:off x="11137392" y="6510528"/>
+            <a:ext cx="411480" cy="201168"/>
+          </a:xfrm>
+          <a:prstGeom prst="rect">
+            <a:avLst/>
+          </a:prstGeom>
+          <a:noFill/>
+          <a:ln/>
+        </p:spPr>
+        <p:txBody>
+          <a:bodyPr wrap="square" lIns="0" tIns="0" rIns="0" bIns="0" rtlCol="0" anchor="ctr"/>
+          <a:lstStyle/>
+          <a:p>
+            <a:pPr algn="r" indent="0" marL="0">
+              <a:buNone/>
+            </a:pPr>
+            <a:r>
+              <a:rPr lang="en-US" sz="900" dirty="0">
+                <a:solidFill>
+                  <a:srgbClr val="5F7181"/>
+                </a:solidFill>
+                <a:latin typeface="Aptos" pitchFamily="34" charset="0"/>
+                <a:ea typeface="Aptos" pitchFamily="34" charset="-122"/>
+                <a:cs typeface="Aptos" pitchFamily="34" charset="-120"/>
+              </a:rPr>
+              <a:t>17</a:t>
+            </a:r>
+            <a:endParaRPr lang="en-US" sz="900" dirty="0"/>
+          </a:p>
+        </p:txBody>
+      </p:sp>
+      <p:sp>
+        <p:nvSpPr>
+          <p:cNvPr id="8" name="Text 6"/>
+          <p:cNvSpPr/>
+          <p:nvPr/>
+        </p:nvSpPr>
+        <p:spPr>
+          <a:xfrm>
             <a:off x="640080" y="658368"/>
-            <a:ext cx="10881360" cy="566928"/>
+            <a:ext cx="10881360" cy="713232"/>
           </a:xfrm>
           <a:prstGeom prst="rect">
             <a:avLst/>
@@ -7345,7 +7626,7 @@
               <a:buNone/>
             </a:pPr>
             <a:r>
-              <a:rPr lang="en-US" sz="2700" b="1" dirty="0">
+              <a:rPr lang="en-US" sz="3400" b="1" dirty="0">
                 <a:solidFill>
                   <a:srgbClr val="003A63"/>
                 </a:solidFill>
@@ -7355,20 +7636,20 @@
               </a:rPr>
               <a:t>Reflection Questions Continued</a:t>
             </a:r>
-            <a:endParaRPr lang="en-US" sz="2700" dirty="0"/>
-          </a:p>
-        </p:txBody>
-      </p:sp>
-      <p:sp>
-        <p:nvSpPr>
-          <p:cNvPr id="8" name="Text 6"/>
-          <p:cNvSpPr/>
-          <p:nvPr/>
-        </p:nvSpPr>
-        <p:spPr>
-          <a:xfrm>
-            <a:off x="868680" y="1417320"/>
-            <a:ext cx="6675120" cy="4434840"/>
+            <a:endParaRPr lang="en-US" sz="3400" dirty="0"/>
+          </a:p>
+        </p:txBody>
+      </p:sp>
+      <p:sp>
+        <p:nvSpPr>
+          <p:cNvPr id="9" name="Text 7"/>
+          <p:cNvSpPr/>
+          <p:nvPr/>
+        </p:nvSpPr>
+        <p:spPr>
+          <a:xfrm>
+            <a:off x="868680" y="1508760"/>
+            <a:ext cx="6537960" cy="4160520"/>
           </a:xfrm>
           <a:prstGeom prst="rect">
             <a:avLst/>
@@ -7383,7 +7664,7 @@
           <a:lstStyle/>
           <a:p>
             <a:r>
-              <a:rPr lang="en-US" sz="1700" dirty="0">
+              <a:rPr lang="en-US" sz="2100" dirty="0">
                 <a:solidFill>
                   <a:srgbClr val="17364A"/>
                 </a:solidFill>
@@ -7393,11 +7674,11 @@
               </a:rPr>
               <a:t>Which terminology standards are required for the workflow?</a:t>
             </a:r>
-            <a:endParaRPr lang="en-US" sz="1700" dirty="0"/>
-          </a:p>
-          <a:p>
-            <a:r>
-              <a:rPr lang="en-US" sz="1700" dirty="0">
+            <a:endParaRPr lang="en-US" sz="2100" dirty="0"/>
+          </a:p>
+          <a:p>
+            <a:r>
+              <a:rPr lang="en-US" sz="2100" dirty="0">
                 <a:solidFill>
                   <a:srgbClr val="17364A"/>
                 </a:solidFill>
@@ -7407,13 +7688,13 @@
               </a:rPr>
               <a:t>How would interoperability gaps affect AI outputs or equity?</a:t>
             </a:r>
-            <a:endParaRPr lang="en-US" sz="1700" dirty="0"/>
-          </a:p>
-        </p:txBody>
-      </p:sp>
-      <p:sp>
-        <p:nvSpPr>
-          <p:cNvPr id="9" name="Shape 7"/>
+            <a:endParaRPr lang="en-US" sz="2100" dirty="0"/>
+          </a:p>
+        </p:txBody>
+      </p:sp>
+      <p:sp>
+        <p:nvSpPr>
+          <p:cNvPr id="10" name="Shape 8"/>
           <p:cNvSpPr/>
           <p:nvPr/>
         </p:nvSpPr>
@@ -7440,14 +7721,14 @@
       </p:sp>
       <p:sp>
         <p:nvSpPr>
-          <p:cNvPr id="10" name="Text 8"/>
+          <p:cNvPr id="11" name="Text 9"/>
           <p:cNvSpPr/>
           <p:nvPr/>
         </p:nvSpPr>
         <p:spPr>
           <a:xfrm>
             <a:off x="8074152" y="1563624"/>
-            <a:ext cx="2825496" cy="201168"/>
+            <a:ext cx="2825496" cy="256032"/>
           </a:xfrm>
           <a:prstGeom prst="rect">
             <a:avLst/>
@@ -7463,7 +7744,7 @@
               <a:buNone/>
             </a:pPr>
             <a:r>
-              <a:rPr lang="en-US" sz="950" b="1" dirty="0">
+              <a:rPr lang="en-US" sz="1300" b="1" dirty="0">
                 <a:solidFill>
                   <a:srgbClr val="0068B7"/>
                 </a:solidFill>
@@ -7473,20 +7754,20 @@
               </a:rPr>
               <a:t>Key idea</a:t>
             </a:r>
-            <a:endParaRPr lang="en-US" sz="950" dirty="0"/>
-          </a:p>
-        </p:txBody>
-      </p:sp>
-      <p:sp>
-        <p:nvSpPr>
-          <p:cNvPr id="11" name="Text 9"/>
-          <p:cNvSpPr/>
-          <p:nvPr/>
-        </p:nvSpPr>
-        <p:spPr>
-          <a:xfrm>
-            <a:off x="8074152" y="1856232"/>
-            <a:ext cx="2825496" cy="1261872"/>
+            <a:endParaRPr lang="en-US" sz="1300" dirty="0"/>
+          </a:p>
+        </p:txBody>
+      </p:sp>
+      <p:sp>
+        <p:nvSpPr>
+          <p:cNvPr id="12" name="Text 10"/>
+          <p:cNvSpPr/>
+          <p:nvPr/>
+        </p:nvSpPr>
+        <p:spPr>
+          <a:xfrm>
+            <a:off x="8074152" y="1920240"/>
+            <a:ext cx="2825496" cy="1188720"/>
           </a:xfrm>
           <a:prstGeom prst="rect">
             <a:avLst/>
@@ -7504,7 +7785,7 @@
               <a:buNone/>
             </a:pPr>
             <a:r>
-              <a:rPr lang="en-US" sz="1250" dirty="0">
+              <a:rPr lang="en-US" sz="1550" dirty="0">
                 <a:solidFill>
                   <a:srgbClr val="17364A"/>
                 </a:solidFill>
@@ -7514,13 +7795,13 @@
               </a:rPr>
               <a:t>Which terminology standards are required for the workflow?</a:t>
             </a:r>
-            <a:endParaRPr lang="en-US" sz="1250" dirty="0"/>
-          </a:p>
-        </p:txBody>
-      </p:sp>
-      <p:sp>
-        <p:nvSpPr>
-          <p:cNvPr id="12" name="Shape 10"/>
+            <a:endParaRPr lang="en-US" sz="1550" dirty="0"/>
+          </a:p>
+        </p:txBody>
+      </p:sp>
+      <p:sp>
+        <p:nvSpPr>
+          <p:cNvPr id="13" name="Shape 11"/>
           <p:cNvSpPr/>
           <p:nvPr/>
         </p:nvSpPr>
@@ -7547,14 +7828,14 @@
       </p:sp>
       <p:sp>
         <p:nvSpPr>
-          <p:cNvPr id="13" name="Text 11"/>
+          <p:cNvPr id="14" name="Text 12"/>
           <p:cNvSpPr/>
           <p:nvPr/>
         </p:nvSpPr>
         <p:spPr>
           <a:xfrm>
             <a:off x="8074152" y="3666744"/>
-            <a:ext cx="2825496" cy="201168"/>
+            <a:ext cx="2825496" cy="256032"/>
           </a:xfrm>
           <a:prstGeom prst="rect">
             <a:avLst/>
@@ -7570,7 +7851,7 @@
               <a:buNone/>
             </a:pPr>
             <a:r>
-              <a:rPr lang="en-US" sz="950" b="1" dirty="0">
+              <a:rPr lang="en-US" sz="1300" b="1" dirty="0">
                 <a:solidFill>
                   <a:srgbClr val="0068B7"/>
                 </a:solidFill>
@@ -7580,20 +7861,20 @@
               </a:rPr>
               <a:t>Use this for</a:t>
             </a:r>
-            <a:endParaRPr lang="en-US" sz="950" dirty="0"/>
-          </a:p>
-        </p:txBody>
-      </p:sp>
-      <p:sp>
-        <p:nvSpPr>
-          <p:cNvPr id="14" name="Text 12"/>
-          <p:cNvSpPr/>
-          <p:nvPr/>
-        </p:nvSpPr>
-        <p:spPr>
-          <a:xfrm>
-            <a:off x="8074152" y="3959352"/>
-            <a:ext cx="2825496" cy="1170432"/>
+            <a:endParaRPr lang="en-US" sz="1300" dirty="0"/>
+          </a:p>
+        </p:txBody>
+      </p:sp>
+      <p:sp>
+        <p:nvSpPr>
+          <p:cNvPr id="15" name="Text 13"/>
+          <p:cNvSpPr/>
+          <p:nvPr/>
+        </p:nvSpPr>
+        <p:spPr>
+          <a:xfrm>
+            <a:off x="8074152" y="4023360"/>
+            <a:ext cx="2825496" cy="1097280"/>
           </a:xfrm>
           <a:prstGeom prst="rect">
             <a:avLst/>
@@ -7611,7 +7892,7 @@
               <a:buNone/>
             </a:pPr>
             <a:r>
-              <a:rPr lang="en-US" sz="1250" dirty="0">
+              <a:rPr lang="en-US" sz="1550" dirty="0">
                 <a:solidFill>
                   <a:srgbClr val="17364A"/>
                 </a:solidFill>
@@ -7621,7 +7902,7 @@
               </a:rPr>
               <a:t>Connect the concept to public health decisions, safeguards, documentation, or implementation work.</a:t>
             </a:r>
-            <a:endParaRPr lang="en-US" sz="1250" dirty="0"/>
+            <a:endParaRPr lang="en-US" sz="1550" dirty="0"/>
           </a:p>
         </p:txBody>
       </p:sp>
@@ -7818,7 +8099,7 @@
                 <a:ea typeface="Aptos" pitchFamily="34" charset="-122"/>
                 <a:cs typeface="Aptos" pitchFamily="34" charset="-120"/>
               </a:rPr>
-              <a:t>© Paula Soper</a:t>
+              <a:t>Â© Paula Soper</a:t>
             </a:r>
             <a:endParaRPr lang="en-US" sz="800" dirty="0"/>
           </a:p>
@@ -7826,7 +8107,46 @@
       </p:sp>
       <p:sp>
         <p:nvSpPr>
-          <p:cNvPr id="7" name="Shape 5"/>
+          <p:cNvPr id="7" name="Text 5"/>
+          <p:cNvSpPr/>
+          <p:nvPr/>
+        </p:nvSpPr>
+        <p:spPr>
+          <a:xfrm>
+            <a:off x="11137392" y="6510528"/>
+            <a:ext cx="411480" cy="201168"/>
+          </a:xfrm>
+          <a:prstGeom prst="rect">
+            <a:avLst/>
+          </a:prstGeom>
+          <a:noFill/>
+          <a:ln/>
+        </p:spPr>
+        <p:txBody>
+          <a:bodyPr wrap="square" lIns="0" tIns="0" rIns="0" bIns="0" rtlCol="0" anchor="ctr"/>
+          <a:lstStyle/>
+          <a:p>
+            <a:pPr algn="r" indent="0" marL="0">
+              <a:buNone/>
+            </a:pPr>
+            <a:r>
+              <a:rPr lang="en-US" sz="900" dirty="0">
+                <a:solidFill>
+                  <a:srgbClr val="5F7181"/>
+                </a:solidFill>
+                <a:latin typeface="Aptos" pitchFamily="34" charset="0"/>
+                <a:ea typeface="Aptos" pitchFamily="34" charset="-122"/>
+                <a:cs typeface="Aptos" pitchFamily="34" charset="-120"/>
+              </a:rPr>
+              <a:t>18</a:t>
+            </a:r>
+            <a:endParaRPr lang="en-US" sz="900" dirty="0"/>
+          </a:p>
+        </p:txBody>
+      </p:sp>
+      <p:sp>
+        <p:nvSpPr>
+          <p:cNvPr id="8" name="Shape 6"/>
           <p:cNvSpPr/>
           <p:nvPr/>
         </p:nvSpPr>
@@ -7851,7 +8171,7 @@
       </p:sp>
       <p:sp>
         <p:nvSpPr>
-          <p:cNvPr id="8" name="Text 6"/>
+          <p:cNvPr id="9" name="Text 7"/>
           <p:cNvSpPr/>
           <p:nvPr/>
         </p:nvSpPr>
@@ -7890,14 +8210,14 @@
       </p:sp>
       <p:sp>
         <p:nvSpPr>
-          <p:cNvPr id="9" name="Text 7"/>
+          <p:cNvPr id="10" name="Text 8"/>
           <p:cNvSpPr/>
           <p:nvPr/>
         </p:nvSpPr>
         <p:spPr>
           <a:xfrm>
             <a:off x="640080" y="621792"/>
-            <a:ext cx="10881360" cy="566928"/>
+            <a:ext cx="10881360" cy="713232"/>
           </a:xfrm>
           <a:prstGeom prst="rect">
             <a:avLst/>
@@ -7915,7 +8235,7 @@
               <a:buNone/>
             </a:pPr>
             <a:r>
-              <a:rPr lang="en-US" sz="2700" b="1" dirty="0">
+              <a:rPr lang="en-US" sz="3400" b="1" dirty="0">
                 <a:solidFill>
                   <a:srgbClr val="003A63"/>
                 </a:solidFill>
@@ -7925,20 +8245,20 @@
               </a:rPr>
               <a:t>Practical Exercise</a:t>
             </a:r>
-            <a:endParaRPr lang="en-US" sz="2700" dirty="0"/>
-          </a:p>
-        </p:txBody>
-      </p:sp>
-      <p:sp>
-        <p:nvSpPr>
-          <p:cNvPr id="10" name="Text 8"/>
-          <p:cNvSpPr/>
-          <p:nvPr/>
-        </p:nvSpPr>
-        <p:spPr>
-          <a:xfrm>
-            <a:off x="868680" y="1417320"/>
-            <a:ext cx="6675120" cy="4434840"/>
+            <a:endParaRPr lang="en-US" sz="3400" dirty="0"/>
+          </a:p>
+        </p:txBody>
+      </p:sp>
+      <p:sp>
+        <p:nvSpPr>
+          <p:cNvPr id="11" name="Text 9"/>
+          <p:cNvSpPr/>
+          <p:nvPr/>
+        </p:nvSpPr>
+        <p:spPr>
+          <a:xfrm>
+            <a:off x="868680" y="1508760"/>
+            <a:ext cx="6537960" cy="4160520"/>
           </a:xfrm>
           <a:prstGeom prst="rect">
             <a:avLst/>
@@ -7953,7 +8273,7 @@
           <a:lstStyle/>
           <a:p>
             <a:r>
-              <a:rPr lang="en-US" sz="1700" dirty="0">
+              <a:rPr lang="en-US" sz="2100" dirty="0">
                 <a:solidFill>
                   <a:srgbClr val="17364A"/>
                 </a:solidFill>
@@ -7963,11 +8283,11 @@
               </a:rPr>
               <a:t>Create an interoperability review checklist for one proposed AI-supported workflow.</a:t>
             </a:r>
-            <a:endParaRPr lang="en-US" sz="1700" dirty="0"/>
-          </a:p>
-          <a:p>
-            <a:r>
-              <a:rPr lang="en-US" sz="1700" dirty="0">
+            <a:endParaRPr lang="en-US" sz="2100" dirty="0"/>
+          </a:p>
+          <a:p>
+            <a:r>
+              <a:rPr lang="en-US" sz="2100" dirty="0">
                 <a:solidFill>
                   <a:srgbClr val="17364A"/>
                 </a:solidFill>
@@ -7975,13 +8295,13 @@
                 <a:ea typeface="Aptos" pitchFamily="34" charset="-122"/>
                 <a:cs typeface="Aptos" pitchFamily="34" charset="-120"/>
               </a:rPr>
-              <a:t>Identify the sending and receiving systems, exchange standard, required data elements, terminology standards, validation.</a:t>
-            </a:r>
-            <a:endParaRPr lang="en-US" sz="1700" dirty="0"/>
-          </a:p>
-          <a:p>
-            <a:r>
-              <a:rPr lang="en-US" sz="1700" dirty="0">
+              <a:t>Identify the sending and receiving systems, exchange standard, required data elements, terminology.</a:t>
+            </a:r>
+            <a:endParaRPr lang="en-US" sz="2100" dirty="0"/>
+          </a:p>
+          <a:p>
+            <a:r>
+              <a:rPr lang="en-US" sz="2100" dirty="0">
                 <a:solidFill>
                   <a:srgbClr val="17364A"/>
                 </a:solidFill>
@@ -7989,15 +8309,15 @@
                 <a:ea typeface="Aptos" pitchFamily="34" charset="-122"/>
                 <a:cs typeface="Aptos" pitchFamily="34" charset="-120"/>
               </a:rPr>
-              <a:t>Include at least one test scenario that would show whether the exchange supports the public health use case.</a:t>
-            </a:r>
-            <a:endParaRPr lang="en-US" sz="1700" dirty="0"/>
-          </a:p>
-        </p:txBody>
-      </p:sp>
-      <p:sp>
-        <p:nvSpPr>
-          <p:cNvPr id="11" name="Shape 9"/>
+              <a:t>Include at least one test scenario that would show whether the exchange supports the public health use.</a:t>
+            </a:r>
+            <a:endParaRPr lang="en-US" sz="2100" dirty="0"/>
+          </a:p>
+        </p:txBody>
+      </p:sp>
+      <p:sp>
+        <p:nvSpPr>
+          <p:cNvPr id="12" name="Shape 10"/>
           <p:cNvSpPr/>
           <p:nvPr/>
         </p:nvSpPr>
@@ -8024,14 +8344,14 @@
       </p:sp>
       <p:sp>
         <p:nvSpPr>
-          <p:cNvPr id="12" name="Text 10"/>
+          <p:cNvPr id="13" name="Text 11"/>
           <p:cNvSpPr/>
           <p:nvPr/>
         </p:nvSpPr>
         <p:spPr>
           <a:xfrm>
             <a:off x="8074152" y="1563624"/>
-            <a:ext cx="2825496" cy="201168"/>
+            <a:ext cx="2825496" cy="256032"/>
           </a:xfrm>
           <a:prstGeom prst="rect">
             <a:avLst/>
@@ -8047,7 +8367,7 @@
               <a:buNone/>
             </a:pPr>
             <a:r>
-              <a:rPr lang="en-US" sz="950" b="1" dirty="0">
+              <a:rPr lang="en-US" sz="1300" b="1" dirty="0">
                 <a:solidFill>
                   <a:srgbClr val="0068B7"/>
                 </a:solidFill>
@@ -8057,20 +8377,20 @@
               </a:rPr>
               <a:t>Key idea</a:t>
             </a:r>
-            <a:endParaRPr lang="en-US" sz="950" dirty="0"/>
-          </a:p>
-        </p:txBody>
-      </p:sp>
-      <p:sp>
-        <p:nvSpPr>
-          <p:cNvPr id="13" name="Text 11"/>
-          <p:cNvSpPr/>
-          <p:nvPr/>
-        </p:nvSpPr>
-        <p:spPr>
-          <a:xfrm>
-            <a:off x="8074152" y="1856232"/>
-            <a:ext cx="2825496" cy="1261872"/>
+            <a:endParaRPr lang="en-US" sz="1300" dirty="0"/>
+          </a:p>
+        </p:txBody>
+      </p:sp>
+      <p:sp>
+        <p:nvSpPr>
+          <p:cNvPr id="14" name="Text 12"/>
+          <p:cNvSpPr/>
+          <p:nvPr/>
+        </p:nvSpPr>
+        <p:spPr>
+          <a:xfrm>
+            <a:off x="8074152" y="1920240"/>
+            <a:ext cx="2825496" cy="1188720"/>
           </a:xfrm>
           <a:prstGeom prst="rect">
             <a:avLst/>
@@ -8088,7 +8408,7 @@
               <a:buNone/>
             </a:pPr>
             <a:r>
-              <a:rPr lang="en-US" sz="1250" dirty="0">
+              <a:rPr lang="en-US" sz="1550" dirty="0">
                 <a:solidFill>
                   <a:srgbClr val="17364A"/>
                 </a:solidFill>
@@ -8098,13 +8418,13 @@
               </a:rPr>
               <a:t>Create an interoperability review checklist for one proposed AI-supported workflow.</a:t>
             </a:r>
-            <a:endParaRPr lang="en-US" sz="1250" dirty="0"/>
-          </a:p>
-        </p:txBody>
-      </p:sp>
-      <p:sp>
-        <p:nvSpPr>
-          <p:cNvPr id="14" name="Shape 12"/>
+            <a:endParaRPr lang="en-US" sz="1550" dirty="0"/>
+          </a:p>
+        </p:txBody>
+      </p:sp>
+      <p:sp>
+        <p:nvSpPr>
+          <p:cNvPr id="15" name="Shape 13"/>
           <p:cNvSpPr/>
           <p:nvPr/>
         </p:nvSpPr>
@@ -8131,14 +8451,14 @@
       </p:sp>
       <p:sp>
         <p:nvSpPr>
-          <p:cNvPr id="15" name="Text 13"/>
+          <p:cNvPr id="16" name="Text 14"/>
           <p:cNvSpPr/>
           <p:nvPr/>
         </p:nvSpPr>
         <p:spPr>
           <a:xfrm>
             <a:off x="8074152" y="3666744"/>
-            <a:ext cx="2825496" cy="201168"/>
+            <a:ext cx="2825496" cy="256032"/>
           </a:xfrm>
           <a:prstGeom prst="rect">
             <a:avLst/>
@@ -8154,7 +8474,7 @@
               <a:buNone/>
             </a:pPr>
             <a:r>
-              <a:rPr lang="en-US" sz="950" b="1" dirty="0">
+              <a:rPr lang="en-US" sz="1300" b="1" dirty="0">
                 <a:solidFill>
                   <a:srgbClr val="0068B7"/>
                 </a:solidFill>
@@ -8164,20 +8484,20 @@
               </a:rPr>
               <a:t>Use this for</a:t>
             </a:r>
-            <a:endParaRPr lang="en-US" sz="950" dirty="0"/>
-          </a:p>
-        </p:txBody>
-      </p:sp>
-      <p:sp>
-        <p:nvSpPr>
-          <p:cNvPr id="16" name="Text 14"/>
-          <p:cNvSpPr/>
-          <p:nvPr/>
-        </p:nvSpPr>
-        <p:spPr>
-          <a:xfrm>
-            <a:off x="8074152" y="3959352"/>
-            <a:ext cx="2825496" cy="1170432"/>
+            <a:endParaRPr lang="en-US" sz="1300" dirty="0"/>
+          </a:p>
+        </p:txBody>
+      </p:sp>
+      <p:sp>
+        <p:nvSpPr>
+          <p:cNvPr id="17" name="Text 15"/>
+          <p:cNvSpPr/>
+          <p:nvPr/>
+        </p:nvSpPr>
+        <p:spPr>
+          <a:xfrm>
+            <a:off x="8074152" y="4023360"/>
+            <a:ext cx="2825496" cy="1097280"/>
           </a:xfrm>
           <a:prstGeom prst="rect">
             <a:avLst/>
@@ -8195,7 +8515,7 @@
               <a:buNone/>
             </a:pPr>
             <a:r>
-              <a:rPr lang="en-US" sz="1250" dirty="0">
+              <a:rPr lang="en-US" sz="1550" dirty="0">
                 <a:solidFill>
                   <a:srgbClr val="17364A"/>
                 </a:solidFill>
@@ -8205,7 +8525,7 @@
               </a:rPr>
               <a:t>Connect the concept to public health decisions, safeguards, documentation, or implementation work.</a:t>
             </a:r>
-            <a:endParaRPr lang="en-US" sz="1250" dirty="0"/>
+            <a:endParaRPr lang="en-US" sz="1550" dirty="0"/>
           </a:p>
         </p:txBody>
       </p:sp>
@@ -8402,7 +8722,7 @@
                 <a:ea typeface="Aptos" pitchFamily="34" charset="-122"/>
                 <a:cs typeface="Aptos" pitchFamily="34" charset="-120"/>
               </a:rPr>
-              <a:t>© Paula Soper</a:t>
+              <a:t>Â© Paula Soper</a:t>
             </a:r>
             <a:endParaRPr lang="en-US" sz="800" dirty="0"/>
           </a:p>
@@ -8410,7 +8730,46 @@
       </p:sp>
       <p:sp>
         <p:nvSpPr>
-          <p:cNvPr id="7" name="Shape 5"/>
+          <p:cNvPr id="7" name="Text 5"/>
+          <p:cNvSpPr/>
+          <p:nvPr/>
+        </p:nvSpPr>
+        <p:spPr>
+          <a:xfrm>
+            <a:off x="11137392" y="6510528"/>
+            <a:ext cx="411480" cy="201168"/>
+          </a:xfrm>
+          <a:prstGeom prst="rect">
+            <a:avLst/>
+          </a:prstGeom>
+          <a:noFill/>
+          <a:ln/>
+        </p:spPr>
+        <p:txBody>
+          <a:bodyPr wrap="square" lIns="0" tIns="0" rIns="0" bIns="0" rtlCol="0" anchor="ctr"/>
+          <a:lstStyle/>
+          <a:p>
+            <a:pPr algn="r" indent="0" marL="0">
+              <a:buNone/>
+            </a:pPr>
+            <a:r>
+              <a:rPr lang="en-US" sz="900" dirty="0">
+                <a:solidFill>
+                  <a:srgbClr val="5F7181"/>
+                </a:solidFill>
+                <a:latin typeface="Aptos" pitchFamily="34" charset="0"/>
+                <a:ea typeface="Aptos" pitchFamily="34" charset="-122"/>
+                <a:cs typeface="Aptos" pitchFamily="34" charset="-120"/>
+              </a:rPr>
+              <a:t>19</a:t>
+            </a:r>
+            <a:endParaRPr lang="en-US" sz="900" dirty="0"/>
+          </a:p>
+        </p:txBody>
+      </p:sp>
+      <p:sp>
+        <p:nvSpPr>
+          <p:cNvPr id="8" name="Shape 6"/>
           <p:cNvSpPr/>
           <p:nvPr/>
         </p:nvSpPr>
@@ -8435,7 +8794,7 @@
       </p:sp>
       <p:sp>
         <p:nvSpPr>
-          <p:cNvPr id="8" name="Text 6"/>
+          <p:cNvPr id="9" name="Text 7"/>
           <p:cNvSpPr/>
           <p:nvPr/>
         </p:nvSpPr>
@@ -8474,14 +8833,14 @@
       </p:sp>
       <p:sp>
         <p:nvSpPr>
-          <p:cNvPr id="9" name="Text 7"/>
+          <p:cNvPr id="10" name="Text 8"/>
           <p:cNvSpPr/>
           <p:nvPr/>
         </p:nvSpPr>
         <p:spPr>
           <a:xfrm>
             <a:off x="640080" y="621792"/>
-            <a:ext cx="10881360" cy="566928"/>
+            <a:ext cx="10881360" cy="713232"/>
           </a:xfrm>
           <a:prstGeom prst="rect">
             <a:avLst/>
@@ -8499,7 +8858,7 @@
               <a:buNone/>
             </a:pPr>
             <a:r>
-              <a:rPr lang="en-US" sz="2700" b="1" dirty="0">
+              <a:rPr lang="en-US" sz="3400" b="1" dirty="0">
                 <a:solidFill>
                   <a:srgbClr val="003A63"/>
                 </a:solidFill>
@@ -8509,20 +8868,20 @@
               </a:rPr>
               <a:t>Expected Artifact or Evidence</a:t>
             </a:r>
-            <a:endParaRPr lang="en-US" sz="2700" dirty="0"/>
-          </a:p>
-        </p:txBody>
-      </p:sp>
-      <p:sp>
-        <p:nvSpPr>
-          <p:cNvPr id="10" name="Text 8"/>
-          <p:cNvSpPr/>
-          <p:nvPr/>
-        </p:nvSpPr>
-        <p:spPr>
-          <a:xfrm>
-            <a:off x="868680" y="1417320"/>
-            <a:ext cx="6675120" cy="4434840"/>
+            <a:endParaRPr lang="en-US" sz="3400" dirty="0"/>
+          </a:p>
+        </p:txBody>
+      </p:sp>
+      <p:sp>
+        <p:nvSpPr>
+          <p:cNvPr id="11" name="Text 9"/>
+          <p:cNvSpPr/>
+          <p:nvPr/>
+        </p:nvSpPr>
+        <p:spPr>
+          <a:xfrm>
+            <a:off x="868680" y="1508760"/>
+            <a:ext cx="6537960" cy="4160520"/>
           </a:xfrm>
           <a:prstGeom prst="rect">
             <a:avLst/>
@@ -8537,7 +8896,7 @@
           <a:lstStyle/>
           <a:p>
             <a:r>
-              <a:rPr lang="en-US" sz="1700" dirty="0">
+              <a:rPr lang="en-US" sz="2100" dirty="0">
                 <a:solidFill>
                   <a:srgbClr val="17364A"/>
                 </a:solidFill>
@@ -8547,11 +8906,11 @@
               </a:rPr>
               <a:t>Interoperability checklist</a:t>
             </a:r>
-            <a:endParaRPr lang="en-US" sz="1700" dirty="0"/>
-          </a:p>
-          <a:p>
-            <a:r>
-              <a:rPr lang="en-US" sz="1700" dirty="0">
+            <a:endParaRPr lang="en-US" sz="2100" dirty="0"/>
+          </a:p>
+          <a:p>
+            <a:r>
+              <a:rPr lang="en-US" sz="2100" dirty="0">
                 <a:solidFill>
                   <a:srgbClr val="17364A"/>
                 </a:solidFill>
@@ -8561,11 +8920,11 @@
               </a:rPr>
               <a:t>Data exchange diagram</a:t>
             </a:r>
-            <a:endParaRPr lang="en-US" sz="1700" dirty="0"/>
-          </a:p>
-          <a:p>
-            <a:r>
-              <a:rPr lang="en-US" sz="1700" dirty="0">
+            <a:endParaRPr lang="en-US" sz="2100" dirty="0"/>
+          </a:p>
+          <a:p>
+            <a:r>
+              <a:rPr lang="en-US" sz="2100" dirty="0">
                 <a:solidFill>
                   <a:srgbClr val="17364A"/>
                 </a:solidFill>
@@ -8575,13 +8934,13 @@
               </a:rPr>
               <a:t>Vendor questions</a:t>
             </a:r>
-            <a:endParaRPr lang="en-US" sz="1700" dirty="0"/>
-          </a:p>
-        </p:txBody>
-      </p:sp>
-      <p:sp>
-        <p:nvSpPr>
-          <p:cNvPr id="11" name="Shape 9"/>
+            <a:endParaRPr lang="en-US" sz="2100" dirty="0"/>
+          </a:p>
+        </p:txBody>
+      </p:sp>
+      <p:sp>
+        <p:nvSpPr>
+          <p:cNvPr id="12" name="Shape 10"/>
           <p:cNvSpPr/>
           <p:nvPr/>
         </p:nvSpPr>
@@ -8608,14 +8967,14 @@
       </p:sp>
       <p:sp>
         <p:nvSpPr>
-          <p:cNvPr id="12" name="Text 10"/>
+          <p:cNvPr id="13" name="Text 11"/>
           <p:cNvSpPr/>
           <p:nvPr/>
         </p:nvSpPr>
         <p:spPr>
           <a:xfrm>
             <a:off x="8074152" y="1563624"/>
-            <a:ext cx="2825496" cy="201168"/>
+            <a:ext cx="2825496" cy="256032"/>
           </a:xfrm>
           <a:prstGeom prst="rect">
             <a:avLst/>
@@ -8631,7 +8990,7 @@
               <a:buNone/>
             </a:pPr>
             <a:r>
-              <a:rPr lang="en-US" sz="950" b="1" dirty="0">
+              <a:rPr lang="en-US" sz="1300" b="1" dirty="0">
                 <a:solidFill>
                   <a:srgbClr val="0068B7"/>
                 </a:solidFill>
@@ -8641,20 +9000,20 @@
               </a:rPr>
               <a:t>Key idea</a:t>
             </a:r>
-            <a:endParaRPr lang="en-US" sz="950" dirty="0"/>
-          </a:p>
-        </p:txBody>
-      </p:sp>
-      <p:sp>
-        <p:nvSpPr>
-          <p:cNvPr id="13" name="Text 11"/>
-          <p:cNvSpPr/>
-          <p:nvPr/>
-        </p:nvSpPr>
-        <p:spPr>
-          <a:xfrm>
-            <a:off x="8074152" y="1856232"/>
-            <a:ext cx="2825496" cy="1261872"/>
+            <a:endParaRPr lang="en-US" sz="1300" dirty="0"/>
+          </a:p>
+        </p:txBody>
+      </p:sp>
+      <p:sp>
+        <p:nvSpPr>
+          <p:cNvPr id="14" name="Text 12"/>
+          <p:cNvSpPr/>
+          <p:nvPr/>
+        </p:nvSpPr>
+        <p:spPr>
+          <a:xfrm>
+            <a:off x="8074152" y="1920240"/>
+            <a:ext cx="2825496" cy="1188720"/>
           </a:xfrm>
           <a:prstGeom prst="rect">
             <a:avLst/>
@@ -8672,7 +9031,7 @@
               <a:buNone/>
             </a:pPr>
             <a:r>
-              <a:rPr lang="en-US" sz="1250" dirty="0">
+              <a:rPr lang="en-US" sz="1550" dirty="0">
                 <a:solidFill>
                   <a:srgbClr val="17364A"/>
                 </a:solidFill>
@@ -8682,13 +9041,13 @@
               </a:rPr>
               <a:t>Interoperability checklist</a:t>
             </a:r>
-            <a:endParaRPr lang="en-US" sz="1250" dirty="0"/>
-          </a:p>
-        </p:txBody>
-      </p:sp>
-      <p:sp>
-        <p:nvSpPr>
-          <p:cNvPr id="14" name="Shape 12"/>
+            <a:endParaRPr lang="en-US" sz="1550" dirty="0"/>
+          </a:p>
+        </p:txBody>
+      </p:sp>
+      <p:sp>
+        <p:nvSpPr>
+          <p:cNvPr id="15" name="Shape 13"/>
           <p:cNvSpPr/>
           <p:nvPr/>
         </p:nvSpPr>
@@ -8715,14 +9074,14 @@
       </p:sp>
       <p:sp>
         <p:nvSpPr>
-          <p:cNvPr id="15" name="Text 13"/>
+          <p:cNvPr id="16" name="Text 14"/>
           <p:cNvSpPr/>
           <p:nvPr/>
         </p:nvSpPr>
         <p:spPr>
           <a:xfrm>
             <a:off x="8074152" y="3666744"/>
-            <a:ext cx="2825496" cy="201168"/>
+            <a:ext cx="2825496" cy="256032"/>
           </a:xfrm>
           <a:prstGeom prst="rect">
             <a:avLst/>
@@ -8738,7 +9097,7 @@
               <a:buNone/>
             </a:pPr>
             <a:r>
-              <a:rPr lang="en-US" sz="950" b="1" dirty="0">
+              <a:rPr lang="en-US" sz="1300" b="1" dirty="0">
                 <a:solidFill>
                   <a:srgbClr val="0068B7"/>
                 </a:solidFill>
@@ -8748,20 +9107,20 @@
               </a:rPr>
               <a:t>Use this for</a:t>
             </a:r>
-            <a:endParaRPr lang="en-US" sz="950" dirty="0"/>
-          </a:p>
-        </p:txBody>
-      </p:sp>
-      <p:sp>
-        <p:nvSpPr>
-          <p:cNvPr id="16" name="Text 14"/>
-          <p:cNvSpPr/>
-          <p:nvPr/>
-        </p:nvSpPr>
-        <p:spPr>
-          <a:xfrm>
-            <a:off x="8074152" y="3959352"/>
-            <a:ext cx="2825496" cy="1170432"/>
+            <a:endParaRPr lang="en-US" sz="1300" dirty="0"/>
+          </a:p>
+        </p:txBody>
+      </p:sp>
+      <p:sp>
+        <p:nvSpPr>
+          <p:cNvPr id="17" name="Text 15"/>
+          <p:cNvSpPr/>
+          <p:nvPr/>
+        </p:nvSpPr>
+        <p:spPr>
+          <a:xfrm>
+            <a:off x="8074152" y="4023360"/>
+            <a:ext cx="2825496" cy="1097280"/>
           </a:xfrm>
           <a:prstGeom prst="rect">
             <a:avLst/>
@@ -8779,7 +9138,7 @@
               <a:buNone/>
             </a:pPr>
             <a:r>
-              <a:rPr lang="en-US" sz="1250" dirty="0">
+              <a:rPr lang="en-US" sz="1550" dirty="0">
                 <a:solidFill>
                   <a:srgbClr val="17364A"/>
                 </a:solidFill>
@@ -8789,7 +9148,7 @@
               </a:rPr>
               <a:t>Connect the concept to public health decisions, safeguards, documentation, or implementation work.</a:t>
             </a:r>
-            <a:endParaRPr lang="en-US" sz="1250" dirty="0"/>
+            <a:endParaRPr lang="en-US" sz="1550" dirty="0"/>
           </a:p>
         </p:txBody>
       </p:sp>
@@ -8986,7 +9345,7 @@
                 <a:ea typeface="Aptos" pitchFamily="34" charset="-122"/>
                 <a:cs typeface="Aptos" pitchFamily="34" charset="-120"/>
               </a:rPr>
-              <a:t>© Paula Soper</a:t>
+              <a:t>Â© Paula Soper</a:t>
             </a:r>
             <a:endParaRPr lang="en-US" sz="800" dirty="0"/>
           </a:p>
@@ -9000,8 +9359,47 @@
         </p:nvSpPr>
         <p:spPr>
           <a:xfrm>
+            <a:off x="11137392" y="6510528"/>
+            <a:ext cx="411480" cy="201168"/>
+          </a:xfrm>
+          <a:prstGeom prst="rect">
+            <a:avLst/>
+          </a:prstGeom>
+          <a:noFill/>
+          <a:ln/>
+        </p:spPr>
+        <p:txBody>
+          <a:bodyPr wrap="square" lIns="0" tIns="0" rIns="0" bIns="0" rtlCol="0" anchor="ctr"/>
+          <a:lstStyle/>
+          <a:p>
+            <a:pPr algn="r" indent="0" marL="0">
+              <a:buNone/>
+            </a:pPr>
+            <a:r>
+              <a:rPr lang="en-US" sz="900" dirty="0">
+                <a:solidFill>
+                  <a:srgbClr val="5F7181"/>
+                </a:solidFill>
+                <a:latin typeface="Aptos" pitchFamily="34" charset="0"/>
+                <a:ea typeface="Aptos" pitchFamily="34" charset="-122"/>
+                <a:cs typeface="Aptos" pitchFamily="34" charset="-120"/>
+              </a:rPr>
+              <a:t>2</a:t>
+            </a:r>
+            <a:endParaRPr lang="en-US" sz="900" dirty="0"/>
+          </a:p>
+        </p:txBody>
+      </p:sp>
+      <p:sp>
+        <p:nvSpPr>
+          <p:cNvPr id="8" name="Text 6"/>
+          <p:cNvSpPr/>
+          <p:nvPr/>
+        </p:nvSpPr>
+        <p:spPr>
+          <a:xfrm>
             <a:off x="640080" y="658368"/>
-            <a:ext cx="10881360" cy="566928"/>
+            <a:ext cx="10881360" cy="713232"/>
           </a:xfrm>
           <a:prstGeom prst="rect">
             <a:avLst/>
@@ -9019,7 +9417,7 @@
               <a:buNone/>
             </a:pPr>
             <a:r>
-              <a:rPr lang="en-US" sz="2700" b="1" dirty="0">
+              <a:rPr lang="en-US" sz="3400" b="1" dirty="0">
                 <a:solidFill>
                   <a:srgbClr val="003A63"/>
                 </a:solidFill>
@@ -9029,20 +9427,20 @@
               </a:rPr>
               <a:t>What this module helps you do</a:t>
             </a:r>
-            <a:endParaRPr lang="en-US" sz="2700" dirty="0"/>
-          </a:p>
-        </p:txBody>
-      </p:sp>
-      <p:sp>
-        <p:nvSpPr>
-          <p:cNvPr id="8" name="Text 6"/>
-          <p:cNvSpPr/>
-          <p:nvPr/>
-        </p:nvSpPr>
-        <p:spPr>
-          <a:xfrm>
-            <a:off x="868680" y="1417320"/>
-            <a:ext cx="6675120" cy="3291840"/>
+            <a:endParaRPr lang="en-US" sz="3400" dirty="0"/>
+          </a:p>
+        </p:txBody>
+      </p:sp>
+      <p:sp>
+        <p:nvSpPr>
+          <p:cNvPr id="9" name="Text 7"/>
+          <p:cNvSpPr/>
+          <p:nvPr/>
+        </p:nvSpPr>
+        <p:spPr>
+          <a:xfrm>
+            <a:off x="868680" y="1508760"/>
+            <a:ext cx="6446520" cy="2926080"/>
           </a:xfrm>
           <a:prstGeom prst="rect">
             <a:avLst/>
@@ -9057,7 +9455,7 @@
           <a:lstStyle/>
           <a:p>
             <a:r>
-              <a:rPr lang="en-US" sz="1700" dirty="0">
+              <a:rPr lang="en-US" sz="2100" dirty="0">
                 <a:solidFill>
                   <a:srgbClr val="17364A"/>
                 </a:solidFill>
@@ -9067,11 +9465,11 @@
               </a:rPr>
               <a:t>Public health AI depends on the ability of systems to exchange and interpret data.</a:t>
             </a:r>
-            <a:endParaRPr lang="en-US" sz="1700" dirty="0"/>
-          </a:p>
-          <a:p>
-            <a:r>
-              <a:rPr lang="en-US" sz="1700" dirty="0">
+            <a:endParaRPr lang="en-US" sz="2100" dirty="0"/>
+          </a:p>
+          <a:p>
+            <a:r>
+              <a:rPr lang="en-US" sz="2100" dirty="0">
                 <a:solidFill>
                   <a:srgbClr val="17364A"/>
                 </a:solidFill>
@@ -9079,13 +9477,13 @@
                 <a:ea typeface="Aptos" pitchFamily="34" charset="-122"/>
                 <a:cs typeface="Aptos" pitchFamily="34" charset="-120"/>
               </a:rPr>
-              <a:t>Interoperability is the discipline that makes this exchange possible across EHRs, laboratories, HIEs, IISs, surveillance systems, vital records.</a:t>
-            </a:r>
-            <a:endParaRPr lang="en-US" sz="1700" dirty="0"/>
-          </a:p>
-          <a:p>
-            <a:r>
-              <a:rPr lang="en-US" sz="1700" dirty="0">
+              <a:t>Interoperability is the discipline that makes this exchange possible across EHRs, laboratories, HIEs, IISs,.</a:t>
+            </a:r>
+            <a:endParaRPr lang="en-US" sz="2100" dirty="0"/>
+          </a:p>
+          <a:p>
+            <a:r>
+              <a:rPr lang="en-US" sz="2100" dirty="0">
                 <a:solidFill>
                   <a:srgbClr val="17364A"/>
                 </a:solidFill>
@@ -9093,15 +9491,15 @@
                 <a:ea typeface="Aptos" pitchFamily="34" charset="-122"/>
                 <a:cs typeface="Aptos" pitchFamily="34" charset="-120"/>
               </a:rPr>
-              <a:t>This module introduces the major standards that public health staff encounter, including HL7 v2, CDA, FHIR, implementation guides, APIs, and.</a:t>
-            </a:r>
-            <a:endParaRPr lang="en-US" sz="1700" dirty="0"/>
-          </a:p>
-        </p:txBody>
-      </p:sp>
-      <p:sp>
-        <p:nvSpPr>
-          <p:cNvPr id="9" name="Shape 7"/>
+              <a:t>This module introduces the major standards that public health staff encounter, including HL7 v2, CDA, FHIR,.</a:t>
+            </a:r>
+            <a:endParaRPr lang="en-US" sz="2100" dirty="0"/>
+          </a:p>
+        </p:txBody>
+      </p:sp>
+      <p:sp>
+        <p:nvSpPr>
+          <p:cNvPr id="10" name="Shape 8"/>
           <p:cNvSpPr/>
           <p:nvPr/>
         </p:nvSpPr>
@@ -9128,14 +9526,14 @@
       </p:sp>
       <p:sp>
         <p:nvSpPr>
-          <p:cNvPr id="10" name="Text 8"/>
+          <p:cNvPr id="11" name="Text 9"/>
           <p:cNvSpPr/>
           <p:nvPr/>
         </p:nvSpPr>
         <p:spPr>
           <a:xfrm>
             <a:off x="8074152" y="1563624"/>
-            <a:ext cx="2825496" cy="201168"/>
+            <a:ext cx="2825496" cy="256032"/>
           </a:xfrm>
           <a:prstGeom prst="rect">
             <a:avLst/>
@@ -9151,7 +9549,7 @@
               <a:buNone/>
             </a:pPr>
             <a:r>
-              <a:rPr lang="en-US" sz="950" b="1" dirty="0">
+              <a:rPr lang="en-US" sz="1300" b="1" dirty="0">
                 <a:solidFill>
                   <a:srgbClr val="0068B7"/>
                 </a:solidFill>
@@ -9161,20 +9559,20 @@
               </a:rPr>
               <a:t>Module details</a:t>
             </a:r>
-            <a:endParaRPr lang="en-US" sz="950" dirty="0"/>
-          </a:p>
-        </p:txBody>
-      </p:sp>
-      <p:sp>
-        <p:nvSpPr>
-          <p:cNvPr id="11" name="Text 9"/>
-          <p:cNvSpPr/>
-          <p:nvPr/>
-        </p:nvSpPr>
-        <p:spPr>
-          <a:xfrm>
-            <a:off x="8074152" y="1856232"/>
-            <a:ext cx="2825496" cy="1353312"/>
+            <a:endParaRPr lang="en-US" sz="1300" dirty="0"/>
+          </a:p>
+        </p:txBody>
+      </p:sp>
+      <p:sp>
+        <p:nvSpPr>
+          <p:cNvPr id="12" name="Text 10"/>
+          <p:cNvSpPr/>
+          <p:nvPr/>
+        </p:nvSpPr>
+        <p:spPr>
+          <a:xfrm>
+            <a:off x="8074152" y="1920240"/>
+            <a:ext cx="2825496" cy="1280160"/>
           </a:xfrm>
           <a:prstGeom prst="rect">
             <a:avLst/>
@@ -9192,7 +9590,7 @@
               <a:buNone/>
             </a:pPr>
             <a:r>
-              <a:rPr lang="en-US" sz="1250" dirty="0">
+              <a:rPr lang="en-US" sz="1550" dirty="0">
                 <a:solidFill>
                   <a:srgbClr val="17364A"/>
                 </a:solidFill>
@@ -9202,14 +9600,14 @@
               </a:rPr>
               <a:t>Level: applied/foundational</a:t>
             </a:r>
-            <a:endParaRPr lang="en-US" sz="1250" dirty="0"/>
+            <a:endParaRPr lang="en-US" sz="1550" dirty="0"/>
           </a:p>
           <a:p>
             <a:pPr indent="0" marL="0">
               <a:buNone/>
             </a:pPr>
             <a:r>
-              <a:rPr lang="en-US" sz="1250" dirty="0">
+              <a:rPr lang="en-US" sz="1550" dirty="0">
                 <a:solidFill>
                   <a:srgbClr val="17364A"/>
                 </a:solidFill>
@@ -9219,14 +9617,14 @@
               </a:rPr>
               <a:t>Primary track: Technical Architecture Track</a:t>
             </a:r>
-            <a:endParaRPr lang="en-US" sz="1250" dirty="0"/>
+            <a:endParaRPr lang="en-US" sz="1550" dirty="0"/>
           </a:p>
           <a:p>
             <a:pPr indent="0" marL="0">
               <a:buNone/>
             </a:pPr>
             <a:r>
-              <a:rPr lang="en-US" sz="1250" dirty="0">
+              <a:rPr lang="en-US" sz="1550" dirty="0">
                 <a:solidFill>
                   <a:srgbClr val="17364A"/>
                 </a:solidFill>
@@ -9236,32 +9634,32 @@
               </a:rPr>
               <a:t>Appears in tracks: technical-architecture</a:t>
             </a:r>
-            <a:endParaRPr lang="en-US" sz="1250" dirty="0"/>
-          </a:p>
-        </p:txBody>
-      </p:sp>
-      <p:sp>
-        <p:nvSpPr>
-          <p:cNvPr id="12" name="Shape 10"/>
-          <p:cNvSpPr/>
-          <p:nvPr/>
-        </p:nvSpPr>
-        <p:spPr>
-          <a:xfrm>
-            <a:off x="7909560" y="3611880"/>
-            <a:ext cx="3154680" cy="1783080"/>
+            <a:endParaRPr lang="en-US" sz="1550" dirty="0"/>
+          </a:p>
+        </p:txBody>
+      </p:sp>
+      <p:sp>
+        <p:nvSpPr>
+          <p:cNvPr id="13" name="Shape 11"/>
+          <p:cNvSpPr/>
+          <p:nvPr/>
+        </p:nvSpPr>
+        <p:spPr>
+          <a:xfrm>
+            <a:off x="7635240" y="3730752"/>
+            <a:ext cx="1033272" cy="749808"/>
           </a:xfrm>
           <a:prstGeom prst="roundRect">
             <a:avLst>
-              <a:gd name="adj" fmla="val 6154"/>
+              <a:gd name="adj" fmla="val 14634"/>
             </a:avLst>
           </a:prstGeom>
           <a:solidFill>
-            <a:srgbClr val="EEF8ED"/>
+            <a:srgbClr val="0068B7"/>
           </a:solidFill>
           <a:ln w="12700">
             <a:solidFill>
-              <a:srgbClr val="B9D7E6"/>
+              <a:srgbClr val="0068B7"/>
             </a:solidFill>
             <a:prstDash val="solid"/>
           </a:ln>
@@ -9269,81 +9667,256 @@
       </p:sp>
       <p:sp>
         <p:nvSpPr>
-          <p:cNvPr id="13" name="Text 11"/>
-          <p:cNvSpPr/>
-          <p:nvPr/>
-        </p:nvSpPr>
-        <p:spPr>
-          <a:xfrm>
-            <a:off x="8074152" y="3758184"/>
-            <a:ext cx="2825496" cy="201168"/>
-          </a:xfrm>
-          <a:prstGeom prst="rect">
-            <a:avLst/>
-          </a:prstGeom>
-          <a:noFill/>
-          <a:ln/>
-        </p:spPr>
-        <p:txBody>
-          <a:bodyPr wrap="square" lIns="0" tIns="0" rIns="0" bIns="0" rtlCol="0" anchor="ctr"/>
-          <a:lstStyle/>
-          <a:p>
-            <a:pPr indent="0" marL="0">
-              <a:buNone/>
-            </a:pPr>
-            <a:r>
-              <a:rPr lang="en-US" sz="950" b="1" dirty="0">
-                <a:solidFill>
-                  <a:srgbClr val="0068B7"/>
-                </a:solidFill>
-                <a:latin typeface="Aptos" pitchFamily="34" charset="0"/>
-                <a:ea typeface="Aptos" pitchFamily="34" charset="-122"/>
-                <a:cs typeface="Aptos" pitchFamily="34" charset="-120"/>
-              </a:rPr>
-              <a:t>Learning approach</a:t>
-            </a:r>
-            <a:endParaRPr lang="en-US" sz="950" dirty="0"/>
-          </a:p>
-        </p:txBody>
-      </p:sp>
-      <p:sp>
-        <p:nvSpPr>
           <p:cNvPr id="14" name="Text 12"/>
           <p:cNvSpPr/>
           <p:nvPr/>
         </p:nvSpPr>
         <p:spPr>
           <a:xfrm>
-            <a:off x="8074152" y="4050792"/>
-            <a:ext cx="2825496" cy="1216152"/>
-          </a:xfrm>
-          <a:prstGeom prst="rect">
-            <a:avLst/>
-          </a:prstGeom>
-          <a:noFill/>
-          <a:ln/>
-        </p:spPr>
-        <p:txBody>
-          <a:bodyPr wrap="square" lIns="0" tIns="0" rIns="0" bIns="0" rtlCol="0" anchor="t">
+            <a:off x="7708392" y="3922776"/>
+            <a:ext cx="886968" cy="310896"/>
+          </a:xfrm>
+          <a:prstGeom prst="rect">
+            <a:avLst/>
+          </a:prstGeom>
+          <a:noFill/>
+          <a:ln/>
+        </p:spPr>
+        <p:txBody>
+          <a:bodyPr wrap="square" lIns="0" tIns="0" rIns="0" bIns="0" rtlCol="0" anchor="ctr">
             <a:normAutofit/>
           </a:bodyPr>
           <a:lstStyle/>
           <a:p>
-            <a:pPr indent="0" marL="0">
-              <a:buNone/>
-            </a:pPr>
-            <a:r>
-              <a:rPr lang="en-US" sz="1250" dirty="0">
-                <a:solidFill>
-                  <a:srgbClr val="17364A"/>
-                </a:solidFill>
-                <a:latin typeface="Aptos" pitchFamily="34" charset="0"/>
-                <a:ea typeface="Aptos" pitchFamily="34" charset="-122"/>
-                <a:cs typeface="Aptos" pitchFamily="34" charset="-120"/>
-              </a:rPr>
-              <a:t>Review the core ideas, complete the practical exercise, check your understanding, and use the related plays and tools to apply the lesson.</a:t>
-            </a:r>
-            <a:endParaRPr lang="en-US" sz="1250" dirty="0"/>
+            <a:pPr algn="ctr" indent="0" marL="0">
+              <a:buNone/>
+            </a:pPr>
+            <a:r>
+              <a:rPr lang="en-US" sz="1500" b="1" dirty="0">
+                <a:solidFill>
+                  <a:srgbClr val="FFFFFF"/>
+                </a:solidFill>
+                <a:latin typeface="Aptos" pitchFamily="34" charset="0"/>
+                <a:ea typeface="Aptos" pitchFamily="34" charset="-122"/>
+                <a:cs typeface="Aptos" pitchFamily="34" charset="-120"/>
+              </a:rPr>
+              <a:t>Learn</a:t>
+            </a:r>
+            <a:endParaRPr lang="en-US" sz="1500" dirty="0"/>
+          </a:p>
+        </p:txBody>
+      </p:sp>
+      <p:sp>
+        <p:nvSpPr>
+          <p:cNvPr id="15" name="Text 13"/>
+          <p:cNvSpPr/>
+          <p:nvPr/>
+        </p:nvSpPr>
+        <p:spPr>
+          <a:xfrm>
+            <a:off x="8695944" y="3941064"/>
+            <a:ext cx="201168" cy="256032"/>
+          </a:xfrm>
+          <a:prstGeom prst="rect">
+            <a:avLst/>
+          </a:prstGeom>
+          <a:noFill/>
+          <a:ln/>
+        </p:spPr>
+        <p:txBody>
+          <a:bodyPr wrap="square" lIns="0" tIns="0" rIns="0" bIns="0" rtlCol="0" anchor="ctr"/>
+          <a:lstStyle/>
+          <a:p>
+            <a:pPr algn="ctr" indent="0" marL="0">
+              <a:buNone/>
+            </a:pPr>
+            <a:r>
+              <a:rPr lang="en-US" sz="1800" b="1" dirty="0">
+                <a:solidFill>
+                  <a:srgbClr val="0068B7"/>
+                </a:solidFill>
+                <a:latin typeface="Aptos" pitchFamily="34" charset="0"/>
+                <a:ea typeface="Aptos" pitchFamily="34" charset="-122"/>
+                <a:cs typeface="Aptos" pitchFamily="34" charset="-120"/>
+              </a:rPr>
+              <a:t>â†’</a:t>
+            </a:r>
+            <a:endParaRPr lang="en-US" sz="1800" dirty="0"/>
+          </a:p>
+        </p:txBody>
+      </p:sp>
+      <p:sp>
+        <p:nvSpPr>
+          <p:cNvPr id="16" name="Shape 14"/>
+          <p:cNvSpPr/>
+          <p:nvPr/>
+        </p:nvSpPr>
+        <p:spPr>
+          <a:xfrm>
+            <a:off x="8924544" y="3730752"/>
+            <a:ext cx="1033272" cy="749808"/>
+          </a:xfrm>
+          <a:prstGeom prst="roundRect">
+            <a:avLst>
+              <a:gd name="adj" fmla="val 14634"/>
+            </a:avLst>
+          </a:prstGeom>
+          <a:solidFill>
+            <a:srgbClr val="2F8A28"/>
+          </a:solidFill>
+          <a:ln w="12700">
+            <a:solidFill>
+              <a:srgbClr val="2F8A28"/>
+            </a:solidFill>
+            <a:prstDash val="solid"/>
+          </a:ln>
+        </p:spPr>
+      </p:sp>
+      <p:sp>
+        <p:nvSpPr>
+          <p:cNvPr id="17" name="Text 15"/>
+          <p:cNvSpPr/>
+          <p:nvPr/>
+        </p:nvSpPr>
+        <p:spPr>
+          <a:xfrm>
+            <a:off x="8997696" y="3922776"/>
+            <a:ext cx="886968" cy="310896"/>
+          </a:xfrm>
+          <a:prstGeom prst="rect">
+            <a:avLst/>
+          </a:prstGeom>
+          <a:noFill/>
+          <a:ln/>
+        </p:spPr>
+        <p:txBody>
+          <a:bodyPr wrap="square" lIns="0" tIns="0" rIns="0" bIns="0" rtlCol="0" anchor="ctr">
+            <a:normAutofit/>
+          </a:bodyPr>
+          <a:lstStyle/>
+          <a:p>
+            <a:pPr algn="ctr" indent="0" marL="0">
+              <a:buNone/>
+            </a:pPr>
+            <a:r>
+              <a:rPr lang="en-US" sz="1500" b="1" dirty="0">
+                <a:solidFill>
+                  <a:srgbClr val="FFFFFF"/>
+                </a:solidFill>
+                <a:latin typeface="Aptos" pitchFamily="34" charset="0"/>
+                <a:ea typeface="Aptos" pitchFamily="34" charset="-122"/>
+                <a:cs typeface="Aptos" pitchFamily="34" charset="-120"/>
+              </a:rPr>
+              <a:t>Apply</a:t>
+            </a:r>
+            <a:endParaRPr lang="en-US" sz="1500" dirty="0"/>
+          </a:p>
+        </p:txBody>
+      </p:sp>
+      <p:sp>
+        <p:nvSpPr>
+          <p:cNvPr id="18" name="Text 16"/>
+          <p:cNvSpPr/>
+          <p:nvPr/>
+        </p:nvSpPr>
+        <p:spPr>
+          <a:xfrm>
+            <a:off x="9985248" y="3941064"/>
+            <a:ext cx="201168" cy="256032"/>
+          </a:xfrm>
+          <a:prstGeom prst="rect">
+            <a:avLst/>
+          </a:prstGeom>
+          <a:noFill/>
+          <a:ln/>
+        </p:spPr>
+        <p:txBody>
+          <a:bodyPr wrap="square" lIns="0" tIns="0" rIns="0" bIns="0" rtlCol="0" anchor="ctr"/>
+          <a:lstStyle/>
+          <a:p>
+            <a:pPr algn="ctr" indent="0" marL="0">
+              <a:buNone/>
+            </a:pPr>
+            <a:r>
+              <a:rPr lang="en-US" sz="1800" b="1" dirty="0">
+                <a:solidFill>
+                  <a:srgbClr val="0068B7"/>
+                </a:solidFill>
+                <a:latin typeface="Aptos" pitchFamily="34" charset="0"/>
+                <a:ea typeface="Aptos" pitchFamily="34" charset="-122"/>
+                <a:cs typeface="Aptos" pitchFamily="34" charset="-120"/>
+              </a:rPr>
+              <a:t>â†’</a:t>
+            </a:r>
+            <a:endParaRPr lang="en-US" sz="1800" dirty="0"/>
+          </a:p>
+        </p:txBody>
+      </p:sp>
+      <p:sp>
+        <p:nvSpPr>
+          <p:cNvPr id="19" name="Shape 17"/>
+          <p:cNvSpPr/>
+          <p:nvPr/>
+        </p:nvSpPr>
+        <p:spPr>
+          <a:xfrm>
+            <a:off x="10213848" y="3730752"/>
+            <a:ext cx="1033272" cy="749808"/>
+          </a:xfrm>
+          <a:prstGeom prst="roundRect">
+            <a:avLst>
+              <a:gd name="adj" fmla="val 14634"/>
+            </a:avLst>
+          </a:prstGeom>
+          <a:solidFill>
+            <a:srgbClr val="6A4CA3"/>
+          </a:solidFill>
+          <a:ln w="12700">
+            <a:solidFill>
+              <a:srgbClr val="6A4CA3"/>
+            </a:solidFill>
+            <a:prstDash val="solid"/>
+          </a:ln>
+        </p:spPr>
+      </p:sp>
+      <p:sp>
+        <p:nvSpPr>
+          <p:cNvPr id="20" name="Text 18"/>
+          <p:cNvSpPr/>
+          <p:nvPr/>
+        </p:nvSpPr>
+        <p:spPr>
+          <a:xfrm>
+            <a:off x="10287000" y="3922776"/>
+            <a:ext cx="886968" cy="310896"/>
+          </a:xfrm>
+          <a:prstGeom prst="rect">
+            <a:avLst/>
+          </a:prstGeom>
+          <a:noFill/>
+          <a:ln/>
+        </p:spPr>
+        <p:txBody>
+          <a:bodyPr wrap="square" lIns="0" tIns="0" rIns="0" bIns="0" rtlCol="0" anchor="ctr">
+            <a:normAutofit/>
+          </a:bodyPr>
+          <a:lstStyle/>
+          <a:p>
+            <a:pPr algn="ctr" indent="0" marL="0">
+              <a:buNone/>
+            </a:pPr>
+            <a:r>
+              <a:rPr lang="en-US" sz="1500" b="1" dirty="0">
+                <a:solidFill>
+                  <a:srgbClr val="FFFFFF"/>
+                </a:solidFill>
+                <a:latin typeface="Aptos" pitchFamily="34" charset="0"/>
+                <a:ea typeface="Aptos" pitchFamily="34" charset="-122"/>
+                <a:cs typeface="Aptos" pitchFamily="34" charset="-120"/>
+              </a:rPr>
+              <a:t>Document</a:t>
+            </a:r>
+            <a:endParaRPr lang="en-US" sz="1500" dirty="0"/>
           </a:p>
         </p:txBody>
       </p:sp>
@@ -9540,7 +10113,7 @@
                 <a:ea typeface="Aptos" pitchFamily="34" charset="-122"/>
                 <a:cs typeface="Aptos" pitchFamily="34" charset="-120"/>
               </a:rPr>
-              <a:t>© Paula Soper</a:t>
+              <a:t>Â© Paula Soper</a:t>
             </a:r>
             <a:endParaRPr lang="en-US" sz="800" dirty="0"/>
           </a:p>
@@ -9554,8 +10127,47 @@
         </p:nvSpPr>
         <p:spPr>
           <a:xfrm>
+            <a:off x="11137392" y="6510528"/>
+            <a:ext cx="411480" cy="201168"/>
+          </a:xfrm>
+          <a:prstGeom prst="rect">
+            <a:avLst/>
+          </a:prstGeom>
+          <a:noFill/>
+          <a:ln/>
+        </p:spPr>
+        <p:txBody>
+          <a:bodyPr wrap="square" lIns="0" tIns="0" rIns="0" bIns="0" rtlCol="0" anchor="ctr"/>
+          <a:lstStyle/>
+          <a:p>
+            <a:pPr algn="r" indent="0" marL="0">
+              <a:buNone/>
+            </a:pPr>
+            <a:r>
+              <a:rPr lang="en-US" sz="900" dirty="0">
+                <a:solidFill>
+                  <a:srgbClr val="5F7181"/>
+                </a:solidFill>
+                <a:latin typeface="Aptos" pitchFamily="34" charset="0"/>
+                <a:ea typeface="Aptos" pitchFamily="34" charset="-122"/>
+                <a:cs typeface="Aptos" pitchFamily="34" charset="-120"/>
+              </a:rPr>
+              <a:t>20</a:t>
+            </a:r>
+            <a:endParaRPr lang="en-US" sz="900" dirty="0"/>
+          </a:p>
+        </p:txBody>
+      </p:sp>
+      <p:sp>
+        <p:nvSpPr>
+          <p:cNvPr id="8" name="Text 6"/>
+          <p:cNvSpPr/>
+          <p:nvPr/>
+        </p:nvSpPr>
+        <p:spPr>
+          <a:xfrm>
             <a:off x="640080" y="658368"/>
-            <a:ext cx="10881360" cy="566928"/>
+            <a:ext cx="10881360" cy="713232"/>
           </a:xfrm>
           <a:prstGeom prst="rect">
             <a:avLst/>
@@ -9573,7 +10185,7 @@
               <a:buNone/>
             </a:pPr>
             <a:r>
-              <a:rPr lang="en-US" sz="2700" b="1" dirty="0">
+              <a:rPr lang="en-US" sz="3400" b="1" dirty="0">
                 <a:solidFill>
                   <a:srgbClr val="003A63"/>
                 </a:solidFill>
@@ -9583,20 +10195,20 @@
               </a:rPr>
               <a:t>Expected Artifact or Evidence Continued</a:t>
             </a:r>
-            <a:endParaRPr lang="en-US" sz="2700" dirty="0"/>
-          </a:p>
-        </p:txBody>
-      </p:sp>
-      <p:sp>
-        <p:nvSpPr>
-          <p:cNvPr id="8" name="Text 6"/>
-          <p:cNvSpPr/>
-          <p:nvPr/>
-        </p:nvSpPr>
-        <p:spPr>
-          <a:xfrm>
-            <a:off x="868680" y="1417320"/>
-            <a:ext cx="6675120" cy="4434840"/>
+            <a:endParaRPr lang="en-US" sz="3400" dirty="0"/>
+          </a:p>
+        </p:txBody>
+      </p:sp>
+      <p:sp>
+        <p:nvSpPr>
+          <p:cNvPr id="9" name="Text 7"/>
+          <p:cNvSpPr/>
+          <p:nvPr/>
+        </p:nvSpPr>
+        <p:spPr>
+          <a:xfrm>
+            <a:off x="868680" y="1508760"/>
+            <a:ext cx="6537960" cy="4160520"/>
           </a:xfrm>
           <a:prstGeom prst="rect">
             <a:avLst/>
@@ -9611,7 +10223,7 @@
           <a:lstStyle/>
           <a:p>
             <a:r>
-              <a:rPr lang="en-US" sz="1700" dirty="0">
+              <a:rPr lang="en-US" sz="2100" dirty="0">
                 <a:solidFill>
                   <a:srgbClr val="17364A"/>
                 </a:solidFill>
@@ -9621,13 +10233,13 @@
               </a:rPr>
               <a:t>Test scenario and acceptance criteria</a:t>
             </a:r>
-            <a:endParaRPr lang="en-US" sz="1700" dirty="0"/>
-          </a:p>
-        </p:txBody>
-      </p:sp>
-      <p:sp>
-        <p:nvSpPr>
-          <p:cNvPr id="9" name="Shape 7"/>
+            <a:endParaRPr lang="en-US" sz="2100" dirty="0"/>
+          </a:p>
+        </p:txBody>
+      </p:sp>
+      <p:sp>
+        <p:nvSpPr>
+          <p:cNvPr id="10" name="Shape 8"/>
           <p:cNvSpPr/>
           <p:nvPr/>
         </p:nvSpPr>
@@ -9654,14 +10266,14 @@
       </p:sp>
       <p:sp>
         <p:nvSpPr>
-          <p:cNvPr id="10" name="Text 8"/>
+          <p:cNvPr id="11" name="Text 9"/>
           <p:cNvSpPr/>
           <p:nvPr/>
         </p:nvSpPr>
         <p:spPr>
           <a:xfrm>
             <a:off x="8074152" y="1563624"/>
-            <a:ext cx="2825496" cy="201168"/>
+            <a:ext cx="2825496" cy="256032"/>
           </a:xfrm>
           <a:prstGeom prst="rect">
             <a:avLst/>
@@ -9677,7 +10289,7 @@
               <a:buNone/>
             </a:pPr>
             <a:r>
-              <a:rPr lang="en-US" sz="950" b="1" dirty="0">
+              <a:rPr lang="en-US" sz="1300" b="1" dirty="0">
                 <a:solidFill>
                   <a:srgbClr val="0068B7"/>
                 </a:solidFill>
@@ -9687,20 +10299,20 @@
               </a:rPr>
               <a:t>Key idea</a:t>
             </a:r>
-            <a:endParaRPr lang="en-US" sz="950" dirty="0"/>
-          </a:p>
-        </p:txBody>
-      </p:sp>
-      <p:sp>
-        <p:nvSpPr>
-          <p:cNvPr id="11" name="Text 9"/>
-          <p:cNvSpPr/>
-          <p:nvPr/>
-        </p:nvSpPr>
-        <p:spPr>
-          <a:xfrm>
-            <a:off x="8074152" y="1856232"/>
-            <a:ext cx="2825496" cy="1261872"/>
+            <a:endParaRPr lang="en-US" sz="1300" dirty="0"/>
+          </a:p>
+        </p:txBody>
+      </p:sp>
+      <p:sp>
+        <p:nvSpPr>
+          <p:cNvPr id="12" name="Text 10"/>
+          <p:cNvSpPr/>
+          <p:nvPr/>
+        </p:nvSpPr>
+        <p:spPr>
+          <a:xfrm>
+            <a:off x="8074152" y="1920240"/>
+            <a:ext cx="2825496" cy="1188720"/>
           </a:xfrm>
           <a:prstGeom prst="rect">
             <a:avLst/>
@@ -9718,7 +10330,7 @@
               <a:buNone/>
             </a:pPr>
             <a:r>
-              <a:rPr lang="en-US" sz="1250" dirty="0">
+              <a:rPr lang="en-US" sz="1550" dirty="0">
                 <a:solidFill>
                   <a:srgbClr val="17364A"/>
                 </a:solidFill>
@@ -9728,13 +10340,13 @@
               </a:rPr>
               <a:t>Test scenario and acceptance criteria</a:t>
             </a:r>
-            <a:endParaRPr lang="en-US" sz="1250" dirty="0"/>
-          </a:p>
-        </p:txBody>
-      </p:sp>
-      <p:sp>
-        <p:nvSpPr>
-          <p:cNvPr id="12" name="Shape 10"/>
+            <a:endParaRPr lang="en-US" sz="1550" dirty="0"/>
+          </a:p>
+        </p:txBody>
+      </p:sp>
+      <p:sp>
+        <p:nvSpPr>
+          <p:cNvPr id="13" name="Shape 11"/>
           <p:cNvSpPr/>
           <p:nvPr/>
         </p:nvSpPr>
@@ -9761,14 +10373,14 @@
       </p:sp>
       <p:sp>
         <p:nvSpPr>
-          <p:cNvPr id="13" name="Text 11"/>
+          <p:cNvPr id="14" name="Text 12"/>
           <p:cNvSpPr/>
           <p:nvPr/>
         </p:nvSpPr>
         <p:spPr>
           <a:xfrm>
             <a:off x="8074152" y="3666744"/>
-            <a:ext cx="2825496" cy="201168"/>
+            <a:ext cx="2825496" cy="256032"/>
           </a:xfrm>
           <a:prstGeom prst="rect">
             <a:avLst/>
@@ -9784,7 +10396,7 @@
               <a:buNone/>
             </a:pPr>
             <a:r>
-              <a:rPr lang="en-US" sz="950" b="1" dirty="0">
+              <a:rPr lang="en-US" sz="1300" b="1" dirty="0">
                 <a:solidFill>
                   <a:srgbClr val="0068B7"/>
                 </a:solidFill>
@@ -9794,20 +10406,20 @@
               </a:rPr>
               <a:t>Use this for</a:t>
             </a:r>
-            <a:endParaRPr lang="en-US" sz="950" dirty="0"/>
-          </a:p>
-        </p:txBody>
-      </p:sp>
-      <p:sp>
-        <p:nvSpPr>
-          <p:cNvPr id="14" name="Text 12"/>
-          <p:cNvSpPr/>
-          <p:nvPr/>
-        </p:nvSpPr>
-        <p:spPr>
-          <a:xfrm>
-            <a:off x="8074152" y="3959352"/>
-            <a:ext cx="2825496" cy="1170432"/>
+            <a:endParaRPr lang="en-US" sz="1300" dirty="0"/>
+          </a:p>
+        </p:txBody>
+      </p:sp>
+      <p:sp>
+        <p:nvSpPr>
+          <p:cNvPr id="15" name="Text 13"/>
+          <p:cNvSpPr/>
+          <p:nvPr/>
+        </p:nvSpPr>
+        <p:spPr>
+          <a:xfrm>
+            <a:off x="8074152" y="4023360"/>
+            <a:ext cx="2825496" cy="1097280"/>
           </a:xfrm>
           <a:prstGeom prst="rect">
             <a:avLst/>
@@ -9825,7 +10437,7 @@
               <a:buNone/>
             </a:pPr>
             <a:r>
-              <a:rPr lang="en-US" sz="1250" dirty="0">
+              <a:rPr lang="en-US" sz="1550" dirty="0">
                 <a:solidFill>
                   <a:srgbClr val="17364A"/>
                 </a:solidFill>
@@ -9835,7 +10447,7 @@
               </a:rPr>
               <a:t>Connect the concept to public health decisions, safeguards, documentation, or implementation work.</a:t>
             </a:r>
-            <a:endParaRPr lang="en-US" sz="1250" dirty="0"/>
+            <a:endParaRPr lang="en-US" sz="1550" dirty="0"/>
           </a:p>
         </p:txBody>
       </p:sp>
@@ -10032,7 +10644,7 @@
                 <a:ea typeface="Aptos" pitchFamily="34" charset="-122"/>
                 <a:cs typeface="Aptos" pitchFamily="34" charset="-120"/>
               </a:rPr>
-              <a:t>© Paula Soper</a:t>
+              <a:t>Â© Paula Soper</a:t>
             </a:r>
             <a:endParaRPr lang="en-US" sz="800" dirty="0"/>
           </a:p>
@@ -10040,7 +10652,46 @@
       </p:sp>
       <p:sp>
         <p:nvSpPr>
-          <p:cNvPr id="7" name="Shape 5"/>
+          <p:cNvPr id="7" name="Text 5"/>
+          <p:cNvSpPr/>
+          <p:nvPr/>
+        </p:nvSpPr>
+        <p:spPr>
+          <a:xfrm>
+            <a:off x="11137392" y="6510528"/>
+            <a:ext cx="411480" cy="201168"/>
+          </a:xfrm>
+          <a:prstGeom prst="rect">
+            <a:avLst/>
+          </a:prstGeom>
+          <a:noFill/>
+          <a:ln/>
+        </p:spPr>
+        <p:txBody>
+          <a:bodyPr wrap="square" lIns="0" tIns="0" rIns="0" bIns="0" rtlCol="0" anchor="ctr"/>
+          <a:lstStyle/>
+          <a:p>
+            <a:pPr algn="r" indent="0" marL="0">
+              <a:buNone/>
+            </a:pPr>
+            <a:r>
+              <a:rPr lang="en-US" sz="900" dirty="0">
+                <a:solidFill>
+                  <a:srgbClr val="5F7181"/>
+                </a:solidFill>
+                <a:latin typeface="Aptos" pitchFamily="34" charset="0"/>
+                <a:ea typeface="Aptos" pitchFamily="34" charset="-122"/>
+                <a:cs typeface="Aptos" pitchFamily="34" charset="-120"/>
+              </a:rPr>
+              <a:t>21</a:t>
+            </a:r>
+            <a:endParaRPr lang="en-US" sz="900" dirty="0"/>
+          </a:p>
+        </p:txBody>
+      </p:sp>
+      <p:sp>
+        <p:nvSpPr>
+          <p:cNvPr id="8" name="Shape 6"/>
           <p:cNvSpPr/>
           <p:nvPr/>
         </p:nvSpPr>
@@ -10065,7 +10716,7 @@
       </p:sp>
       <p:sp>
         <p:nvSpPr>
-          <p:cNvPr id="8" name="Text 6"/>
+          <p:cNvPr id="9" name="Text 7"/>
           <p:cNvSpPr/>
           <p:nvPr/>
         </p:nvSpPr>
@@ -10104,14 +10755,14 @@
       </p:sp>
       <p:sp>
         <p:nvSpPr>
-          <p:cNvPr id="9" name="Text 7"/>
+          <p:cNvPr id="10" name="Text 8"/>
           <p:cNvSpPr/>
           <p:nvPr/>
         </p:nvSpPr>
         <p:spPr>
           <a:xfrm>
             <a:off x="640080" y="621792"/>
-            <a:ext cx="10881360" cy="566928"/>
+            <a:ext cx="10881360" cy="713232"/>
           </a:xfrm>
           <a:prstGeom prst="rect">
             <a:avLst/>
@@ -10129,7 +10780,7 @@
               <a:buNone/>
             </a:pPr>
             <a:r>
-              <a:rPr lang="en-US" sz="2700" b="1" dirty="0">
+              <a:rPr lang="en-US" sz="3400" b="1" dirty="0">
                 <a:solidFill>
                   <a:srgbClr val="003A63"/>
                 </a:solidFill>
@@ -10139,20 +10790,20 @@
               </a:rPr>
               <a:t>Expected Assignment</a:t>
             </a:r>
-            <a:endParaRPr lang="en-US" sz="2700" dirty="0"/>
-          </a:p>
-        </p:txBody>
-      </p:sp>
-      <p:sp>
-        <p:nvSpPr>
-          <p:cNvPr id="10" name="Text 8"/>
-          <p:cNvSpPr/>
-          <p:nvPr/>
-        </p:nvSpPr>
-        <p:spPr>
-          <a:xfrm>
-            <a:off x="868680" y="1417320"/>
-            <a:ext cx="6675120" cy="4434840"/>
+            <a:endParaRPr lang="en-US" sz="3400" dirty="0"/>
+          </a:p>
+        </p:txBody>
+      </p:sp>
+      <p:sp>
+        <p:nvSpPr>
+          <p:cNvPr id="11" name="Text 9"/>
+          <p:cNvSpPr/>
+          <p:nvPr/>
+        </p:nvSpPr>
+        <p:spPr>
+          <a:xfrm>
+            <a:off x="868680" y="1508760"/>
+            <a:ext cx="6537960" cy="4160520"/>
           </a:xfrm>
           <a:prstGeom prst="rect">
             <a:avLst/>
@@ -10167,7 +10818,7 @@
           <a:lstStyle/>
           <a:p>
             <a:r>
-              <a:rPr lang="en-US" sz="1700" dirty="0">
+              <a:rPr lang="en-US" sz="2100" dirty="0">
                 <a:solidFill>
                   <a:srgbClr val="17364A"/>
                 </a:solidFill>
@@ -10177,11 +10828,11 @@
               </a:rPr>
               <a:t>Interoperability checklist</a:t>
             </a:r>
-            <a:endParaRPr lang="en-US" sz="1700" dirty="0"/>
-          </a:p>
-          <a:p>
-            <a:r>
-              <a:rPr lang="en-US" sz="1700" dirty="0">
+            <a:endParaRPr lang="en-US" sz="2100" dirty="0"/>
+          </a:p>
+          <a:p>
+            <a:r>
+              <a:rPr lang="en-US" sz="2100" dirty="0">
                 <a:solidFill>
                   <a:srgbClr val="17364A"/>
                 </a:solidFill>
@@ -10191,11 +10842,11 @@
               </a:rPr>
               <a:t>Data exchange diagram</a:t>
             </a:r>
-            <a:endParaRPr lang="en-US" sz="1700" dirty="0"/>
-          </a:p>
-          <a:p>
-            <a:r>
-              <a:rPr lang="en-US" sz="1700" dirty="0">
+            <a:endParaRPr lang="en-US" sz="2100" dirty="0"/>
+          </a:p>
+          <a:p>
+            <a:r>
+              <a:rPr lang="en-US" sz="2100" dirty="0">
                 <a:solidFill>
                   <a:srgbClr val="17364A"/>
                 </a:solidFill>
@@ -10205,27 +10856,13 @@
               </a:rPr>
               <a:t>Vendor questions</a:t>
             </a:r>
-            <a:endParaRPr lang="en-US" sz="1700" dirty="0"/>
-          </a:p>
-          <a:p>
-            <a:r>
-              <a:rPr lang="en-US" sz="1700" dirty="0">
-                <a:solidFill>
-                  <a:srgbClr val="17364A"/>
-                </a:solidFill>
-                <a:latin typeface="Aptos" pitchFamily="34" charset="0"/>
-                <a:ea typeface="Aptos" pitchFamily="34" charset="-122"/>
-                <a:cs typeface="Aptos" pitchFamily="34" charset="-120"/>
-              </a:rPr>
-              <a:t>Test scenario and acceptance criteria</a:t>
-            </a:r>
-            <a:endParaRPr lang="en-US" sz="1700" dirty="0"/>
-          </a:p>
-        </p:txBody>
-      </p:sp>
-      <p:sp>
-        <p:nvSpPr>
-          <p:cNvPr id="11" name="Shape 9"/>
+            <a:endParaRPr lang="en-US" sz="2100" dirty="0"/>
+          </a:p>
+        </p:txBody>
+      </p:sp>
+      <p:sp>
+        <p:nvSpPr>
+          <p:cNvPr id="12" name="Shape 10"/>
           <p:cNvSpPr/>
           <p:nvPr/>
         </p:nvSpPr>
@@ -10252,14 +10889,14 @@
       </p:sp>
       <p:sp>
         <p:nvSpPr>
-          <p:cNvPr id="12" name="Text 10"/>
+          <p:cNvPr id="13" name="Text 11"/>
           <p:cNvSpPr/>
           <p:nvPr/>
         </p:nvSpPr>
         <p:spPr>
           <a:xfrm>
             <a:off x="8074152" y="1563624"/>
-            <a:ext cx="2825496" cy="201168"/>
+            <a:ext cx="2825496" cy="256032"/>
           </a:xfrm>
           <a:prstGeom prst="rect">
             <a:avLst/>
@@ -10275,7 +10912,7 @@
               <a:buNone/>
             </a:pPr>
             <a:r>
-              <a:rPr lang="en-US" sz="950" b="1" dirty="0">
+              <a:rPr lang="en-US" sz="1300" b="1" dirty="0">
                 <a:solidFill>
                   <a:srgbClr val="0068B7"/>
                 </a:solidFill>
@@ -10285,20 +10922,20 @@
               </a:rPr>
               <a:t>Key idea</a:t>
             </a:r>
-            <a:endParaRPr lang="en-US" sz="950" dirty="0"/>
-          </a:p>
-        </p:txBody>
-      </p:sp>
-      <p:sp>
-        <p:nvSpPr>
-          <p:cNvPr id="13" name="Text 11"/>
-          <p:cNvSpPr/>
-          <p:nvPr/>
-        </p:nvSpPr>
-        <p:spPr>
-          <a:xfrm>
-            <a:off x="8074152" y="1856232"/>
-            <a:ext cx="2825496" cy="1261872"/>
+            <a:endParaRPr lang="en-US" sz="1300" dirty="0"/>
+          </a:p>
+        </p:txBody>
+      </p:sp>
+      <p:sp>
+        <p:nvSpPr>
+          <p:cNvPr id="14" name="Text 12"/>
+          <p:cNvSpPr/>
+          <p:nvPr/>
+        </p:nvSpPr>
+        <p:spPr>
+          <a:xfrm>
+            <a:off x="8074152" y="1920240"/>
+            <a:ext cx="2825496" cy="1188720"/>
           </a:xfrm>
           <a:prstGeom prst="rect">
             <a:avLst/>
@@ -10316,7 +10953,7 @@
               <a:buNone/>
             </a:pPr>
             <a:r>
-              <a:rPr lang="en-US" sz="1250" dirty="0">
+              <a:rPr lang="en-US" sz="1550" dirty="0">
                 <a:solidFill>
                   <a:srgbClr val="17364A"/>
                 </a:solidFill>
@@ -10326,13 +10963,13 @@
               </a:rPr>
               <a:t>Interoperability checklist</a:t>
             </a:r>
-            <a:endParaRPr lang="en-US" sz="1250" dirty="0"/>
-          </a:p>
-        </p:txBody>
-      </p:sp>
-      <p:sp>
-        <p:nvSpPr>
-          <p:cNvPr id="14" name="Shape 12"/>
+            <a:endParaRPr lang="en-US" sz="1550" dirty="0"/>
+          </a:p>
+        </p:txBody>
+      </p:sp>
+      <p:sp>
+        <p:nvSpPr>
+          <p:cNvPr id="15" name="Shape 13"/>
           <p:cNvSpPr/>
           <p:nvPr/>
         </p:nvSpPr>
@@ -10359,14 +10996,14 @@
       </p:sp>
       <p:sp>
         <p:nvSpPr>
-          <p:cNvPr id="15" name="Text 13"/>
+          <p:cNvPr id="16" name="Text 14"/>
           <p:cNvSpPr/>
           <p:nvPr/>
         </p:nvSpPr>
         <p:spPr>
           <a:xfrm>
             <a:off x="8074152" y="3666744"/>
-            <a:ext cx="2825496" cy="201168"/>
+            <a:ext cx="2825496" cy="256032"/>
           </a:xfrm>
           <a:prstGeom prst="rect">
             <a:avLst/>
@@ -10382,7 +11019,7 @@
               <a:buNone/>
             </a:pPr>
             <a:r>
-              <a:rPr lang="en-US" sz="950" b="1" dirty="0">
+              <a:rPr lang="en-US" sz="1300" b="1" dirty="0">
                 <a:solidFill>
                   <a:srgbClr val="0068B7"/>
                 </a:solidFill>
@@ -10392,20 +11029,20 @@
               </a:rPr>
               <a:t>Use this for</a:t>
             </a:r>
-            <a:endParaRPr lang="en-US" sz="950" dirty="0"/>
-          </a:p>
-        </p:txBody>
-      </p:sp>
-      <p:sp>
-        <p:nvSpPr>
-          <p:cNvPr id="16" name="Text 14"/>
-          <p:cNvSpPr/>
-          <p:nvPr/>
-        </p:nvSpPr>
-        <p:spPr>
-          <a:xfrm>
-            <a:off x="8074152" y="3959352"/>
-            <a:ext cx="2825496" cy="1170432"/>
+            <a:endParaRPr lang="en-US" sz="1300" dirty="0"/>
+          </a:p>
+        </p:txBody>
+      </p:sp>
+      <p:sp>
+        <p:nvSpPr>
+          <p:cNvPr id="17" name="Text 15"/>
+          <p:cNvSpPr/>
+          <p:nvPr/>
+        </p:nvSpPr>
+        <p:spPr>
+          <a:xfrm>
+            <a:off x="8074152" y="4023360"/>
+            <a:ext cx="2825496" cy="1097280"/>
           </a:xfrm>
           <a:prstGeom prst="rect">
             <a:avLst/>
@@ -10423,7 +11060,7 @@
               <a:buNone/>
             </a:pPr>
             <a:r>
-              <a:rPr lang="en-US" sz="1250" dirty="0">
+              <a:rPr lang="en-US" sz="1550" dirty="0">
                 <a:solidFill>
                   <a:srgbClr val="17364A"/>
                 </a:solidFill>
@@ -10433,7 +11070,7 @@
               </a:rPr>
               <a:t>Connect the concept to public health decisions, safeguards, documentation, or implementation work.</a:t>
             </a:r>
-            <a:endParaRPr lang="en-US" sz="1250" dirty="0"/>
+            <a:endParaRPr lang="en-US" sz="1550" dirty="0"/>
           </a:p>
         </p:txBody>
       </p:sp>
@@ -10630,7 +11267,7 @@
                 <a:ea typeface="Aptos" pitchFamily="34" charset="-122"/>
                 <a:cs typeface="Aptos" pitchFamily="34" charset="-120"/>
               </a:rPr>
-              <a:t>© Paula Soper</a:t>
+              <a:t>Â© Paula Soper</a:t>
             </a:r>
             <a:endParaRPr lang="en-US" sz="800" dirty="0"/>
           </a:p>
@@ -10638,7 +11275,46 @@
       </p:sp>
       <p:sp>
         <p:nvSpPr>
-          <p:cNvPr id="7" name="Shape 5"/>
+          <p:cNvPr id="7" name="Text 5"/>
+          <p:cNvSpPr/>
+          <p:nvPr/>
+        </p:nvSpPr>
+        <p:spPr>
+          <a:xfrm>
+            <a:off x="11137392" y="6510528"/>
+            <a:ext cx="411480" cy="201168"/>
+          </a:xfrm>
+          <a:prstGeom prst="rect">
+            <a:avLst/>
+          </a:prstGeom>
+          <a:noFill/>
+          <a:ln/>
+        </p:spPr>
+        <p:txBody>
+          <a:bodyPr wrap="square" lIns="0" tIns="0" rIns="0" bIns="0" rtlCol="0" anchor="ctr"/>
+          <a:lstStyle/>
+          <a:p>
+            <a:pPr algn="r" indent="0" marL="0">
+              <a:buNone/>
+            </a:pPr>
+            <a:r>
+              <a:rPr lang="en-US" sz="900" dirty="0">
+                <a:solidFill>
+                  <a:srgbClr val="5F7181"/>
+                </a:solidFill>
+                <a:latin typeface="Aptos" pitchFamily="34" charset="0"/>
+                <a:ea typeface="Aptos" pitchFamily="34" charset="-122"/>
+                <a:cs typeface="Aptos" pitchFamily="34" charset="-120"/>
+              </a:rPr>
+              <a:t>22</a:t>
+            </a:r>
+            <a:endParaRPr lang="en-US" sz="900" dirty="0"/>
+          </a:p>
+        </p:txBody>
+      </p:sp>
+      <p:sp>
+        <p:nvSpPr>
+          <p:cNvPr id="8" name="Shape 6"/>
           <p:cNvSpPr/>
           <p:nvPr/>
         </p:nvSpPr>
@@ -10663,7 +11339,7 @@
       </p:sp>
       <p:sp>
         <p:nvSpPr>
-          <p:cNvPr id="8" name="Text 6"/>
+          <p:cNvPr id="9" name="Text 7"/>
           <p:cNvSpPr/>
           <p:nvPr/>
         </p:nvSpPr>
@@ -10702,14 +11378,14 @@
       </p:sp>
       <p:sp>
         <p:nvSpPr>
-          <p:cNvPr id="9" name="Text 7"/>
+          <p:cNvPr id="10" name="Text 8"/>
           <p:cNvSpPr/>
           <p:nvPr/>
         </p:nvSpPr>
         <p:spPr>
           <a:xfrm>
             <a:off x="640080" y="621792"/>
-            <a:ext cx="10881360" cy="566928"/>
+            <a:ext cx="10881360" cy="713232"/>
           </a:xfrm>
           <a:prstGeom prst="rect">
             <a:avLst/>
@@ -10727,7 +11403,7 @@
               <a:buNone/>
             </a:pPr>
             <a:r>
-              <a:rPr lang="en-US" sz="2700" b="1" dirty="0">
+              <a:rPr lang="en-US" sz="3400" b="1" dirty="0">
                 <a:solidFill>
                   <a:srgbClr val="003A63"/>
                 </a:solidFill>
@@ -10737,20 +11413,20 @@
               </a:rPr>
               <a:t>Knowledge Check</a:t>
             </a:r>
-            <a:endParaRPr lang="en-US" sz="2700" dirty="0"/>
-          </a:p>
-        </p:txBody>
-      </p:sp>
-      <p:sp>
-        <p:nvSpPr>
-          <p:cNvPr id="10" name="Text 8"/>
-          <p:cNvSpPr/>
-          <p:nvPr/>
-        </p:nvSpPr>
-        <p:spPr>
-          <a:xfrm>
-            <a:off x="868680" y="1417320"/>
-            <a:ext cx="6675120" cy="4434840"/>
+            <a:endParaRPr lang="en-US" sz="3400" dirty="0"/>
+          </a:p>
+        </p:txBody>
+      </p:sp>
+      <p:sp>
+        <p:nvSpPr>
+          <p:cNvPr id="11" name="Text 9"/>
+          <p:cNvSpPr/>
+          <p:nvPr/>
+        </p:nvSpPr>
+        <p:spPr>
+          <a:xfrm>
+            <a:off x="868680" y="1508760"/>
+            <a:ext cx="6537960" cy="4160520"/>
           </a:xfrm>
           <a:prstGeom prst="rect">
             <a:avLst/>
@@ -10765,7 +11441,7 @@
           <a:lstStyle/>
           <a:p>
             <a:r>
-              <a:rPr lang="en-US" sz="1700" dirty="0">
+              <a:rPr lang="en-US" sz="2100" dirty="0">
                 <a:solidFill>
                   <a:srgbClr val="17364A"/>
                 </a:solidFill>
@@ -10775,11 +11451,11 @@
               </a:rPr>
               <a:t>1. Why does interoperability matter for AI-supported public health workflows?</a:t>
             </a:r>
-            <a:endParaRPr lang="en-US" sz="1700" dirty="0"/>
-          </a:p>
-          <a:p>
-            <a:r>
-              <a:rPr lang="en-US" sz="1700" dirty="0">
+            <a:endParaRPr lang="en-US" sz="2100" dirty="0"/>
+          </a:p>
+          <a:p>
+            <a:r>
+              <a:rPr lang="en-US" sz="2100" dirty="0">
                 <a:solidFill>
                   <a:srgbClr val="17364A"/>
                 </a:solidFill>
@@ -10789,11 +11465,11 @@
               </a:rPr>
               <a:t>2. What is FHIR commonly used for?</a:t>
             </a:r>
-            <a:endParaRPr lang="en-US" sz="1700" dirty="0"/>
-          </a:p>
-          <a:p>
-            <a:r>
-              <a:rPr lang="en-US" sz="1700" dirty="0">
+            <a:endParaRPr lang="en-US" sz="2100" dirty="0"/>
+          </a:p>
+          <a:p>
+            <a:r>
+              <a:rPr lang="en-US" sz="2100" dirty="0">
                 <a:solidFill>
                   <a:srgbClr val="17364A"/>
                 </a:solidFill>
@@ -10803,27 +11479,13 @@
               </a:rPr>
               <a:t>3. What is an implementation guide?</a:t>
             </a:r>
-            <a:endParaRPr lang="en-US" sz="1700" dirty="0"/>
-          </a:p>
-          <a:p>
-            <a:r>
-              <a:rPr lang="en-US" sz="1700" dirty="0">
-                <a:solidFill>
-                  <a:srgbClr val="17364A"/>
-                </a:solidFill>
-                <a:latin typeface="Aptos" pitchFamily="34" charset="0"/>
-                <a:ea typeface="Aptos" pitchFamily="34" charset="-122"/>
-                <a:cs typeface="Aptos" pitchFamily="34" charset="-120"/>
-              </a:rPr>
-              <a:t>4. Which question should be asked during AI vendor review?</a:t>
-            </a:r>
-            <a:endParaRPr lang="en-US" sz="1700" dirty="0"/>
-          </a:p>
-        </p:txBody>
-      </p:sp>
-      <p:sp>
-        <p:nvSpPr>
-          <p:cNvPr id="11" name="Shape 9"/>
+            <a:endParaRPr lang="en-US" sz="2100" dirty="0"/>
+          </a:p>
+        </p:txBody>
+      </p:sp>
+      <p:sp>
+        <p:nvSpPr>
+          <p:cNvPr id="12" name="Shape 10"/>
           <p:cNvSpPr/>
           <p:nvPr/>
         </p:nvSpPr>
@@ -10850,14 +11512,14 @@
       </p:sp>
       <p:sp>
         <p:nvSpPr>
-          <p:cNvPr id="12" name="Text 10"/>
+          <p:cNvPr id="13" name="Text 11"/>
           <p:cNvSpPr/>
           <p:nvPr/>
         </p:nvSpPr>
         <p:spPr>
           <a:xfrm>
             <a:off x="8074152" y="1563624"/>
-            <a:ext cx="2825496" cy="201168"/>
+            <a:ext cx="2825496" cy="256032"/>
           </a:xfrm>
           <a:prstGeom prst="rect">
             <a:avLst/>
@@ -10873,7 +11535,7 @@
               <a:buNone/>
             </a:pPr>
             <a:r>
-              <a:rPr lang="en-US" sz="950" b="1" dirty="0">
+              <a:rPr lang="en-US" sz="1300" b="1" dirty="0">
                 <a:solidFill>
                   <a:srgbClr val="0068B7"/>
                 </a:solidFill>
@@ -10883,20 +11545,20 @@
               </a:rPr>
               <a:t>Key idea</a:t>
             </a:r>
-            <a:endParaRPr lang="en-US" sz="950" dirty="0"/>
-          </a:p>
-        </p:txBody>
-      </p:sp>
-      <p:sp>
-        <p:nvSpPr>
-          <p:cNvPr id="13" name="Text 11"/>
-          <p:cNvSpPr/>
-          <p:nvPr/>
-        </p:nvSpPr>
-        <p:spPr>
-          <a:xfrm>
-            <a:off x="8074152" y="1856232"/>
-            <a:ext cx="2825496" cy="1261872"/>
+            <a:endParaRPr lang="en-US" sz="1300" dirty="0"/>
+          </a:p>
+        </p:txBody>
+      </p:sp>
+      <p:sp>
+        <p:nvSpPr>
+          <p:cNvPr id="14" name="Text 12"/>
+          <p:cNvSpPr/>
+          <p:nvPr/>
+        </p:nvSpPr>
+        <p:spPr>
+          <a:xfrm>
+            <a:off x="8074152" y="1920240"/>
+            <a:ext cx="2825496" cy="1188720"/>
           </a:xfrm>
           <a:prstGeom prst="rect">
             <a:avLst/>
@@ -10914,7 +11576,7 @@
               <a:buNone/>
             </a:pPr>
             <a:r>
-              <a:rPr lang="en-US" sz="1250" dirty="0">
+              <a:rPr lang="en-US" sz="1550" dirty="0">
                 <a:solidFill>
                   <a:srgbClr val="17364A"/>
                 </a:solidFill>
@@ -10924,13 +11586,13 @@
               </a:rPr>
               <a:t>1. Why does interoperability matter for AI-supported public health workflows?</a:t>
             </a:r>
-            <a:endParaRPr lang="en-US" sz="1250" dirty="0"/>
-          </a:p>
-        </p:txBody>
-      </p:sp>
-      <p:sp>
-        <p:nvSpPr>
-          <p:cNvPr id="14" name="Shape 12"/>
+            <a:endParaRPr lang="en-US" sz="1550" dirty="0"/>
+          </a:p>
+        </p:txBody>
+      </p:sp>
+      <p:sp>
+        <p:nvSpPr>
+          <p:cNvPr id="15" name="Shape 13"/>
           <p:cNvSpPr/>
           <p:nvPr/>
         </p:nvSpPr>
@@ -10957,14 +11619,14 @@
       </p:sp>
       <p:sp>
         <p:nvSpPr>
-          <p:cNvPr id="15" name="Text 13"/>
+          <p:cNvPr id="16" name="Text 14"/>
           <p:cNvSpPr/>
           <p:nvPr/>
         </p:nvSpPr>
         <p:spPr>
           <a:xfrm>
             <a:off x="8074152" y="3666744"/>
-            <a:ext cx="2825496" cy="201168"/>
+            <a:ext cx="2825496" cy="256032"/>
           </a:xfrm>
           <a:prstGeom prst="rect">
             <a:avLst/>
@@ -10980,7 +11642,7 @@
               <a:buNone/>
             </a:pPr>
             <a:r>
-              <a:rPr lang="en-US" sz="950" b="1" dirty="0">
+              <a:rPr lang="en-US" sz="1300" b="1" dirty="0">
                 <a:solidFill>
                   <a:srgbClr val="0068B7"/>
                 </a:solidFill>
@@ -10990,20 +11652,20 @@
               </a:rPr>
               <a:t>Use this for</a:t>
             </a:r>
-            <a:endParaRPr lang="en-US" sz="950" dirty="0"/>
-          </a:p>
-        </p:txBody>
-      </p:sp>
-      <p:sp>
-        <p:nvSpPr>
-          <p:cNvPr id="16" name="Text 14"/>
-          <p:cNvSpPr/>
-          <p:nvPr/>
-        </p:nvSpPr>
-        <p:spPr>
-          <a:xfrm>
-            <a:off x="8074152" y="3959352"/>
-            <a:ext cx="2825496" cy="1170432"/>
+            <a:endParaRPr lang="en-US" sz="1300" dirty="0"/>
+          </a:p>
+        </p:txBody>
+      </p:sp>
+      <p:sp>
+        <p:nvSpPr>
+          <p:cNvPr id="17" name="Text 15"/>
+          <p:cNvSpPr/>
+          <p:nvPr/>
+        </p:nvSpPr>
+        <p:spPr>
+          <a:xfrm>
+            <a:off x="8074152" y="4023360"/>
+            <a:ext cx="2825496" cy="1097280"/>
           </a:xfrm>
           <a:prstGeom prst="rect">
             <a:avLst/>
@@ -11021,7 +11683,7 @@
               <a:buNone/>
             </a:pPr>
             <a:r>
-              <a:rPr lang="en-US" sz="1250" dirty="0">
+              <a:rPr lang="en-US" sz="1550" dirty="0">
                 <a:solidFill>
                   <a:srgbClr val="17364A"/>
                 </a:solidFill>
@@ -11031,7 +11693,7 @@
               </a:rPr>
               <a:t>Connect the concept to public health decisions, safeguards, documentation, or implementation work.</a:t>
             </a:r>
-            <a:endParaRPr lang="en-US" sz="1250" dirty="0"/>
+            <a:endParaRPr lang="en-US" sz="1550" dirty="0"/>
           </a:p>
         </p:txBody>
       </p:sp>
@@ -11228,7 +11890,7 @@
                 <a:ea typeface="Aptos" pitchFamily="34" charset="-122"/>
                 <a:cs typeface="Aptos" pitchFamily="34" charset="-120"/>
               </a:rPr>
-              <a:t>© Paula Soper</a:t>
+              <a:t>Â© Paula Soper</a:t>
             </a:r>
             <a:endParaRPr lang="en-US" sz="800" dirty="0"/>
           </a:p>
@@ -11236,7 +11898,46 @@
       </p:sp>
       <p:sp>
         <p:nvSpPr>
-          <p:cNvPr id="7" name="Shape 5"/>
+          <p:cNvPr id="7" name="Text 5"/>
+          <p:cNvSpPr/>
+          <p:nvPr/>
+        </p:nvSpPr>
+        <p:spPr>
+          <a:xfrm>
+            <a:off x="11137392" y="6510528"/>
+            <a:ext cx="411480" cy="201168"/>
+          </a:xfrm>
+          <a:prstGeom prst="rect">
+            <a:avLst/>
+          </a:prstGeom>
+          <a:noFill/>
+          <a:ln/>
+        </p:spPr>
+        <p:txBody>
+          <a:bodyPr wrap="square" lIns="0" tIns="0" rIns="0" bIns="0" rtlCol="0" anchor="ctr"/>
+          <a:lstStyle/>
+          <a:p>
+            <a:pPr algn="r" indent="0" marL="0">
+              <a:buNone/>
+            </a:pPr>
+            <a:r>
+              <a:rPr lang="en-US" sz="900" dirty="0">
+                <a:solidFill>
+                  <a:srgbClr val="5F7181"/>
+                </a:solidFill>
+                <a:latin typeface="Aptos" pitchFamily="34" charset="0"/>
+                <a:ea typeface="Aptos" pitchFamily="34" charset="-122"/>
+                <a:cs typeface="Aptos" pitchFamily="34" charset="-120"/>
+              </a:rPr>
+              <a:t>23</a:t>
+            </a:r>
+            <a:endParaRPr lang="en-US" sz="900" dirty="0"/>
+          </a:p>
+        </p:txBody>
+      </p:sp>
+      <p:sp>
+        <p:nvSpPr>
+          <p:cNvPr id="8" name="Shape 6"/>
           <p:cNvSpPr/>
           <p:nvPr/>
         </p:nvSpPr>
@@ -11261,7 +11962,7 @@
       </p:sp>
       <p:sp>
         <p:nvSpPr>
-          <p:cNvPr id="8" name="Text 6"/>
+          <p:cNvPr id="9" name="Text 7"/>
           <p:cNvSpPr/>
           <p:nvPr/>
         </p:nvSpPr>
@@ -11300,14 +12001,14 @@
       </p:sp>
       <p:sp>
         <p:nvSpPr>
-          <p:cNvPr id="9" name="Text 7"/>
+          <p:cNvPr id="10" name="Text 8"/>
           <p:cNvSpPr/>
           <p:nvPr/>
         </p:nvSpPr>
         <p:spPr>
           <a:xfrm>
             <a:off x="640080" y="621792"/>
-            <a:ext cx="10881360" cy="566928"/>
+            <a:ext cx="10881360" cy="713232"/>
           </a:xfrm>
           <a:prstGeom prst="rect">
             <a:avLst/>
@@ -11325,7 +12026,7 @@
               <a:buNone/>
             </a:pPr>
             <a:r>
-              <a:rPr lang="en-US" sz="2700" b="1" dirty="0">
+              <a:rPr lang="en-US" sz="3400" b="1" dirty="0">
                 <a:solidFill>
                   <a:srgbClr val="003A63"/>
                 </a:solidFill>
@@ -11335,20 +12036,20 @@
               </a:rPr>
               <a:t>References and Resources</a:t>
             </a:r>
-            <a:endParaRPr lang="en-US" sz="2700" dirty="0"/>
-          </a:p>
-        </p:txBody>
-      </p:sp>
-      <p:sp>
-        <p:nvSpPr>
-          <p:cNvPr id="10" name="Text 8"/>
-          <p:cNvSpPr/>
-          <p:nvPr/>
-        </p:nvSpPr>
-        <p:spPr>
-          <a:xfrm>
-            <a:off x="868680" y="1417320"/>
-            <a:ext cx="6675120" cy="4434840"/>
+            <a:endParaRPr lang="en-US" sz="3400" dirty="0"/>
+          </a:p>
+        </p:txBody>
+      </p:sp>
+      <p:sp>
+        <p:nvSpPr>
+          <p:cNvPr id="11" name="Text 9"/>
+          <p:cNvSpPr/>
+          <p:nvPr/>
+        </p:nvSpPr>
+        <p:spPr>
+          <a:xfrm>
+            <a:off x="868680" y="1508760"/>
+            <a:ext cx="6537960" cy="4160520"/>
           </a:xfrm>
           <a:prstGeom prst="rect">
             <a:avLst/>
@@ -11363,7 +12064,7 @@
           <a:lstStyle/>
           <a:p>
             <a:r>
-              <a:rPr lang="en-US" sz="1700" dirty="0">
+              <a:rPr lang="en-US" sz="2100" dirty="0">
                 <a:solidFill>
                   <a:srgbClr val="17364A"/>
                 </a:solidFill>
@@ -11373,11 +12074,11 @@
               </a:rPr>
               <a:t>HL7 FHIR resources and implementation guides: https://hl7.org/fhir/</a:t>
             </a:r>
-            <a:endParaRPr lang="en-US" sz="1700" dirty="0"/>
-          </a:p>
-          <a:p>
-            <a:r>
-              <a:rPr lang="en-US" sz="1700" dirty="0">
+            <a:endParaRPr lang="en-US" sz="2100" dirty="0"/>
+          </a:p>
+          <a:p>
+            <a:r>
+              <a:rPr lang="en-US" sz="2100" dirty="0">
                 <a:solidFill>
                   <a:srgbClr val="17364A"/>
                 </a:solidFill>
@@ -11387,11 +12088,11 @@
               </a:rPr>
               <a:t>HL7 US Core Implementation Guide: https://build.fhir.org/ig/HL7/US-Core/</a:t>
             </a:r>
-            <a:endParaRPr lang="en-US" sz="1700" dirty="0"/>
-          </a:p>
-          <a:p>
-            <a:r>
-              <a:rPr lang="en-US" sz="1700" dirty="0">
+            <a:endParaRPr lang="en-US" sz="2100" dirty="0"/>
+          </a:p>
+          <a:p>
+            <a:r>
+              <a:rPr lang="en-US" sz="2100" dirty="0">
                 <a:solidFill>
                   <a:srgbClr val="17364A"/>
                 </a:solidFill>
@@ -11401,27 +12102,13 @@
               </a:rPr>
               <a:t>ONC USCDI resources: https://isp.healthit.gov/united-states-core-data-interoperability-uscdi</a:t>
             </a:r>
-            <a:endParaRPr lang="en-US" sz="1700" dirty="0"/>
-          </a:p>
-          <a:p>
-            <a:r>
-              <a:rPr lang="en-US" sz="1700" dirty="0">
-                <a:solidFill>
-                  <a:srgbClr val="17364A"/>
-                </a:solidFill>
-                <a:latin typeface="Aptos" pitchFamily="34" charset="0"/>
-                <a:ea typeface="Aptos" pitchFamily="34" charset="-122"/>
-                <a:cs typeface="Aptos" pitchFamily="34" charset="-120"/>
-              </a:rPr>
-              <a:t>CDC Public Health Data Strategy: https://www.cdc.gov/public-health-data-strategy/php/about/index.html</a:t>
-            </a:r>
-            <a:endParaRPr lang="en-US" sz="1700" dirty="0"/>
-          </a:p>
-        </p:txBody>
-      </p:sp>
-      <p:sp>
-        <p:nvSpPr>
-          <p:cNvPr id="11" name="Shape 9"/>
+            <a:endParaRPr lang="en-US" sz="2100" dirty="0"/>
+          </a:p>
+        </p:txBody>
+      </p:sp>
+      <p:sp>
+        <p:nvSpPr>
+          <p:cNvPr id="12" name="Shape 10"/>
           <p:cNvSpPr/>
           <p:nvPr/>
         </p:nvSpPr>
@@ -11448,14 +12135,14 @@
       </p:sp>
       <p:sp>
         <p:nvSpPr>
-          <p:cNvPr id="12" name="Text 10"/>
+          <p:cNvPr id="13" name="Text 11"/>
           <p:cNvSpPr/>
           <p:nvPr/>
         </p:nvSpPr>
         <p:spPr>
           <a:xfrm>
             <a:off x="8074152" y="1563624"/>
-            <a:ext cx="2825496" cy="201168"/>
+            <a:ext cx="2825496" cy="256032"/>
           </a:xfrm>
           <a:prstGeom prst="rect">
             <a:avLst/>
@@ -11471,7 +12158,7 @@
               <a:buNone/>
             </a:pPr>
             <a:r>
-              <a:rPr lang="en-US" sz="950" b="1" dirty="0">
+              <a:rPr lang="en-US" sz="1300" b="1" dirty="0">
                 <a:solidFill>
                   <a:srgbClr val="0068B7"/>
                 </a:solidFill>
@@ -11481,20 +12168,20 @@
               </a:rPr>
               <a:t>Key idea</a:t>
             </a:r>
-            <a:endParaRPr lang="en-US" sz="950" dirty="0"/>
-          </a:p>
-        </p:txBody>
-      </p:sp>
-      <p:sp>
-        <p:nvSpPr>
-          <p:cNvPr id="13" name="Text 11"/>
-          <p:cNvSpPr/>
-          <p:nvPr/>
-        </p:nvSpPr>
-        <p:spPr>
-          <a:xfrm>
-            <a:off x="8074152" y="1856232"/>
-            <a:ext cx="2825496" cy="1261872"/>
+            <a:endParaRPr lang="en-US" sz="1300" dirty="0"/>
+          </a:p>
+        </p:txBody>
+      </p:sp>
+      <p:sp>
+        <p:nvSpPr>
+          <p:cNvPr id="14" name="Text 12"/>
+          <p:cNvSpPr/>
+          <p:nvPr/>
+        </p:nvSpPr>
+        <p:spPr>
+          <a:xfrm>
+            <a:off x="8074152" y="1920240"/>
+            <a:ext cx="2825496" cy="1188720"/>
           </a:xfrm>
           <a:prstGeom prst="rect">
             <a:avLst/>
@@ -11512,7 +12199,7 @@
               <a:buNone/>
             </a:pPr>
             <a:r>
-              <a:rPr lang="en-US" sz="1250" dirty="0">
+              <a:rPr lang="en-US" sz="1550" dirty="0">
                 <a:solidFill>
                   <a:srgbClr val="17364A"/>
                 </a:solidFill>
@@ -11522,13 +12209,13 @@
               </a:rPr>
               <a:t>HL7 FHIR resources and implementation guides: https://hl7.org/fhir/</a:t>
             </a:r>
-            <a:endParaRPr lang="en-US" sz="1250" dirty="0"/>
-          </a:p>
-        </p:txBody>
-      </p:sp>
-      <p:sp>
-        <p:nvSpPr>
-          <p:cNvPr id="14" name="Shape 12"/>
+            <a:endParaRPr lang="en-US" sz="1550" dirty="0"/>
+          </a:p>
+        </p:txBody>
+      </p:sp>
+      <p:sp>
+        <p:nvSpPr>
+          <p:cNvPr id="15" name="Shape 13"/>
           <p:cNvSpPr/>
           <p:nvPr/>
         </p:nvSpPr>
@@ -11555,14 +12242,14 @@
       </p:sp>
       <p:sp>
         <p:nvSpPr>
-          <p:cNvPr id="15" name="Text 13"/>
+          <p:cNvPr id="16" name="Text 14"/>
           <p:cNvSpPr/>
           <p:nvPr/>
         </p:nvSpPr>
         <p:spPr>
           <a:xfrm>
             <a:off x="8074152" y="3666744"/>
-            <a:ext cx="2825496" cy="201168"/>
+            <a:ext cx="2825496" cy="256032"/>
           </a:xfrm>
           <a:prstGeom prst="rect">
             <a:avLst/>
@@ -11578,7 +12265,7 @@
               <a:buNone/>
             </a:pPr>
             <a:r>
-              <a:rPr lang="en-US" sz="950" b="1" dirty="0">
+              <a:rPr lang="en-US" sz="1300" b="1" dirty="0">
                 <a:solidFill>
                   <a:srgbClr val="0068B7"/>
                 </a:solidFill>
@@ -11588,20 +12275,20 @@
               </a:rPr>
               <a:t>Use this for</a:t>
             </a:r>
-            <a:endParaRPr lang="en-US" sz="950" dirty="0"/>
-          </a:p>
-        </p:txBody>
-      </p:sp>
-      <p:sp>
-        <p:nvSpPr>
-          <p:cNvPr id="16" name="Text 14"/>
-          <p:cNvSpPr/>
-          <p:nvPr/>
-        </p:nvSpPr>
-        <p:spPr>
-          <a:xfrm>
-            <a:off x="8074152" y="3959352"/>
-            <a:ext cx="2825496" cy="1170432"/>
+            <a:endParaRPr lang="en-US" sz="1300" dirty="0"/>
+          </a:p>
+        </p:txBody>
+      </p:sp>
+      <p:sp>
+        <p:nvSpPr>
+          <p:cNvPr id="17" name="Text 15"/>
+          <p:cNvSpPr/>
+          <p:nvPr/>
+        </p:nvSpPr>
+        <p:spPr>
+          <a:xfrm>
+            <a:off x="8074152" y="4023360"/>
+            <a:ext cx="2825496" cy="1097280"/>
           </a:xfrm>
           <a:prstGeom prst="rect">
             <a:avLst/>
@@ -11619,7 +12306,7 @@
               <a:buNone/>
             </a:pPr>
             <a:r>
-              <a:rPr lang="en-US" sz="1250" dirty="0">
+              <a:rPr lang="en-US" sz="1550" dirty="0">
                 <a:solidFill>
                   <a:srgbClr val="17364A"/>
                 </a:solidFill>
@@ -11629,7 +12316,7 @@
               </a:rPr>
               <a:t>Connect the concept to public health decisions, safeguards, documentation, or implementation work.</a:t>
             </a:r>
-            <a:endParaRPr lang="en-US" sz="1250" dirty="0"/>
+            <a:endParaRPr lang="en-US" sz="1550" dirty="0"/>
           </a:p>
         </p:txBody>
       </p:sp>
@@ -11826,7 +12513,7 @@
                 <a:ea typeface="Aptos" pitchFamily="34" charset="-122"/>
                 <a:cs typeface="Aptos" pitchFamily="34" charset="-120"/>
               </a:rPr>
-              <a:t>© Paula Soper</a:t>
+              <a:t>Â© Paula Soper</a:t>
             </a:r>
             <a:endParaRPr lang="en-US" sz="800" dirty="0"/>
           </a:p>
@@ -11840,8 +12527,47 @@
         </p:nvSpPr>
         <p:spPr>
           <a:xfrm>
+            <a:off x="11137392" y="6510528"/>
+            <a:ext cx="411480" cy="201168"/>
+          </a:xfrm>
+          <a:prstGeom prst="rect">
+            <a:avLst/>
+          </a:prstGeom>
+          <a:noFill/>
+          <a:ln/>
+        </p:spPr>
+        <p:txBody>
+          <a:bodyPr wrap="square" lIns="0" tIns="0" rIns="0" bIns="0" rtlCol="0" anchor="ctr"/>
+          <a:lstStyle/>
+          <a:p>
+            <a:pPr algn="r" indent="0" marL="0">
+              <a:buNone/>
+            </a:pPr>
+            <a:r>
+              <a:rPr lang="en-US" sz="900" dirty="0">
+                <a:solidFill>
+                  <a:srgbClr val="5F7181"/>
+                </a:solidFill>
+                <a:latin typeface="Aptos" pitchFamily="34" charset="0"/>
+                <a:ea typeface="Aptos" pitchFamily="34" charset="-122"/>
+                <a:cs typeface="Aptos" pitchFamily="34" charset="-120"/>
+              </a:rPr>
+              <a:t>3</a:t>
+            </a:r>
+            <a:endParaRPr lang="en-US" sz="900" dirty="0"/>
+          </a:p>
+        </p:txBody>
+      </p:sp>
+      <p:sp>
+        <p:nvSpPr>
+          <p:cNvPr id="8" name="Text 6"/>
+          <p:cNvSpPr/>
+          <p:nvPr/>
+        </p:nvSpPr>
+        <p:spPr>
+          <a:xfrm>
             <a:off x="640080" y="658368"/>
-            <a:ext cx="10881360" cy="566928"/>
+            <a:ext cx="10881360" cy="713232"/>
           </a:xfrm>
           <a:prstGeom prst="rect">
             <a:avLst/>
@@ -11859,7 +12585,7 @@
               <a:buNone/>
             </a:pPr>
             <a:r>
-              <a:rPr lang="en-US" sz="2700" b="1" dirty="0">
+              <a:rPr lang="en-US" sz="3400" b="1" dirty="0">
                 <a:solidFill>
                   <a:srgbClr val="003A63"/>
                 </a:solidFill>
@@ -11869,20 +12595,20 @@
               </a:rPr>
               <a:t>How this module connects to the playbook</a:t>
             </a:r>
-            <a:endParaRPr lang="en-US" sz="2700" dirty="0"/>
-          </a:p>
-        </p:txBody>
-      </p:sp>
-      <p:sp>
-        <p:nvSpPr>
-          <p:cNvPr id="8" name="Text 6"/>
-          <p:cNvSpPr/>
-          <p:nvPr/>
-        </p:nvSpPr>
-        <p:spPr>
-          <a:xfrm>
-            <a:off x="868680" y="1417320"/>
-            <a:ext cx="6903720" cy="4480560"/>
+            <a:endParaRPr lang="en-US" sz="3400" dirty="0"/>
+          </a:p>
+        </p:txBody>
+      </p:sp>
+      <p:sp>
+        <p:nvSpPr>
+          <p:cNvPr id="9" name="Text 7"/>
+          <p:cNvSpPr/>
+          <p:nvPr/>
+        </p:nvSpPr>
+        <p:spPr>
+          <a:xfrm>
+            <a:off x="868680" y="1508760"/>
+            <a:ext cx="6812280" cy="3977640"/>
           </a:xfrm>
           <a:prstGeom prst="rect">
             <a:avLst/>
@@ -11897,7 +12623,7 @@
           <a:lstStyle/>
           <a:p>
             <a:r>
-              <a:rPr lang="en-US" sz="1540" dirty="0">
+              <a:rPr lang="en-US" sz="1900" dirty="0">
                 <a:solidFill>
                   <a:srgbClr val="17364A"/>
                 </a:solidFill>
@@ -11905,13 +12631,13 @@
                 <a:ea typeface="Aptos" pitchFamily="34" charset="-122"/>
                 <a:cs typeface="Aptos" pitchFamily="34" charset="-120"/>
               </a:rPr>
-              <a:t>Play 11: Build and Deploy AI Solutions - This lesson informs Play 11 by helping learners connect the lesson topic to build and deploy.</a:t>
-            </a:r>
-            <a:endParaRPr lang="en-US" sz="1540" dirty="0"/>
-          </a:p>
-          <a:p>
-            <a:r>
-              <a:rPr lang="en-US" sz="1540" dirty="0">
+              <a:t>Play 11: Build and Deploy AI Solutions - This lesson informs Play 11 by helping learners connect the lesson.</a:t>
+            </a:r>
+            <a:endParaRPr lang="en-US" sz="1900" dirty="0"/>
+          </a:p>
+          <a:p>
+            <a:r>
+              <a:rPr lang="en-US" sz="1900" dirty="0">
                 <a:solidFill>
                   <a:srgbClr val="17364A"/>
                 </a:solidFill>
@@ -11919,13 +12645,13 @@
                 <a:ea typeface="Aptos" pitchFamily="34" charset="-122"/>
                 <a:cs typeface="Aptos" pitchFamily="34" charset="-120"/>
               </a:rPr>
-              <a:t>Play 2: Readiness Assessment - This lesson informs Play 2 by helping learners connect the lesson topic to readiness assessment work.</a:t>
-            </a:r>
-            <a:endParaRPr lang="en-US" sz="1540" dirty="0"/>
-          </a:p>
-          <a:p>
-            <a:r>
-              <a:rPr lang="en-US" sz="1540" dirty="0">
+              <a:t>Play 2: Readiness Assessment - This lesson informs Play 2 by helping learners connect the lesson topic to.</a:t>
+            </a:r>
+            <a:endParaRPr lang="en-US" sz="1900" dirty="0"/>
+          </a:p>
+          <a:p>
+            <a:r>
+              <a:rPr lang="en-US" sz="1900" dirty="0">
                 <a:solidFill>
                   <a:srgbClr val="17364A"/>
                 </a:solidFill>
@@ -11933,13 +12659,13 @@
                 <a:ea typeface="Aptos" pitchFamily="34" charset="-122"/>
                 <a:cs typeface="Aptos" pitchFamily="34" charset="-120"/>
               </a:rPr>
-              <a:t>Play 7: Prioritize Use Cases - This lesson informs Play 7 by helping learners connect the lesson topic to prioritize use cases work.</a:t>
-            </a:r>
-            <a:endParaRPr lang="en-US" sz="1540" dirty="0"/>
-          </a:p>
-          <a:p>
-            <a:r>
-              <a:rPr lang="en-US" sz="1540" dirty="0">
+              <a:t>Play 7: Prioritize Use Cases - This lesson informs Play 7 by helping learners connect the lesson topic to.</a:t>
+            </a:r>
+            <a:endParaRPr lang="en-US" sz="1900" dirty="0"/>
+          </a:p>
+          <a:p>
+            <a:r>
+              <a:rPr lang="en-US" sz="1900" dirty="0">
                 <a:solidFill>
                   <a:srgbClr val="17364A"/>
                 </a:solidFill>
@@ -11947,15 +12673,15 @@
                 <a:ea typeface="Aptos" pitchFamily="34" charset="-122"/>
                 <a:cs typeface="Aptos" pitchFamily="34" charset="-120"/>
               </a:rPr>
-              <a:t>Play 1: Vision &amp; Guardrails - This lesson informs Play 1 by helping learners connect the lesson topic to vision &amp; guardrails work in.</a:t>
-            </a:r>
-            <a:endParaRPr lang="en-US" sz="1540" dirty="0"/>
-          </a:p>
-        </p:txBody>
-      </p:sp>
-      <p:sp>
-        <p:nvSpPr>
-          <p:cNvPr id="9" name="Shape 7"/>
+              <a:t>Play 1: Vision &amp; Guardrails - This lesson informs Play 1 by helping learners connect the lesson topic to.</a:t>
+            </a:r>
+            <a:endParaRPr lang="en-US" sz="1900" dirty="0"/>
+          </a:p>
+        </p:txBody>
+      </p:sp>
+      <p:sp>
+        <p:nvSpPr>
+          <p:cNvPr id="10" name="Shape 8"/>
           <p:cNvSpPr/>
           <p:nvPr/>
         </p:nvSpPr>
@@ -11982,14 +12708,14 @@
       </p:sp>
       <p:sp>
         <p:nvSpPr>
-          <p:cNvPr id="10" name="Text 8"/>
+          <p:cNvPr id="11" name="Text 9"/>
           <p:cNvSpPr/>
           <p:nvPr/>
         </p:nvSpPr>
         <p:spPr>
           <a:xfrm>
             <a:off x="8211312" y="1563624"/>
-            <a:ext cx="2734056" cy="201168"/>
+            <a:ext cx="2734056" cy="256032"/>
           </a:xfrm>
           <a:prstGeom prst="rect">
             <a:avLst/>
@@ -12005,7 +12731,7 @@
               <a:buNone/>
             </a:pPr>
             <a:r>
-              <a:rPr lang="en-US" sz="950" b="1" dirty="0">
+              <a:rPr lang="en-US" sz="1300" b="1" dirty="0">
                 <a:solidFill>
                   <a:srgbClr val="0068B7"/>
                 </a:solidFill>
@@ -12015,20 +12741,20 @@
               </a:rPr>
               <a:t>Apply the lesson</a:t>
             </a:r>
-            <a:endParaRPr lang="en-US" sz="950" dirty="0"/>
-          </a:p>
-        </p:txBody>
-      </p:sp>
-      <p:sp>
-        <p:nvSpPr>
-          <p:cNvPr id="11" name="Text 9"/>
-          <p:cNvSpPr/>
-          <p:nvPr/>
-        </p:nvSpPr>
-        <p:spPr>
-          <a:xfrm>
-            <a:off x="8211312" y="1856232"/>
-            <a:ext cx="2734056" cy="1536192"/>
+            <a:endParaRPr lang="en-US" sz="1300" dirty="0"/>
+          </a:p>
+        </p:txBody>
+      </p:sp>
+      <p:sp>
+        <p:nvSpPr>
+          <p:cNvPr id="12" name="Text 10"/>
+          <p:cNvSpPr/>
+          <p:nvPr/>
+        </p:nvSpPr>
+        <p:spPr>
+          <a:xfrm>
+            <a:off x="8211312" y="1920240"/>
+            <a:ext cx="2734056" cy="1463040"/>
           </a:xfrm>
           <a:prstGeom prst="rect">
             <a:avLst/>
@@ -12046,7 +12772,7 @@
               <a:buNone/>
             </a:pPr>
             <a:r>
-              <a:rPr lang="en-US" sz="1250" dirty="0">
+              <a:rPr lang="en-US" sz="1550" dirty="0">
                 <a:solidFill>
                   <a:srgbClr val="17364A"/>
                 </a:solidFill>
@@ -12056,32 +12782,32 @@
               </a:rPr>
               <a:t>Use the related plays to identify decisions, participants, timing, approvals, and documentation needed for responsible implementation.</a:t>
             </a:r>
-            <a:endParaRPr lang="en-US" sz="1250" dirty="0"/>
-          </a:p>
-        </p:txBody>
-      </p:sp>
-      <p:sp>
-        <p:nvSpPr>
-          <p:cNvPr id="12" name="Shape 10"/>
-          <p:cNvSpPr/>
-          <p:nvPr/>
-        </p:nvSpPr>
-        <p:spPr>
-          <a:xfrm>
-            <a:off x="8046720" y="3794760"/>
-            <a:ext cx="3063240" cy="1508760"/>
+            <a:endParaRPr lang="en-US" sz="1550" dirty="0"/>
+          </a:p>
+        </p:txBody>
+      </p:sp>
+      <p:sp>
+        <p:nvSpPr>
+          <p:cNvPr id="13" name="Shape 11"/>
+          <p:cNvSpPr/>
+          <p:nvPr/>
+        </p:nvSpPr>
+        <p:spPr>
+          <a:xfrm>
+            <a:off x="7818120" y="3977640"/>
+            <a:ext cx="972312" cy="749808"/>
           </a:xfrm>
           <a:prstGeom prst="roundRect">
             <a:avLst>
-              <a:gd name="adj" fmla="val 7273"/>
+              <a:gd name="adj" fmla="val 14634"/>
             </a:avLst>
           </a:prstGeom>
           <a:solidFill>
-            <a:srgbClr val="FFF4D9"/>
+            <a:srgbClr val="0068B7"/>
           </a:solidFill>
           <a:ln w="12700">
             <a:solidFill>
-              <a:srgbClr val="B9D7E6"/>
+              <a:srgbClr val="0068B7"/>
             </a:solidFill>
             <a:prstDash val="solid"/>
           </a:ln>
@@ -12089,81 +12815,256 @@
       </p:sp>
       <p:sp>
         <p:nvSpPr>
-          <p:cNvPr id="13" name="Text 11"/>
-          <p:cNvSpPr/>
-          <p:nvPr/>
-        </p:nvSpPr>
-        <p:spPr>
-          <a:xfrm>
-            <a:off x="8211312" y="3941064"/>
-            <a:ext cx="2734056" cy="201168"/>
-          </a:xfrm>
-          <a:prstGeom prst="rect">
-            <a:avLst/>
-          </a:prstGeom>
-          <a:noFill/>
-          <a:ln/>
-        </p:spPr>
-        <p:txBody>
-          <a:bodyPr wrap="square" lIns="0" tIns="0" rIns="0" bIns="0" rtlCol="0" anchor="ctr"/>
-          <a:lstStyle/>
-          <a:p>
-            <a:pPr indent="0" marL="0">
-              <a:buNone/>
-            </a:pPr>
-            <a:r>
-              <a:rPr lang="en-US" sz="950" b="1" dirty="0">
-                <a:solidFill>
-                  <a:srgbClr val="0068B7"/>
-                </a:solidFill>
-                <a:latin typeface="Aptos" pitchFamily="34" charset="0"/>
-                <a:ea typeface="Aptos" pitchFamily="34" charset="-122"/>
-                <a:cs typeface="Aptos" pitchFamily="34" charset="-120"/>
-              </a:rPr>
-              <a:t>Keep in mind</a:t>
-            </a:r>
-            <a:endParaRPr lang="en-US" sz="950" dirty="0"/>
-          </a:p>
-        </p:txBody>
-      </p:sp>
-      <p:sp>
-        <p:nvSpPr>
           <p:cNvPr id="14" name="Text 12"/>
           <p:cNvSpPr/>
           <p:nvPr/>
         </p:nvSpPr>
         <p:spPr>
           <a:xfrm>
-            <a:off x="8211312" y="4233672"/>
-            <a:ext cx="2734056" cy="941832"/>
-          </a:xfrm>
-          <a:prstGeom prst="rect">
-            <a:avLst/>
-          </a:prstGeom>
-          <a:noFill/>
-          <a:ln/>
-        </p:spPr>
-        <p:txBody>
-          <a:bodyPr wrap="square" lIns="0" tIns="0" rIns="0" bIns="0" rtlCol="0" anchor="t">
+            <a:off x="7891272" y="4169664"/>
+            <a:ext cx="826008" cy="310896"/>
+          </a:xfrm>
+          <a:prstGeom prst="rect">
+            <a:avLst/>
+          </a:prstGeom>
+          <a:noFill/>
+          <a:ln/>
+        </p:spPr>
+        <p:txBody>
+          <a:bodyPr wrap="square" lIns="0" tIns="0" rIns="0" bIns="0" rtlCol="0" anchor="ctr">
             <a:normAutofit/>
           </a:bodyPr>
           <a:lstStyle/>
           <a:p>
-            <a:pPr indent="0" marL="0">
-              <a:buNone/>
-            </a:pPr>
-            <a:r>
-              <a:rPr lang="en-US" sz="1250" dirty="0">
-                <a:solidFill>
-                  <a:srgbClr val="17364A"/>
-                </a:solidFill>
-                <a:latin typeface="Aptos" pitchFamily="34" charset="0"/>
-                <a:ea typeface="Aptos" pitchFamily="34" charset="-122"/>
-                <a:cs typeface="Aptos" pitchFamily="34" charset="-120"/>
-              </a:rPr>
-              <a:t>The playbook connection helps turn training into agency work, not just individual knowledge.</a:t>
-            </a:r>
-            <a:endParaRPr lang="en-US" sz="1250" dirty="0"/>
+            <a:pPr algn="ctr" indent="0" marL="0">
+              <a:buNone/>
+            </a:pPr>
+            <a:r>
+              <a:rPr lang="en-US" sz="1500" b="1" dirty="0">
+                <a:solidFill>
+                  <a:srgbClr val="FFFFFF"/>
+                </a:solidFill>
+                <a:latin typeface="Aptos" pitchFamily="34" charset="0"/>
+                <a:ea typeface="Aptos" pitchFamily="34" charset="-122"/>
+                <a:cs typeface="Aptos" pitchFamily="34" charset="-120"/>
+              </a:rPr>
+              <a:t>Lesson</a:t>
+            </a:r>
+            <a:endParaRPr lang="en-US" sz="1500" dirty="0"/>
+          </a:p>
+        </p:txBody>
+      </p:sp>
+      <p:sp>
+        <p:nvSpPr>
+          <p:cNvPr id="15" name="Text 13"/>
+          <p:cNvSpPr/>
+          <p:nvPr/>
+        </p:nvSpPr>
+        <p:spPr>
+          <a:xfrm>
+            <a:off x="8817864" y="4187952"/>
+            <a:ext cx="201168" cy="256032"/>
+          </a:xfrm>
+          <a:prstGeom prst="rect">
+            <a:avLst/>
+          </a:prstGeom>
+          <a:noFill/>
+          <a:ln/>
+        </p:spPr>
+        <p:txBody>
+          <a:bodyPr wrap="square" lIns="0" tIns="0" rIns="0" bIns="0" rtlCol="0" anchor="ctr"/>
+          <a:lstStyle/>
+          <a:p>
+            <a:pPr algn="ctr" indent="0" marL="0">
+              <a:buNone/>
+            </a:pPr>
+            <a:r>
+              <a:rPr lang="en-US" sz="1800" b="1" dirty="0">
+                <a:solidFill>
+                  <a:srgbClr val="0068B7"/>
+                </a:solidFill>
+                <a:latin typeface="Aptos" pitchFamily="34" charset="0"/>
+                <a:ea typeface="Aptos" pitchFamily="34" charset="-122"/>
+                <a:cs typeface="Aptos" pitchFamily="34" charset="-120"/>
+              </a:rPr>
+              <a:t>â†’</a:t>
+            </a:r>
+            <a:endParaRPr lang="en-US" sz="1800" dirty="0"/>
+          </a:p>
+        </p:txBody>
+      </p:sp>
+      <p:sp>
+        <p:nvSpPr>
+          <p:cNvPr id="16" name="Shape 14"/>
+          <p:cNvSpPr/>
+          <p:nvPr/>
+        </p:nvSpPr>
+        <p:spPr>
+          <a:xfrm>
+            <a:off x="9046464" y="3977640"/>
+            <a:ext cx="972312" cy="749808"/>
+          </a:xfrm>
+          <a:prstGeom prst="roundRect">
+            <a:avLst>
+              <a:gd name="adj" fmla="val 14634"/>
+            </a:avLst>
+          </a:prstGeom>
+          <a:solidFill>
+            <a:srgbClr val="2F8A28"/>
+          </a:solidFill>
+          <a:ln w="12700">
+            <a:solidFill>
+              <a:srgbClr val="2F8A28"/>
+            </a:solidFill>
+            <a:prstDash val="solid"/>
+          </a:ln>
+        </p:spPr>
+      </p:sp>
+      <p:sp>
+        <p:nvSpPr>
+          <p:cNvPr id="17" name="Text 15"/>
+          <p:cNvSpPr/>
+          <p:nvPr/>
+        </p:nvSpPr>
+        <p:spPr>
+          <a:xfrm>
+            <a:off x="9119616" y="4169664"/>
+            <a:ext cx="826008" cy="310896"/>
+          </a:xfrm>
+          <a:prstGeom prst="rect">
+            <a:avLst/>
+          </a:prstGeom>
+          <a:noFill/>
+          <a:ln/>
+        </p:spPr>
+        <p:txBody>
+          <a:bodyPr wrap="square" lIns="0" tIns="0" rIns="0" bIns="0" rtlCol="0" anchor="ctr">
+            <a:normAutofit/>
+          </a:bodyPr>
+          <a:lstStyle/>
+          <a:p>
+            <a:pPr algn="ctr" indent="0" marL="0">
+              <a:buNone/>
+            </a:pPr>
+            <a:r>
+              <a:rPr lang="en-US" sz="1500" b="1" dirty="0">
+                <a:solidFill>
+                  <a:srgbClr val="FFFFFF"/>
+                </a:solidFill>
+                <a:latin typeface="Aptos" pitchFamily="34" charset="0"/>
+                <a:ea typeface="Aptos" pitchFamily="34" charset="-122"/>
+                <a:cs typeface="Aptos" pitchFamily="34" charset="-120"/>
+              </a:rPr>
+              <a:t>Plays</a:t>
+            </a:r>
+            <a:endParaRPr lang="en-US" sz="1500" dirty="0"/>
+          </a:p>
+        </p:txBody>
+      </p:sp>
+      <p:sp>
+        <p:nvSpPr>
+          <p:cNvPr id="18" name="Text 16"/>
+          <p:cNvSpPr/>
+          <p:nvPr/>
+        </p:nvSpPr>
+        <p:spPr>
+          <a:xfrm>
+            <a:off x="10046208" y="4187952"/>
+            <a:ext cx="201168" cy="256032"/>
+          </a:xfrm>
+          <a:prstGeom prst="rect">
+            <a:avLst/>
+          </a:prstGeom>
+          <a:noFill/>
+          <a:ln/>
+        </p:spPr>
+        <p:txBody>
+          <a:bodyPr wrap="square" lIns="0" tIns="0" rIns="0" bIns="0" rtlCol="0" anchor="ctr"/>
+          <a:lstStyle/>
+          <a:p>
+            <a:pPr algn="ctr" indent="0" marL="0">
+              <a:buNone/>
+            </a:pPr>
+            <a:r>
+              <a:rPr lang="en-US" sz="1800" b="1" dirty="0">
+                <a:solidFill>
+                  <a:srgbClr val="0068B7"/>
+                </a:solidFill>
+                <a:latin typeface="Aptos" pitchFamily="34" charset="0"/>
+                <a:ea typeface="Aptos" pitchFamily="34" charset="-122"/>
+                <a:cs typeface="Aptos" pitchFamily="34" charset="-120"/>
+              </a:rPr>
+              <a:t>â†’</a:t>
+            </a:r>
+            <a:endParaRPr lang="en-US" sz="1800" dirty="0"/>
+          </a:p>
+        </p:txBody>
+      </p:sp>
+      <p:sp>
+        <p:nvSpPr>
+          <p:cNvPr id="19" name="Shape 17"/>
+          <p:cNvSpPr/>
+          <p:nvPr/>
+        </p:nvSpPr>
+        <p:spPr>
+          <a:xfrm>
+            <a:off x="10274808" y="3977640"/>
+            <a:ext cx="972312" cy="749808"/>
+          </a:xfrm>
+          <a:prstGeom prst="roundRect">
+            <a:avLst>
+              <a:gd name="adj" fmla="val 14634"/>
+            </a:avLst>
+          </a:prstGeom>
+          <a:solidFill>
+            <a:srgbClr val="6A4CA3"/>
+          </a:solidFill>
+          <a:ln w="12700">
+            <a:solidFill>
+              <a:srgbClr val="6A4CA3"/>
+            </a:solidFill>
+            <a:prstDash val="solid"/>
+          </a:ln>
+        </p:spPr>
+      </p:sp>
+      <p:sp>
+        <p:nvSpPr>
+          <p:cNvPr id="20" name="Text 18"/>
+          <p:cNvSpPr/>
+          <p:nvPr/>
+        </p:nvSpPr>
+        <p:spPr>
+          <a:xfrm>
+            <a:off x="10347960" y="4169664"/>
+            <a:ext cx="826008" cy="310896"/>
+          </a:xfrm>
+          <a:prstGeom prst="rect">
+            <a:avLst/>
+          </a:prstGeom>
+          <a:noFill/>
+          <a:ln/>
+        </p:spPr>
+        <p:txBody>
+          <a:bodyPr wrap="square" lIns="0" tIns="0" rIns="0" bIns="0" rtlCol="0" anchor="ctr">
+            <a:normAutofit/>
+          </a:bodyPr>
+          <a:lstStyle/>
+          <a:p>
+            <a:pPr algn="ctr" indent="0" marL="0">
+              <a:buNone/>
+            </a:pPr>
+            <a:r>
+              <a:rPr lang="en-US" sz="1500" b="1" dirty="0">
+                <a:solidFill>
+                  <a:srgbClr val="FFFFFF"/>
+                </a:solidFill>
+                <a:latin typeface="Aptos" pitchFamily="34" charset="0"/>
+                <a:ea typeface="Aptos" pitchFamily="34" charset="-122"/>
+                <a:cs typeface="Aptos" pitchFamily="34" charset="-120"/>
+              </a:rPr>
+              <a:t>Action</a:t>
+            </a:r>
+            <a:endParaRPr lang="en-US" sz="1500" dirty="0"/>
           </a:p>
         </p:txBody>
       </p:sp>
@@ -12360,7 +13261,7 @@
                 <a:ea typeface="Aptos" pitchFamily="34" charset="-122"/>
                 <a:cs typeface="Aptos" pitchFamily="34" charset="-120"/>
               </a:rPr>
-              <a:t>© Paula Soper</a:t>
+              <a:t>Â© Paula Soper</a:t>
             </a:r>
             <a:endParaRPr lang="en-US" sz="800" dirty="0"/>
           </a:p>
@@ -12374,8 +13275,47 @@
         </p:nvSpPr>
         <p:spPr>
           <a:xfrm>
+            <a:off x="11137392" y="6510528"/>
+            <a:ext cx="411480" cy="201168"/>
+          </a:xfrm>
+          <a:prstGeom prst="rect">
+            <a:avLst/>
+          </a:prstGeom>
+          <a:noFill/>
+          <a:ln/>
+        </p:spPr>
+        <p:txBody>
+          <a:bodyPr wrap="square" lIns="0" tIns="0" rIns="0" bIns="0" rtlCol="0" anchor="ctr"/>
+          <a:lstStyle/>
+          <a:p>
+            <a:pPr algn="r" indent="0" marL="0">
+              <a:buNone/>
+            </a:pPr>
+            <a:r>
+              <a:rPr lang="en-US" sz="900" dirty="0">
+                <a:solidFill>
+                  <a:srgbClr val="5F7181"/>
+                </a:solidFill>
+                <a:latin typeface="Aptos" pitchFamily="34" charset="0"/>
+                <a:ea typeface="Aptos" pitchFamily="34" charset="-122"/>
+                <a:cs typeface="Aptos" pitchFamily="34" charset="-120"/>
+              </a:rPr>
+              <a:t>4</a:t>
+            </a:r>
+            <a:endParaRPr lang="en-US" sz="900" dirty="0"/>
+          </a:p>
+        </p:txBody>
+      </p:sp>
+      <p:sp>
+        <p:nvSpPr>
+          <p:cNvPr id="8" name="Text 6"/>
+          <p:cNvSpPr/>
+          <p:nvPr/>
+        </p:nvSpPr>
+        <p:spPr>
+          <a:xfrm>
             <a:off x="640080" y="658368"/>
-            <a:ext cx="10881360" cy="566928"/>
+            <a:ext cx="10881360" cy="713232"/>
           </a:xfrm>
           <a:prstGeom prst="rect">
             <a:avLst/>
@@ -12393,7 +13333,7 @@
               <a:buNone/>
             </a:pPr>
             <a:r>
-              <a:rPr lang="en-US" sz="2700" b="1" dirty="0">
+              <a:rPr lang="en-US" sz="3400" b="1" dirty="0">
                 <a:solidFill>
                   <a:srgbClr val="003A63"/>
                 </a:solidFill>
@@ -12403,20 +13343,20 @@
               </a:rPr>
               <a:t>Related toolkit resources</a:t>
             </a:r>
-            <a:endParaRPr lang="en-US" sz="2700" dirty="0"/>
-          </a:p>
-        </p:txBody>
-      </p:sp>
-      <p:sp>
-        <p:nvSpPr>
-          <p:cNvPr id="8" name="Text 6"/>
-          <p:cNvSpPr/>
-          <p:nvPr/>
-        </p:nvSpPr>
-        <p:spPr>
-          <a:xfrm>
-            <a:off x="868680" y="1417320"/>
-            <a:ext cx="6903720" cy="4480560"/>
+            <a:endParaRPr lang="en-US" sz="3400" dirty="0"/>
+          </a:p>
+        </p:txBody>
+      </p:sp>
+      <p:sp>
+        <p:nvSpPr>
+          <p:cNvPr id="9" name="Text 7"/>
+          <p:cNvSpPr/>
+          <p:nvPr/>
+        </p:nvSpPr>
+        <p:spPr>
+          <a:xfrm>
+            <a:off x="868680" y="1508760"/>
+            <a:ext cx="6812280" cy="3977640"/>
           </a:xfrm>
           <a:prstGeom prst="rect">
             <a:avLst/>
@@ -12431,7 +13371,7 @@
           <a:lstStyle/>
           <a:p>
             <a:r>
-              <a:rPr lang="en-US" sz="1460" dirty="0">
+              <a:rPr lang="en-US" sz="1850" dirty="0">
                 <a:solidFill>
                   <a:srgbClr val="17364A"/>
                 </a:solidFill>
@@ -12439,13 +13379,13 @@
                 <a:ea typeface="Aptos" pitchFamily="34" charset="-122"/>
                 <a:cs typeface="Aptos" pitchFamily="34" charset="-120"/>
               </a:rPr>
-              <a:t>Tool 4: AI Policy Landscape Scan (Worksheet) - Use AI Policy Landscape Scan to translate this lesson into a documented public health.</a:t>
-            </a:r>
-            <a:endParaRPr lang="en-US" sz="1460" dirty="0"/>
-          </a:p>
-          <a:p>
-            <a:r>
-              <a:rPr lang="en-US" sz="1460" dirty="0">
+              <a:t>Tool 4: AI Policy Landscape Scan (Worksheet) - Use AI Policy Landscape Scan to translate this lesson into a.</a:t>
+            </a:r>
+            <a:endParaRPr lang="en-US" sz="1850" dirty="0"/>
+          </a:p>
+          <a:p>
+            <a:r>
+              <a:rPr lang="en-US" sz="1850" dirty="0">
                 <a:solidFill>
                   <a:srgbClr val="17364A"/>
                 </a:solidFill>
@@ -12453,13 +13393,13 @@
                 <a:ea typeface="Aptos" pitchFamily="34" charset="-122"/>
                 <a:cs typeface="Aptos" pitchFamily="34" charset="-120"/>
               </a:rPr>
-              <a:t>Tool 5: AI Environmental and Resource Impact Review (Checklist) - Use AI Environmental and Resource Impact Review to translate this.</a:t>
-            </a:r>
-            <a:endParaRPr lang="en-US" sz="1460" dirty="0"/>
-          </a:p>
-          <a:p>
-            <a:r>
-              <a:rPr lang="en-US" sz="1460" dirty="0">
+              <a:t>Tool 5: AI Environmental and Resource Impact Review (Checklist) - Use AI Environmental and Resource Impact.</a:t>
+            </a:r>
+            <a:endParaRPr lang="en-US" sz="1850" dirty="0"/>
+          </a:p>
+          <a:p>
+            <a:r>
+              <a:rPr lang="en-US" sz="1850" dirty="0">
                 <a:solidFill>
                   <a:srgbClr val="17364A"/>
                 </a:solidFill>
@@ -12467,13 +13407,13 @@
                 <a:ea typeface="Aptos" pitchFamily="34" charset="-122"/>
                 <a:cs typeface="Aptos" pitchFamily="34" charset="-120"/>
               </a:rPr>
-              <a:t>Tool 6: Human-Centered AI Decision Rule Checklist (Checklist) - Use Human-Centered AI Decision Rule Checklist to translate this.</a:t>
-            </a:r>
-            <a:endParaRPr lang="en-US" sz="1460" dirty="0"/>
-          </a:p>
-          <a:p>
-            <a:r>
-              <a:rPr lang="en-US" sz="1460" dirty="0">
+              <a:t>Tool 6: Human-Centered AI Decision Rule Checklist (Checklist) - Use Human-Centered AI Decision Rule.</a:t>
+            </a:r>
+            <a:endParaRPr lang="en-US" sz="1850" dirty="0"/>
+          </a:p>
+          <a:p>
+            <a:r>
+              <a:rPr lang="en-US" sz="1850" dirty="0">
                 <a:solidFill>
                   <a:srgbClr val="17364A"/>
                 </a:solidFill>
@@ -12481,29 +13421,15 @@
                 <a:ea typeface="Aptos" pitchFamily="34" charset="-122"/>
                 <a:cs typeface="Aptos" pitchFamily="34" charset="-120"/>
               </a:rPr>
-              <a:t>Tool 8: AI Project Charter (Planning) - Use AI Project Charter to translate this lesson into a documented public health AI planning,.</a:t>
-            </a:r>
-            <a:endParaRPr lang="en-US" sz="1460" dirty="0"/>
-          </a:p>
-          <a:p>
-            <a:r>
-              <a:rPr lang="en-US" sz="1460" dirty="0">
-                <a:solidFill>
-                  <a:srgbClr val="17364A"/>
-                </a:solidFill>
-                <a:latin typeface="Aptos" pitchFamily="34" charset="0"/>
-                <a:ea typeface="Aptos" pitchFamily="34" charset="-122"/>
-                <a:cs typeface="Aptos" pitchFamily="34" charset="-120"/>
-              </a:rPr>
-              <a:t>Tool 9: Data Quality Assessment Checklist (Checklist) - Use this tool to complete or strengthen the practical exercise for the module.</a:t>
-            </a:r>
-            <a:endParaRPr lang="en-US" sz="1460" dirty="0"/>
-          </a:p>
-        </p:txBody>
-      </p:sp>
-      <p:sp>
-        <p:nvSpPr>
-          <p:cNvPr id="9" name="Shape 7"/>
+              <a:t>Tool 8: AI Project Charter (Planning) - Use AI Project Charter to translate this lesson into a documented.</a:t>
+            </a:r>
+            <a:endParaRPr lang="en-US" sz="1850" dirty="0"/>
+          </a:p>
+        </p:txBody>
+      </p:sp>
+      <p:sp>
+        <p:nvSpPr>
+          <p:cNvPr id="10" name="Shape 8"/>
           <p:cNvSpPr/>
           <p:nvPr/>
         </p:nvSpPr>
@@ -12530,14 +13456,14 @@
       </p:sp>
       <p:sp>
         <p:nvSpPr>
-          <p:cNvPr id="10" name="Text 8"/>
+          <p:cNvPr id="11" name="Text 9"/>
           <p:cNvSpPr/>
           <p:nvPr/>
         </p:nvSpPr>
         <p:spPr>
           <a:xfrm>
             <a:off x="8211312" y="1563624"/>
-            <a:ext cx="2734056" cy="201168"/>
+            <a:ext cx="2734056" cy="256032"/>
           </a:xfrm>
           <a:prstGeom prst="rect">
             <a:avLst/>
@@ -12553,7 +13479,7 @@
               <a:buNone/>
             </a:pPr>
             <a:r>
-              <a:rPr lang="en-US" sz="950" b="1" dirty="0">
+              <a:rPr lang="en-US" sz="1300" b="1" dirty="0">
                 <a:solidFill>
                   <a:srgbClr val="0068B7"/>
                 </a:solidFill>
@@ -12563,20 +13489,20 @@
               </a:rPr>
               <a:t>Use the tools</a:t>
             </a:r>
-            <a:endParaRPr lang="en-US" sz="950" dirty="0"/>
-          </a:p>
-        </p:txBody>
-      </p:sp>
-      <p:sp>
-        <p:nvSpPr>
-          <p:cNvPr id="11" name="Text 9"/>
-          <p:cNvSpPr/>
-          <p:nvPr/>
-        </p:nvSpPr>
-        <p:spPr>
-          <a:xfrm>
-            <a:off x="8211312" y="1856232"/>
-            <a:ext cx="2734056" cy="1536192"/>
+            <a:endParaRPr lang="en-US" sz="1300" dirty="0"/>
+          </a:p>
+        </p:txBody>
+      </p:sp>
+      <p:sp>
+        <p:nvSpPr>
+          <p:cNvPr id="12" name="Text 10"/>
+          <p:cNvSpPr/>
+          <p:nvPr/>
+        </p:nvSpPr>
+        <p:spPr>
+          <a:xfrm>
+            <a:off x="8211312" y="1920240"/>
+            <a:ext cx="2734056" cy="1463040"/>
           </a:xfrm>
           <a:prstGeom prst="rect">
             <a:avLst/>
@@ -12594,7 +13520,7 @@
               <a:buNone/>
             </a:pPr>
             <a:r>
-              <a:rPr lang="en-US" sz="1250" dirty="0">
+              <a:rPr lang="en-US" sz="1550" dirty="0">
                 <a:solidFill>
                   <a:srgbClr val="17364A"/>
                 </a:solidFill>
@@ -12604,32 +13530,32 @@
               </a:rPr>
               <a:t>Use linked tools when your department needs a structured worksheet, template, checklist, review process, or documentation artifact.</a:t>
             </a:r>
-            <a:endParaRPr lang="en-US" sz="1250" dirty="0"/>
-          </a:p>
-        </p:txBody>
-      </p:sp>
-      <p:sp>
-        <p:nvSpPr>
-          <p:cNvPr id="12" name="Shape 10"/>
-          <p:cNvSpPr/>
-          <p:nvPr/>
-        </p:nvSpPr>
-        <p:spPr>
-          <a:xfrm>
-            <a:off x="8046720" y="3794760"/>
-            <a:ext cx="3063240" cy="1508760"/>
+            <a:endParaRPr lang="en-US" sz="1550" dirty="0"/>
+          </a:p>
+        </p:txBody>
+      </p:sp>
+      <p:sp>
+        <p:nvSpPr>
+          <p:cNvPr id="13" name="Shape 11"/>
+          <p:cNvSpPr/>
+          <p:nvPr/>
+        </p:nvSpPr>
+        <p:spPr>
+          <a:xfrm>
+            <a:off x="7818120" y="3977640"/>
+            <a:ext cx="972312" cy="749808"/>
           </a:xfrm>
           <a:prstGeom prst="roundRect">
             <a:avLst>
-              <a:gd name="adj" fmla="val 7273"/>
+              <a:gd name="adj" fmla="val 14634"/>
             </a:avLst>
           </a:prstGeom>
           <a:solidFill>
-            <a:srgbClr val="EEF8ED"/>
+            <a:srgbClr val="0068B7"/>
           </a:solidFill>
           <a:ln w="12700">
             <a:solidFill>
-              <a:srgbClr val="B9D7E6"/>
+              <a:srgbClr val="0068B7"/>
             </a:solidFill>
             <a:prstDash val="solid"/>
           </a:ln>
@@ -12637,81 +13563,256 @@
       </p:sp>
       <p:sp>
         <p:nvSpPr>
-          <p:cNvPr id="13" name="Text 11"/>
-          <p:cNvSpPr/>
-          <p:nvPr/>
-        </p:nvSpPr>
-        <p:spPr>
-          <a:xfrm>
-            <a:off x="8211312" y="3941064"/>
-            <a:ext cx="2734056" cy="201168"/>
-          </a:xfrm>
-          <a:prstGeom prst="rect">
-            <a:avLst/>
-          </a:prstGeom>
-          <a:noFill/>
-          <a:ln/>
-        </p:spPr>
-        <p:txBody>
-          <a:bodyPr wrap="square" lIns="0" tIns="0" rIns="0" bIns="0" rtlCol="0" anchor="ctr"/>
-          <a:lstStyle/>
-          <a:p>
-            <a:pPr indent="0" marL="0">
-              <a:buNone/>
-            </a:pPr>
-            <a:r>
-              <a:rPr lang="en-US" sz="950" b="1" dirty="0">
-                <a:solidFill>
-                  <a:srgbClr val="0068B7"/>
-                </a:solidFill>
-                <a:latin typeface="Aptos" pitchFamily="34" charset="0"/>
-                <a:ea typeface="Aptos" pitchFamily="34" charset="-122"/>
-                <a:cs typeface="Aptos" pitchFamily="34" charset="-120"/>
-              </a:rPr>
-              <a:t>Avoid duplication</a:t>
-            </a:r>
-            <a:endParaRPr lang="en-US" sz="950" dirty="0"/>
-          </a:p>
-        </p:txBody>
-      </p:sp>
-      <p:sp>
-        <p:nvSpPr>
           <p:cNvPr id="14" name="Text 12"/>
           <p:cNvSpPr/>
           <p:nvPr/>
         </p:nvSpPr>
         <p:spPr>
           <a:xfrm>
-            <a:off x="8211312" y="4233672"/>
-            <a:ext cx="2734056" cy="941832"/>
-          </a:xfrm>
-          <a:prstGeom prst="rect">
-            <a:avLst/>
-          </a:prstGeom>
-          <a:noFill/>
-          <a:ln/>
-        </p:spPr>
-        <p:txBody>
-          <a:bodyPr wrap="square" lIns="0" tIns="0" rIns="0" bIns="0" rtlCol="0" anchor="t">
+            <a:off x="7891272" y="4169664"/>
+            <a:ext cx="826008" cy="310896"/>
+          </a:xfrm>
+          <a:prstGeom prst="rect">
+            <a:avLst/>
+          </a:prstGeom>
+          <a:noFill/>
+          <a:ln/>
+        </p:spPr>
+        <p:txBody>
+          <a:bodyPr wrap="square" lIns="0" tIns="0" rIns="0" bIns="0" rtlCol="0" anchor="ctr">
             <a:normAutofit/>
           </a:bodyPr>
           <a:lstStyle/>
           <a:p>
-            <a:pPr indent="0" marL="0">
-              <a:buNone/>
-            </a:pPr>
-            <a:r>
-              <a:rPr lang="en-US" sz="1250" dirty="0">
-                <a:solidFill>
-                  <a:srgbClr val="17364A"/>
-                </a:solidFill>
-                <a:latin typeface="Aptos" pitchFamily="34" charset="0"/>
-                <a:ea typeface="Aptos" pitchFamily="34" charset="-122"/>
-                <a:cs typeface="Aptos" pitchFamily="34" charset="-120"/>
-              </a:rPr>
-              <a:t>If your department already has a strong equivalent tool, adapt or use the existing process instead of recreating it.</a:t>
-            </a:r>
-            <a:endParaRPr lang="en-US" sz="1250" dirty="0"/>
+            <a:pPr algn="ctr" indent="0" marL="0">
+              <a:buNone/>
+            </a:pPr>
+            <a:r>
+              <a:rPr lang="en-US" sz="1500" b="1" dirty="0">
+                <a:solidFill>
+                  <a:srgbClr val="FFFFFF"/>
+                </a:solidFill>
+                <a:latin typeface="Aptos" pitchFamily="34" charset="0"/>
+                <a:ea typeface="Aptos" pitchFamily="34" charset="-122"/>
+                <a:cs typeface="Aptos" pitchFamily="34" charset="-120"/>
+              </a:rPr>
+              <a:t>Concept</a:t>
+            </a:r>
+            <a:endParaRPr lang="en-US" sz="1500" dirty="0"/>
+          </a:p>
+        </p:txBody>
+      </p:sp>
+      <p:sp>
+        <p:nvSpPr>
+          <p:cNvPr id="15" name="Text 13"/>
+          <p:cNvSpPr/>
+          <p:nvPr/>
+        </p:nvSpPr>
+        <p:spPr>
+          <a:xfrm>
+            <a:off x="8817864" y="4187952"/>
+            <a:ext cx="201168" cy="256032"/>
+          </a:xfrm>
+          <a:prstGeom prst="rect">
+            <a:avLst/>
+          </a:prstGeom>
+          <a:noFill/>
+          <a:ln/>
+        </p:spPr>
+        <p:txBody>
+          <a:bodyPr wrap="square" lIns="0" tIns="0" rIns="0" bIns="0" rtlCol="0" anchor="ctr"/>
+          <a:lstStyle/>
+          <a:p>
+            <a:pPr algn="ctr" indent="0" marL="0">
+              <a:buNone/>
+            </a:pPr>
+            <a:r>
+              <a:rPr lang="en-US" sz="1800" b="1" dirty="0">
+                <a:solidFill>
+                  <a:srgbClr val="0068B7"/>
+                </a:solidFill>
+                <a:latin typeface="Aptos" pitchFamily="34" charset="0"/>
+                <a:ea typeface="Aptos" pitchFamily="34" charset="-122"/>
+                <a:cs typeface="Aptos" pitchFamily="34" charset="-120"/>
+              </a:rPr>
+              <a:t>â†’</a:t>
+            </a:r>
+            <a:endParaRPr lang="en-US" sz="1800" dirty="0"/>
+          </a:p>
+        </p:txBody>
+      </p:sp>
+      <p:sp>
+        <p:nvSpPr>
+          <p:cNvPr id="16" name="Shape 14"/>
+          <p:cNvSpPr/>
+          <p:nvPr/>
+        </p:nvSpPr>
+        <p:spPr>
+          <a:xfrm>
+            <a:off x="9046464" y="3977640"/>
+            <a:ext cx="972312" cy="749808"/>
+          </a:xfrm>
+          <a:prstGeom prst="roundRect">
+            <a:avLst>
+              <a:gd name="adj" fmla="val 14634"/>
+            </a:avLst>
+          </a:prstGeom>
+          <a:solidFill>
+            <a:srgbClr val="2F8A28"/>
+          </a:solidFill>
+          <a:ln w="12700">
+            <a:solidFill>
+              <a:srgbClr val="2F8A28"/>
+            </a:solidFill>
+            <a:prstDash val="solid"/>
+          </a:ln>
+        </p:spPr>
+      </p:sp>
+      <p:sp>
+        <p:nvSpPr>
+          <p:cNvPr id="17" name="Text 15"/>
+          <p:cNvSpPr/>
+          <p:nvPr/>
+        </p:nvSpPr>
+        <p:spPr>
+          <a:xfrm>
+            <a:off x="9119616" y="4169664"/>
+            <a:ext cx="826008" cy="310896"/>
+          </a:xfrm>
+          <a:prstGeom prst="rect">
+            <a:avLst/>
+          </a:prstGeom>
+          <a:noFill/>
+          <a:ln/>
+        </p:spPr>
+        <p:txBody>
+          <a:bodyPr wrap="square" lIns="0" tIns="0" rIns="0" bIns="0" rtlCol="0" anchor="ctr">
+            <a:normAutofit/>
+          </a:bodyPr>
+          <a:lstStyle/>
+          <a:p>
+            <a:pPr algn="ctr" indent="0" marL="0">
+              <a:buNone/>
+            </a:pPr>
+            <a:r>
+              <a:rPr lang="en-US" sz="1500" b="1" dirty="0">
+                <a:solidFill>
+                  <a:srgbClr val="FFFFFF"/>
+                </a:solidFill>
+                <a:latin typeface="Aptos" pitchFamily="34" charset="0"/>
+                <a:ea typeface="Aptos" pitchFamily="34" charset="-122"/>
+                <a:cs typeface="Aptos" pitchFamily="34" charset="-120"/>
+              </a:rPr>
+              <a:t>Tool</a:t>
+            </a:r>
+            <a:endParaRPr lang="en-US" sz="1500" dirty="0"/>
+          </a:p>
+        </p:txBody>
+      </p:sp>
+      <p:sp>
+        <p:nvSpPr>
+          <p:cNvPr id="18" name="Text 16"/>
+          <p:cNvSpPr/>
+          <p:nvPr/>
+        </p:nvSpPr>
+        <p:spPr>
+          <a:xfrm>
+            <a:off x="10046208" y="4187952"/>
+            <a:ext cx="201168" cy="256032"/>
+          </a:xfrm>
+          <a:prstGeom prst="rect">
+            <a:avLst/>
+          </a:prstGeom>
+          <a:noFill/>
+          <a:ln/>
+        </p:spPr>
+        <p:txBody>
+          <a:bodyPr wrap="square" lIns="0" tIns="0" rIns="0" bIns="0" rtlCol="0" anchor="ctr"/>
+          <a:lstStyle/>
+          <a:p>
+            <a:pPr algn="ctr" indent="0" marL="0">
+              <a:buNone/>
+            </a:pPr>
+            <a:r>
+              <a:rPr lang="en-US" sz="1800" b="1" dirty="0">
+                <a:solidFill>
+                  <a:srgbClr val="0068B7"/>
+                </a:solidFill>
+                <a:latin typeface="Aptos" pitchFamily="34" charset="0"/>
+                <a:ea typeface="Aptos" pitchFamily="34" charset="-122"/>
+                <a:cs typeface="Aptos" pitchFamily="34" charset="-120"/>
+              </a:rPr>
+              <a:t>â†’</a:t>
+            </a:r>
+            <a:endParaRPr lang="en-US" sz="1800" dirty="0"/>
+          </a:p>
+        </p:txBody>
+      </p:sp>
+      <p:sp>
+        <p:nvSpPr>
+          <p:cNvPr id="19" name="Shape 17"/>
+          <p:cNvSpPr/>
+          <p:nvPr/>
+        </p:nvSpPr>
+        <p:spPr>
+          <a:xfrm>
+            <a:off x="10274808" y="3977640"/>
+            <a:ext cx="972312" cy="749808"/>
+          </a:xfrm>
+          <a:prstGeom prst="roundRect">
+            <a:avLst>
+              <a:gd name="adj" fmla="val 14634"/>
+            </a:avLst>
+          </a:prstGeom>
+          <a:solidFill>
+            <a:srgbClr val="D69A2D"/>
+          </a:solidFill>
+          <a:ln w="12700">
+            <a:solidFill>
+              <a:srgbClr val="D69A2D"/>
+            </a:solidFill>
+            <a:prstDash val="solid"/>
+          </a:ln>
+        </p:spPr>
+      </p:sp>
+      <p:sp>
+        <p:nvSpPr>
+          <p:cNvPr id="20" name="Text 18"/>
+          <p:cNvSpPr/>
+          <p:nvPr/>
+        </p:nvSpPr>
+        <p:spPr>
+          <a:xfrm>
+            <a:off x="10347960" y="4169664"/>
+            <a:ext cx="826008" cy="310896"/>
+          </a:xfrm>
+          <a:prstGeom prst="rect">
+            <a:avLst/>
+          </a:prstGeom>
+          <a:noFill/>
+          <a:ln/>
+        </p:spPr>
+        <p:txBody>
+          <a:bodyPr wrap="square" lIns="0" tIns="0" rIns="0" bIns="0" rtlCol="0" anchor="ctr">
+            <a:normAutofit/>
+          </a:bodyPr>
+          <a:lstStyle/>
+          <a:p>
+            <a:pPr algn="ctr" indent="0" marL="0">
+              <a:buNone/>
+            </a:pPr>
+            <a:r>
+              <a:rPr lang="en-US" sz="1500" b="1" dirty="0">
+                <a:solidFill>
+                  <a:srgbClr val="FFFFFF"/>
+                </a:solidFill>
+                <a:latin typeface="Aptos" pitchFamily="34" charset="0"/>
+                <a:ea typeface="Aptos" pitchFamily="34" charset="-122"/>
+                <a:cs typeface="Aptos" pitchFamily="34" charset="-120"/>
+              </a:rPr>
+              <a:t>Artifact</a:t>
+            </a:r>
+            <a:endParaRPr lang="en-US" sz="1500" dirty="0"/>
           </a:p>
         </p:txBody>
       </p:sp>
@@ -12908,7 +14009,7 @@
                 <a:ea typeface="Aptos" pitchFamily="34" charset="-122"/>
                 <a:cs typeface="Aptos" pitchFamily="34" charset="-120"/>
               </a:rPr>
-              <a:t>© Paula Soper</a:t>
+              <a:t>Â© Paula Soper</a:t>
             </a:r>
             <a:endParaRPr lang="en-US" sz="800" dirty="0"/>
           </a:p>
@@ -12916,7 +14017,46 @@
       </p:sp>
       <p:sp>
         <p:nvSpPr>
-          <p:cNvPr id="7" name="Shape 5"/>
+          <p:cNvPr id="7" name="Text 5"/>
+          <p:cNvSpPr/>
+          <p:nvPr/>
+        </p:nvSpPr>
+        <p:spPr>
+          <a:xfrm>
+            <a:off x="11137392" y="6510528"/>
+            <a:ext cx="411480" cy="201168"/>
+          </a:xfrm>
+          <a:prstGeom prst="rect">
+            <a:avLst/>
+          </a:prstGeom>
+          <a:noFill/>
+          <a:ln/>
+        </p:spPr>
+        <p:txBody>
+          <a:bodyPr wrap="square" lIns="0" tIns="0" rIns="0" bIns="0" rtlCol="0" anchor="ctr"/>
+          <a:lstStyle/>
+          <a:p>
+            <a:pPr algn="r" indent="0" marL="0">
+              <a:buNone/>
+            </a:pPr>
+            <a:r>
+              <a:rPr lang="en-US" sz="900" dirty="0">
+                <a:solidFill>
+                  <a:srgbClr val="5F7181"/>
+                </a:solidFill>
+                <a:latin typeface="Aptos" pitchFamily="34" charset="0"/>
+                <a:ea typeface="Aptos" pitchFamily="34" charset="-122"/>
+                <a:cs typeface="Aptos" pitchFamily="34" charset="-120"/>
+              </a:rPr>
+              <a:t>5</a:t>
+            </a:r>
+            <a:endParaRPr lang="en-US" sz="900" dirty="0"/>
+          </a:p>
+        </p:txBody>
+      </p:sp>
+      <p:sp>
+        <p:nvSpPr>
+          <p:cNvPr id="8" name="Shape 6"/>
           <p:cNvSpPr/>
           <p:nvPr/>
         </p:nvSpPr>
@@ -12941,7 +14081,7 @@
       </p:sp>
       <p:sp>
         <p:nvSpPr>
-          <p:cNvPr id="8" name="Text 6"/>
+          <p:cNvPr id="9" name="Text 7"/>
           <p:cNvSpPr/>
           <p:nvPr/>
         </p:nvSpPr>
@@ -12980,14 +14120,14 @@
       </p:sp>
       <p:sp>
         <p:nvSpPr>
-          <p:cNvPr id="9" name="Text 7"/>
+          <p:cNvPr id="10" name="Text 8"/>
           <p:cNvSpPr/>
           <p:nvPr/>
         </p:nvSpPr>
         <p:spPr>
           <a:xfrm>
             <a:off x="640080" y="621792"/>
-            <a:ext cx="10881360" cy="566928"/>
+            <a:ext cx="10881360" cy="713232"/>
           </a:xfrm>
           <a:prstGeom prst="rect">
             <a:avLst/>
@@ -13005,7 +14145,7 @@
               <a:buNone/>
             </a:pPr>
             <a:r>
-              <a:rPr lang="en-US" sz="2700" b="1" dirty="0">
+              <a:rPr lang="en-US" sz="3400" b="1" dirty="0">
                 <a:solidFill>
                   <a:srgbClr val="003A63"/>
                 </a:solidFill>
@@ -13015,20 +14155,20 @@
               </a:rPr>
               <a:t>Learning Objectives</a:t>
             </a:r>
-            <a:endParaRPr lang="en-US" sz="2700" dirty="0"/>
-          </a:p>
-        </p:txBody>
-      </p:sp>
-      <p:sp>
-        <p:nvSpPr>
-          <p:cNvPr id="10" name="Text 8"/>
-          <p:cNvSpPr/>
-          <p:nvPr/>
-        </p:nvSpPr>
-        <p:spPr>
-          <a:xfrm>
-            <a:off x="868680" y="1417320"/>
-            <a:ext cx="6675120" cy="4434840"/>
+            <a:endParaRPr lang="en-US" sz="3400" dirty="0"/>
+          </a:p>
+        </p:txBody>
+      </p:sp>
+      <p:sp>
+        <p:nvSpPr>
+          <p:cNvPr id="11" name="Text 9"/>
+          <p:cNvSpPr/>
+          <p:nvPr/>
+        </p:nvSpPr>
+        <p:spPr>
+          <a:xfrm>
+            <a:off x="868680" y="1508760"/>
+            <a:ext cx="6537960" cy="4160520"/>
           </a:xfrm>
           <a:prstGeom prst="rect">
             <a:avLst/>
@@ -13043,7 +14183,7 @@
           <a:lstStyle/>
           <a:p>
             <a:r>
-              <a:rPr lang="en-US" sz="1700" dirty="0">
+              <a:rPr lang="en-US" sz="2100" dirty="0">
                 <a:solidFill>
                   <a:srgbClr val="17364A"/>
                 </a:solidFill>
@@ -13053,11 +14193,11 @@
               </a:rPr>
               <a:t>Explain why interoperability is a technical foundation for public health AI.</a:t>
             </a:r>
-            <a:endParaRPr lang="en-US" sz="1700" dirty="0"/>
-          </a:p>
-          <a:p>
-            <a:r>
-              <a:rPr lang="en-US" sz="1700" dirty="0">
+            <a:endParaRPr lang="en-US" sz="2100" dirty="0"/>
+          </a:p>
+          <a:p>
+            <a:r>
+              <a:rPr lang="en-US" sz="2100" dirty="0">
                 <a:solidFill>
                   <a:srgbClr val="17364A"/>
                 </a:solidFill>
@@ -13067,11 +14207,11 @@
               </a:rPr>
               <a:t>Distinguish among HL7 v2 messages, CDA documents, FHIR resources, and APIs.</a:t>
             </a:r>
-            <a:endParaRPr lang="en-US" sz="1700" dirty="0"/>
-          </a:p>
-          <a:p>
-            <a:r>
-              <a:rPr lang="en-US" sz="1700" dirty="0">
+            <a:endParaRPr lang="en-US" sz="2100" dirty="0"/>
+          </a:p>
+          <a:p>
+            <a:r>
+              <a:rPr lang="en-US" sz="2100" dirty="0">
                 <a:solidFill>
                   <a:srgbClr val="17364A"/>
                 </a:solidFill>
@@ -13081,27 +14221,13 @@
               </a:rPr>
               <a:t>Identify where interoperability standards appear in public health workflows.</a:t>
             </a:r>
-            <a:endParaRPr lang="en-US" sz="1700" dirty="0"/>
-          </a:p>
-          <a:p>
-            <a:r>
-              <a:rPr lang="en-US" sz="1700" dirty="0">
-                <a:solidFill>
-                  <a:srgbClr val="17364A"/>
-                </a:solidFill>
-                <a:latin typeface="Aptos" pitchFamily="34" charset="0"/>
-                <a:ea typeface="Aptos" pitchFamily="34" charset="-122"/>
-                <a:cs typeface="Aptos" pitchFamily="34" charset="-120"/>
-              </a:rPr>
-              <a:t>Explain the purpose of implementation guides and terminology standards.</a:t>
-            </a:r>
-            <a:endParaRPr lang="en-US" sz="1700" dirty="0"/>
-          </a:p>
-        </p:txBody>
-      </p:sp>
-      <p:sp>
-        <p:nvSpPr>
-          <p:cNvPr id="11" name="Shape 9"/>
+            <a:endParaRPr lang="en-US" sz="2100" dirty="0"/>
+          </a:p>
+        </p:txBody>
+      </p:sp>
+      <p:sp>
+        <p:nvSpPr>
+          <p:cNvPr id="12" name="Shape 10"/>
           <p:cNvSpPr/>
           <p:nvPr/>
         </p:nvSpPr>
@@ -13128,14 +14254,14 @@
       </p:sp>
       <p:sp>
         <p:nvSpPr>
-          <p:cNvPr id="12" name="Text 10"/>
+          <p:cNvPr id="13" name="Text 11"/>
           <p:cNvSpPr/>
           <p:nvPr/>
         </p:nvSpPr>
         <p:spPr>
           <a:xfrm>
             <a:off x="8074152" y="1563624"/>
-            <a:ext cx="2825496" cy="201168"/>
+            <a:ext cx="2825496" cy="256032"/>
           </a:xfrm>
           <a:prstGeom prst="rect">
             <a:avLst/>
@@ -13151,7 +14277,7 @@
               <a:buNone/>
             </a:pPr>
             <a:r>
-              <a:rPr lang="en-US" sz="950" b="1" dirty="0">
+              <a:rPr lang="en-US" sz="1300" b="1" dirty="0">
                 <a:solidFill>
                   <a:srgbClr val="0068B7"/>
                 </a:solidFill>
@@ -13161,20 +14287,20 @@
               </a:rPr>
               <a:t>Key idea</a:t>
             </a:r>
-            <a:endParaRPr lang="en-US" sz="950" dirty="0"/>
-          </a:p>
-        </p:txBody>
-      </p:sp>
-      <p:sp>
-        <p:nvSpPr>
-          <p:cNvPr id="13" name="Text 11"/>
-          <p:cNvSpPr/>
-          <p:nvPr/>
-        </p:nvSpPr>
-        <p:spPr>
-          <a:xfrm>
-            <a:off x="8074152" y="1856232"/>
-            <a:ext cx="2825496" cy="1261872"/>
+            <a:endParaRPr lang="en-US" sz="1300" dirty="0"/>
+          </a:p>
+        </p:txBody>
+      </p:sp>
+      <p:sp>
+        <p:nvSpPr>
+          <p:cNvPr id="14" name="Text 12"/>
+          <p:cNvSpPr/>
+          <p:nvPr/>
+        </p:nvSpPr>
+        <p:spPr>
+          <a:xfrm>
+            <a:off x="8074152" y="1920240"/>
+            <a:ext cx="2825496" cy="1188720"/>
           </a:xfrm>
           <a:prstGeom prst="rect">
             <a:avLst/>
@@ -13192,7 +14318,7 @@
               <a:buNone/>
             </a:pPr>
             <a:r>
-              <a:rPr lang="en-US" sz="1250" dirty="0">
+              <a:rPr lang="en-US" sz="1550" dirty="0">
                 <a:solidFill>
                   <a:srgbClr val="17364A"/>
                 </a:solidFill>
@@ -13202,13 +14328,13 @@
               </a:rPr>
               <a:t>Explain why interoperability is a technical foundation for public health AI.</a:t>
             </a:r>
-            <a:endParaRPr lang="en-US" sz="1250" dirty="0"/>
-          </a:p>
-        </p:txBody>
-      </p:sp>
-      <p:sp>
-        <p:nvSpPr>
-          <p:cNvPr id="14" name="Shape 12"/>
+            <a:endParaRPr lang="en-US" sz="1550" dirty="0"/>
+          </a:p>
+        </p:txBody>
+      </p:sp>
+      <p:sp>
+        <p:nvSpPr>
+          <p:cNvPr id="15" name="Shape 13"/>
           <p:cNvSpPr/>
           <p:nvPr/>
         </p:nvSpPr>
@@ -13235,14 +14361,14 @@
       </p:sp>
       <p:sp>
         <p:nvSpPr>
-          <p:cNvPr id="15" name="Text 13"/>
+          <p:cNvPr id="16" name="Text 14"/>
           <p:cNvSpPr/>
           <p:nvPr/>
         </p:nvSpPr>
         <p:spPr>
           <a:xfrm>
             <a:off x="8074152" y="3666744"/>
-            <a:ext cx="2825496" cy="201168"/>
+            <a:ext cx="2825496" cy="256032"/>
           </a:xfrm>
           <a:prstGeom prst="rect">
             <a:avLst/>
@@ -13258,7 +14384,7 @@
               <a:buNone/>
             </a:pPr>
             <a:r>
-              <a:rPr lang="en-US" sz="950" b="1" dirty="0">
+              <a:rPr lang="en-US" sz="1300" b="1" dirty="0">
                 <a:solidFill>
                   <a:srgbClr val="0068B7"/>
                 </a:solidFill>
@@ -13268,20 +14394,20 @@
               </a:rPr>
               <a:t>Use this for</a:t>
             </a:r>
-            <a:endParaRPr lang="en-US" sz="950" dirty="0"/>
-          </a:p>
-        </p:txBody>
-      </p:sp>
-      <p:sp>
-        <p:nvSpPr>
-          <p:cNvPr id="16" name="Text 14"/>
-          <p:cNvSpPr/>
-          <p:nvPr/>
-        </p:nvSpPr>
-        <p:spPr>
-          <a:xfrm>
-            <a:off x="8074152" y="3959352"/>
-            <a:ext cx="2825496" cy="1170432"/>
+            <a:endParaRPr lang="en-US" sz="1300" dirty="0"/>
+          </a:p>
+        </p:txBody>
+      </p:sp>
+      <p:sp>
+        <p:nvSpPr>
+          <p:cNvPr id="17" name="Text 15"/>
+          <p:cNvSpPr/>
+          <p:nvPr/>
+        </p:nvSpPr>
+        <p:spPr>
+          <a:xfrm>
+            <a:off x="8074152" y="4023360"/>
+            <a:ext cx="2825496" cy="1097280"/>
           </a:xfrm>
           <a:prstGeom prst="rect">
             <a:avLst/>
@@ -13299,7 +14425,7 @@
               <a:buNone/>
             </a:pPr>
             <a:r>
-              <a:rPr lang="en-US" sz="1250" dirty="0">
+              <a:rPr lang="en-US" sz="1550" dirty="0">
                 <a:solidFill>
                   <a:srgbClr val="17364A"/>
                 </a:solidFill>
@@ -13309,7 +14435,7 @@
               </a:rPr>
               <a:t>Connect the concept to public health decisions, safeguards, documentation, or implementation work.</a:t>
             </a:r>
-            <a:endParaRPr lang="en-US" sz="1250" dirty="0"/>
+            <a:endParaRPr lang="en-US" sz="1550" dirty="0"/>
           </a:p>
         </p:txBody>
       </p:sp>
@@ -13506,7 +14632,7 @@
                 <a:ea typeface="Aptos" pitchFamily="34" charset="-122"/>
                 <a:cs typeface="Aptos" pitchFamily="34" charset="-120"/>
               </a:rPr>
-              <a:t>© Paula Soper</a:t>
+              <a:t>Â© Paula Soper</a:t>
             </a:r>
             <a:endParaRPr lang="en-US" sz="800" dirty="0"/>
           </a:p>
@@ -13514,7 +14640,46 @@
       </p:sp>
       <p:sp>
         <p:nvSpPr>
-          <p:cNvPr id="7" name="Shape 5"/>
+          <p:cNvPr id="7" name="Text 5"/>
+          <p:cNvSpPr/>
+          <p:nvPr/>
+        </p:nvSpPr>
+        <p:spPr>
+          <a:xfrm>
+            <a:off x="11137392" y="6510528"/>
+            <a:ext cx="411480" cy="201168"/>
+          </a:xfrm>
+          <a:prstGeom prst="rect">
+            <a:avLst/>
+          </a:prstGeom>
+          <a:noFill/>
+          <a:ln/>
+        </p:spPr>
+        <p:txBody>
+          <a:bodyPr wrap="square" lIns="0" tIns="0" rIns="0" bIns="0" rtlCol="0" anchor="ctr"/>
+          <a:lstStyle/>
+          <a:p>
+            <a:pPr algn="r" indent="0" marL="0">
+              <a:buNone/>
+            </a:pPr>
+            <a:r>
+              <a:rPr lang="en-US" sz="900" dirty="0">
+                <a:solidFill>
+                  <a:srgbClr val="5F7181"/>
+                </a:solidFill>
+                <a:latin typeface="Aptos" pitchFamily="34" charset="0"/>
+                <a:ea typeface="Aptos" pitchFamily="34" charset="-122"/>
+                <a:cs typeface="Aptos" pitchFamily="34" charset="-120"/>
+              </a:rPr>
+              <a:t>6</a:t>
+            </a:r>
+            <a:endParaRPr lang="en-US" sz="900" dirty="0"/>
+          </a:p>
+        </p:txBody>
+      </p:sp>
+      <p:sp>
+        <p:nvSpPr>
+          <p:cNvPr id="8" name="Shape 6"/>
           <p:cNvSpPr/>
           <p:nvPr/>
         </p:nvSpPr>
@@ -13539,7 +14704,7 @@
       </p:sp>
       <p:sp>
         <p:nvSpPr>
-          <p:cNvPr id="8" name="Text 6"/>
+          <p:cNvPr id="9" name="Text 7"/>
           <p:cNvSpPr/>
           <p:nvPr/>
         </p:nvSpPr>
@@ -13578,14 +14743,14 @@
       </p:sp>
       <p:sp>
         <p:nvSpPr>
-          <p:cNvPr id="9" name="Text 7"/>
+          <p:cNvPr id="10" name="Text 8"/>
           <p:cNvSpPr/>
           <p:nvPr/>
         </p:nvSpPr>
         <p:spPr>
           <a:xfrm>
             <a:off x="640080" y="621792"/>
-            <a:ext cx="10881360" cy="566928"/>
+            <a:ext cx="10881360" cy="713232"/>
           </a:xfrm>
           <a:prstGeom prst="rect">
             <a:avLst/>
@@ -13603,7 +14768,7 @@
               <a:buNone/>
             </a:pPr>
             <a:r>
-              <a:rPr lang="en-US" sz="2700" b="1" dirty="0">
+              <a:rPr lang="en-US" sz="3400" b="1" dirty="0">
                 <a:solidFill>
                   <a:srgbClr val="003A63"/>
                 </a:solidFill>
@@ -13613,20 +14778,20 @@
               </a:rPr>
               <a:t>Module Overview</a:t>
             </a:r>
-            <a:endParaRPr lang="en-US" sz="2700" dirty="0"/>
-          </a:p>
-        </p:txBody>
-      </p:sp>
-      <p:sp>
-        <p:nvSpPr>
-          <p:cNvPr id="10" name="Text 8"/>
-          <p:cNvSpPr/>
-          <p:nvPr/>
-        </p:nvSpPr>
-        <p:spPr>
-          <a:xfrm>
-            <a:off x="868680" y="1417320"/>
-            <a:ext cx="6675120" cy="4434840"/>
+            <a:endParaRPr lang="en-US" sz="3400" dirty="0"/>
+          </a:p>
+        </p:txBody>
+      </p:sp>
+      <p:sp>
+        <p:nvSpPr>
+          <p:cNvPr id="11" name="Text 9"/>
+          <p:cNvSpPr/>
+          <p:nvPr/>
+        </p:nvSpPr>
+        <p:spPr>
+          <a:xfrm>
+            <a:off x="868680" y="1508760"/>
+            <a:ext cx="6537960" cy="4160520"/>
           </a:xfrm>
           <a:prstGeom prst="rect">
             <a:avLst/>
@@ -13641,7 +14806,7 @@
           <a:lstStyle/>
           <a:p>
             <a:r>
-              <a:rPr lang="en-US" sz="1700" dirty="0">
+              <a:rPr lang="en-US" sz="2100" dirty="0">
                 <a:solidFill>
                   <a:srgbClr val="17364A"/>
                 </a:solidFill>
@@ -13651,11 +14816,11 @@
               </a:rPr>
               <a:t>Public health AI depends on the ability of systems to exchange and interpret data.</a:t>
             </a:r>
-            <a:endParaRPr lang="en-US" sz="1700" dirty="0"/>
-          </a:p>
-          <a:p>
-            <a:r>
-              <a:rPr lang="en-US" sz="1700" dirty="0">
+            <a:endParaRPr lang="en-US" sz="2100" dirty="0"/>
+          </a:p>
+          <a:p>
+            <a:r>
+              <a:rPr lang="en-US" sz="2100" dirty="0">
                 <a:solidFill>
                   <a:srgbClr val="17364A"/>
                 </a:solidFill>
@@ -13663,13 +14828,13 @@
                 <a:ea typeface="Aptos" pitchFamily="34" charset="-122"/>
                 <a:cs typeface="Aptos" pitchFamily="34" charset="-120"/>
               </a:rPr>
-              <a:t>Interoperability is the discipline that makes this exchange possible across EHRs, laboratories, HIEs, IISs, surveillance.</a:t>
-            </a:r>
-            <a:endParaRPr lang="en-US" sz="1700" dirty="0"/>
-          </a:p>
-          <a:p>
-            <a:r>
-              <a:rPr lang="en-US" sz="1700" dirty="0">
+              <a:t>Interoperability is the discipline that makes this exchange possible across EHRs, laboratories, HIEs,.</a:t>
+            </a:r>
+            <a:endParaRPr lang="en-US" sz="2100" dirty="0"/>
+          </a:p>
+          <a:p>
+            <a:r>
+              <a:rPr lang="en-US" sz="2100" dirty="0">
                 <a:solidFill>
                   <a:srgbClr val="17364A"/>
                 </a:solidFill>
@@ -13677,15 +14842,15 @@
                 <a:ea typeface="Aptos" pitchFamily="34" charset="-122"/>
                 <a:cs typeface="Aptos" pitchFamily="34" charset="-120"/>
               </a:rPr>
-              <a:t>This module introduces the major standards that public health staff encounter, including HL7 v2, CDA, FHIR, implementation.</a:t>
-            </a:r>
-            <a:endParaRPr lang="en-US" sz="1700" dirty="0"/>
-          </a:p>
-        </p:txBody>
-      </p:sp>
-      <p:sp>
-        <p:nvSpPr>
-          <p:cNvPr id="11" name="Shape 9"/>
+              <a:t>This module introduces the major standards that public health staff encounter, including HL7 v2, CDA,.</a:t>
+            </a:r>
+            <a:endParaRPr lang="en-US" sz="2100" dirty="0"/>
+          </a:p>
+        </p:txBody>
+      </p:sp>
+      <p:sp>
+        <p:nvSpPr>
+          <p:cNvPr id="12" name="Shape 10"/>
           <p:cNvSpPr/>
           <p:nvPr/>
         </p:nvSpPr>
@@ -13712,14 +14877,14 @@
       </p:sp>
       <p:sp>
         <p:nvSpPr>
-          <p:cNvPr id="12" name="Text 10"/>
+          <p:cNvPr id="13" name="Text 11"/>
           <p:cNvSpPr/>
           <p:nvPr/>
         </p:nvSpPr>
         <p:spPr>
           <a:xfrm>
             <a:off x="8074152" y="1563624"/>
-            <a:ext cx="2825496" cy="201168"/>
+            <a:ext cx="2825496" cy="256032"/>
           </a:xfrm>
           <a:prstGeom prst="rect">
             <a:avLst/>
@@ -13735,7 +14900,7 @@
               <a:buNone/>
             </a:pPr>
             <a:r>
-              <a:rPr lang="en-US" sz="950" b="1" dirty="0">
+              <a:rPr lang="en-US" sz="1300" b="1" dirty="0">
                 <a:solidFill>
                   <a:srgbClr val="0068B7"/>
                 </a:solidFill>
@@ -13745,20 +14910,20 @@
               </a:rPr>
               <a:t>Key idea</a:t>
             </a:r>
-            <a:endParaRPr lang="en-US" sz="950" dirty="0"/>
-          </a:p>
-        </p:txBody>
-      </p:sp>
-      <p:sp>
-        <p:nvSpPr>
-          <p:cNvPr id="13" name="Text 11"/>
-          <p:cNvSpPr/>
-          <p:nvPr/>
-        </p:nvSpPr>
-        <p:spPr>
-          <a:xfrm>
-            <a:off x="8074152" y="1856232"/>
-            <a:ext cx="2825496" cy="1261872"/>
+            <a:endParaRPr lang="en-US" sz="1300" dirty="0"/>
+          </a:p>
+        </p:txBody>
+      </p:sp>
+      <p:sp>
+        <p:nvSpPr>
+          <p:cNvPr id="14" name="Text 12"/>
+          <p:cNvSpPr/>
+          <p:nvPr/>
+        </p:nvSpPr>
+        <p:spPr>
+          <a:xfrm>
+            <a:off x="8074152" y="1920240"/>
+            <a:ext cx="2825496" cy="1188720"/>
           </a:xfrm>
           <a:prstGeom prst="rect">
             <a:avLst/>
@@ -13776,7 +14941,7 @@
               <a:buNone/>
             </a:pPr>
             <a:r>
-              <a:rPr lang="en-US" sz="1250" dirty="0">
+              <a:rPr lang="en-US" sz="1550" dirty="0">
                 <a:solidFill>
                   <a:srgbClr val="17364A"/>
                 </a:solidFill>
@@ -13786,13 +14951,13 @@
               </a:rPr>
               <a:t>Public health AI depends on the ability of systems to exchange and interpret data.</a:t>
             </a:r>
-            <a:endParaRPr lang="en-US" sz="1250" dirty="0"/>
-          </a:p>
-        </p:txBody>
-      </p:sp>
-      <p:sp>
-        <p:nvSpPr>
-          <p:cNvPr id="14" name="Shape 12"/>
+            <a:endParaRPr lang="en-US" sz="1550" dirty="0"/>
+          </a:p>
+        </p:txBody>
+      </p:sp>
+      <p:sp>
+        <p:nvSpPr>
+          <p:cNvPr id="15" name="Shape 13"/>
           <p:cNvSpPr/>
           <p:nvPr/>
         </p:nvSpPr>
@@ -13819,14 +14984,14 @@
       </p:sp>
       <p:sp>
         <p:nvSpPr>
-          <p:cNvPr id="15" name="Text 13"/>
+          <p:cNvPr id="16" name="Text 14"/>
           <p:cNvSpPr/>
           <p:nvPr/>
         </p:nvSpPr>
         <p:spPr>
           <a:xfrm>
             <a:off x="8074152" y="3666744"/>
-            <a:ext cx="2825496" cy="201168"/>
+            <a:ext cx="2825496" cy="256032"/>
           </a:xfrm>
           <a:prstGeom prst="rect">
             <a:avLst/>
@@ -13842,7 +15007,7 @@
               <a:buNone/>
             </a:pPr>
             <a:r>
-              <a:rPr lang="en-US" sz="950" b="1" dirty="0">
+              <a:rPr lang="en-US" sz="1300" b="1" dirty="0">
                 <a:solidFill>
                   <a:srgbClr val="0068B7"/>
                 </a:solidFill>
@@ -13852,20 +15017,20 @@
               </a:rPr>
               <a:t>Use this for</a:t>
             </a:r>
-            <a:endParaRPr lang="en-US" sz="950" dirty="0"/>
-          </a:p>
-        </p:txBody>
-      </p:sp>
-      <p:sp>
-        <p:nvSpPr>
-          <p:cNvPr id="16" name="Text 14"/>
-          <p:cNvSpPr/>
-          <p:nvPr/>
-        </p:nvSpPr>
-        <p:spPr>
-          <a:xfrm>
-            <a:off x="8074152" y="3959352"/>
-            <a:ext cx="2825496" cy="1170432"/>
+            <a:endParaRPr lang="en-US" sz="1300" dirty="0"/>
+          </a:p>
+        </p:txBody>
+      </p:sp>
+      <p:sp>
+        <p:nvSpPr>
+          <p:cNvPr id="17" name="Text 15"/>
+          <p:cNvSpPr/>
+          <p:nvPr/>
+        </p:nvSpPr>
+        <p:spPr>
+          <a:xfrm>
+            <a:off x="8074152" y="4023360"/>
+            <a:ext cx="2825496" cy="1097280"/>
           </a:xfrm>
           <a:prstGeom prst="rect">
             <a:avLst/>
@@ -13883,7 +15048,7 @@
               <a:buNone/>
             </a:pPr>
             <a:r>
-              <a:rPr lang="en-US" sz="1250" dirty="0">
+              <a:rPr lang="en-US" sz="1550" dirty="0">
                 <a:solidFill>
                   <a:srgbClr val="17364A"/>
                 </a:solidFill>
@@ -13893,7 +15058,7 @@
               </a:rPr>
               <a:t>Connect the concept to public health decisions, safeguards, documentation, or implementation work.</a:t>
             </a:r>
-            <a:endParaRPr lang="en-US" sz="1250" dirty="0"/>
+            <a:endParaRPr lang="en-US" sz="1550" dirty="0"/>
           </a:p>
         </p:txBody>
       </p:sp>
@@ -14090,7 +15255,7 @@
                 <a:ea typeface="Aptos" pitchFamily="34" charset="-122"/>
                 <a:cs typeface="Aptos" pitchFamily="34" charset="-120"/>
               </a:rPr>
-              <a:t>© Paula Soper</a:t>
+              <a:t>Â© Paula Soper</a:t>
             </a:r>
             <a:endParaRPr lang="en-US" sz="800" dirty="0"/>
           </a:p>
@@ -14098,7 +15263,46 @@
       </p:sp>
       <p:sp>
         <p:nvSpPr>
-          <p:cNvPr id="7" name="Shape 5"/>
+          <p:cNvPr id="7" name="Text 5"/>
+          <p:cNvSpPr/>
+          <p:nvPr/>
+        </p:nvSpPr>
+        <p:spPr>
+          <a:xfrm>
+            <a:off x="11137392" y="6510528"/>
+            <a:ext cx="411480" cy="201168"/>
+          </a:xfrm>
+          <a:prstGeom prst="rect">
+            <a:avLst/>
+          </a:prstGeom>
+          <a:noFill/>
+          <a:ln/>
+        </p:spPr>
+        <p:txBody>
+          <a:bodyPr wrap="square" lIns="0" tIns="0" rIns="0" bIns="0" rtlCol="0" anchor="ctr"/>
+          <a:lstStyle/>
+          <a:p>
+            <a:pPr algn="r" indent="0" marL="0">
+              <a:buNone/>
+            </a:pPr>
+            <a:r>
+              <a:rPr lang="en-US" sz="900" dirty="0">
+                <a:solidFill>
+                  <a:srgbClr val="5F7181"/>
+                </a:solidFill>
+                <a:latin typeface="Aptos" pitchFamily="34" charset="0"/>
+                <a:ea typeface="Aptos" pitchFamily="34" charset="-122"/>
+                <a:cs typeface="Aptos" pitchFamily="34" charset="-120"/>
+              </a:rPr>
+              <a:t>7</a:t>
+            </a:r>
+            <a:endParaRPr lang="en-US" sz="900" dirty="0"/>
+          </a:p>
+        </p:txBody>
+      </p:sp>
+      <p:sp>
+        <p:nvSpPr>
+          <p:cNvPr id="8" name="Shape 6"/>
           <p:cNvSpPr/>
           <p:nvPr/>
         </p:nvSpPr>
@@ -14123,7 +15327,7 @@
       </p:sp>
       <p:sp>
         <p:nvSpPr>
-          <p:cNvPr id="8" name="Text 6"/>
+          <p:cNvPr id="9" name="Text 7"/>
           <p:cNvSpPr/>
           <p:nvPr/>
         </p:nvSpPr>
@@ -14162,14 +15366,14 @@
       </p:sp>
       <p:sp>
         <p:nvSpPr>
-          <p:cNvPr id="9" name="Text 7"/>
+          <p:cNvPr id="10" name="Text 8"/>
           <p:cNvSpPr/>
           <p:nvPr/>
         </p:nvSpPr>
         <p:spPr>
           <a:xfrm>
             <a:off x="640080" y="621792"/>
-            <a:ext cx="10881360" cy="566928"/>
+            <a:ext cx="10881360" cy="713232"/>
           </a:xfrm>
           <a:prstGeom prst="rect">
             <a:avLst/>
@@ -14187,7 +15391,7 @@
               <a:buNone/>
             </a:pPr>
             <a:r>
-              <a:rPr lang="en-US" sz="2700" b="1" dirty="0">
+              <a:rPr lang="en-US" sz="3400" b="1" dirty="0">
                 <a:solidFill>
                   <a:srgbClr val="003A63"/>
                 </a:solidFill>
@@ -14197,20 +15401,20 @@
               </a:rPr>
               <a:t>Jurisdiction and Agency Policy Note</a:t>
             </a:r>
-            <a:endParaRPr lang="en-US" sz="2700" dirty="0"/>
-          </a:p>
-        </p:txBody>
-      </p:sp>
-      <p:sp>
-        <p:nvSpPr>
-          <p:cNvPr id="10" name="Text 8"/>
-          <p:cNvSpPr/>
-          <p:nvPr/>
-        </p:nvSpPr>
-        <p:spPr>
-          <a:xfrm>
-            <a:off x="868680" y="1417320"/>
-            <a:ext cx="6675120" cy="4434840"/>
+            <a:endParaRPr lang="en-US" sz="3400" dirty="0"/>
+          </a:p>
+        </p:txBody>
+      </p:sp>
+      <p:sp>
+        <p:nvSpPr>
+          <p:cNvPr id="11" name="Text 9"/>
+          <p:cNvSpPr/>
+          <p:nvPr/>
+        </p:nvSpPr>
+        <p:spPr>
+          <a:xfrm>
+            <a:off x="868680" y="1508760"/>
+            <a:ext cx="6537960" cy="4160520"/>
           </a:xfrm>
           <a:prstGeom prst="rect">
             <a:avLst/>
@@ -14225,7 +15429,7 @@
           <a:lstStyle/>
           <a:p>
             <a:r>
-              <a:rPr lang="en-US" sz="1700" dirty="0">
+              <a:rPr lang="en-US" sz="2100" dirty="0">
                 <a:solidFill>
                   <a:srgbClr val="17364A"/>
                 </a:solidFill>
@@ -14235,11 +15439,11 @@
               </a:rPr>
               <a:t>This national-level module is intended for training and planning purposes.</a:t>
             </a:r>
-            <a:endParaRPr lang="en-US" sz="1700" dirty="0"/>
-          </a:p>
-          <a:p>
-            <a:r>
-              <a:rPr lang="en-US" sz="1700" dirty="0">
+            <a:endParaRPr lang="en-US" sz="2100" dirty="0"/>
+          </a:p>
+          <a:p>
+            <a:r>
+              <a:rPr lang="en-US" sz="2100" dirty="0">
                 <a:solidFill>
                   <a:srgbClr val="17364A"/>
                 </a:solidFill>
@@ -14249,11 +15453,11 @@
               </a:rPr>
               <a:t>It does not replace legal, privacy, procurement, civil rights, records, or agency policy review.</a:t>
             </a:r>
-            <a:endParaRPr lang="en-US" sz="1700" dirty="0"/>
-          </a:p>
-          <a:p>
-            <a:r>
-              <a:rPr lang="en-US" sz="1700" dirty="0">
+            <a:endParaRPr lang="en-US" sz="2100" dirty="0"/>
+          </a:p>
+          <a:p>
+            <a:r>
+              <a:rPr lang="en-US" sz="2100" dirty="0">
                 <a:solidFill>
                   <a:srgbClr val="17364A"/>
                 </a:solidFill>
@@ -14261,15 +15465,15 @@
                 <a:ea typeface="Aptos" pitchFamily="34" charset="-122"/>
                 <a:cs typeface="Aptos" pitchFamily="34" charset="-120"/>
               </a:rPr>
-              <a:t>Learners should confirm applicable requirements in their own jurisdiction and organization before implementing AI-supported.</a:t>
-            </a:r>
-            <a:endParaRPr lang="en-US" sz="1700" dirty="0"/>
-          </a:p>
-        </p:txBody>
-      </p:sp>
-      <p:sp>
-        <p:nvSpPr>
-          <p:cNvPr id="11" name="Shape 9"/>
+              <a:t>Learners should confirm applicable requirements in their own jurisdiction and organization before.</a:t>
+            </a:r>
+            <a:endParaRPr lang="en-US" sz="2100" dirty="0"/>
+          </a:p>
+        </p:txBody>
+      </p:sp>
+      <p:sp>
+        <p:nvSpPr>
+          <p:cNvPr id="12" name="Shape 10"/>
           <p:cNvSpPr/>
           <p:nvPr/>
         </p:nvSpPr>
@@ -14296,14 +15500,14 @@
       </p:sp>
       <p:sp>
         <p:nvSpPr>
-          <p:cNvPr id="12" name="Text 10"/>
+          <p:cNvPr id="13" name="Text 11"/>
           <p:cNvSpPr/>
           <p:nvPr/>
         </p:nvSpPr>
         <p:spPr>
           <a:xfrm>
             <a:off x="8074152" y="1563624"/>
-            <a:ext cx="2825496" cy="201168"/>
+            <a:ext cx="2825496" cy="256032"/>
           </a:xfrm>
           <a:prstGeom prst="rect">
             <a:avLst/>
@@ -14319,7 +15523,7 @@
               <a:buNone/>
             </a:pPr>
             <a:r>
-              <a:rPr lang="en-US" sz="950" b="1" dirty="0">
+              <a:rPr lang="en-US" sz="1300" b="1" dirty="0">
                 <a:solidFill>
                   <a:srgbClr val="0068B7"/>
                 </a:solidFill>
@@ -14329,20 +15533,20 @@
               </a:rPr>
               <a:t>Key idea</a:t>
             </a:r>
-            <a:endParaRPr lang="en-US" sz="950" dirty="0"/>
-          </a:p>
-        </p:txBody>
-      </p:sp>
-      <p:sp>
-        <p:nvSpPr>
-          <p:cNvPr id="13" name="Text 11"/>
-          <p:cNvSpPr/>
-          <p:nvPr/>
-        </p:nvSpPr>
-        <p:spPr>
-          <a:xfrm>
-            <a:off x="8074152" y="1856232"/>
-            <a:ext cx="2825496" cy="1261872"/>
+            <a:endParaRPr lang="en-US" sz="1300" dirty="0"/>
+          </a:p>
+        </p:txBody>
+      </p:sp>
+      <p:sp>
+        <p:nvSpPr>
+          <p:cNvPr id="14" name="Text 12"/>
+          <p:cNvSpPr/>
+          <p:nvPr/>
+        </p:nvSpPr>
+        <p:spPr>
+          <a:xfrm>
+            <a:off x="8074152" y="1920240"/>
+            <a:ext cx="2825496" cy="1188720"/>
           </a:xfrm>
           <a:prstGeom prst="rect">
             <a:avLst/>
@@ -14360,7 +15564,7 @@
               <a:buNone/>
             </a:pPr>
             <a:r>
-              <a:rPr lang="en-US" sz="1250" dirty="0">
+              <a:rPr lang="en-US" sz="1550" dirty="0">
                 <a:solidFill>
                   <a:srgbClr val="17364A"/>
                 </a:solidFill>
@@ -14370,13 +15574,13 @@
               </a:rPr>
               <a:t>This national-level module is intended for training and planning purposes.</a:t>
             </a:r>
-            <a:endParaRPr lang="en-US" sz="1250" dirty="0"/>
-          </a:p>
-        </p:txBody>
-      </p:sp>
-      <p:sp>
-        <p:nvSpPr>
-          <p:cNvPr id="14" name="Shape 12"/>
+            <a:endParaRPr lang="en-US" sz="1550" dirty="0"/>
+          </a:p>
+        </p:txBody>
+      </p:sp>
+      <p:sp>
+        <p:nvSpPr>
+          <p:cNvPr id="15" name="Shape 13"/>
           <p:cNvSpPr/>
           <p:nvPr/>
         </p:nvSpPr>
@@ -14403,14 +15607,14 @@
       </p:sp>
       <p:sp>
         <p:nvSpPr>
-          <p:cNvPr id="15" name="Text 13"/>
+          <p:cNvPr id="16" name="Text 14"/>
           <p:cNvSpPr/>
           <p:nvPr/>
         </p:nvSpPr>
         <p:spPr>
           <a:xfrm>
             <a:off x="8074152" y="3666744"/>
-            <a:ext cx="2825496" cy="201168"/>
+            <a:ext cx="2825496" cy="256032"/>
           </a:xfrm>
           <a:prstGeom prst="rect">
             <a:avLst/>
@@ -14426,7 +15630,7 @@
               <a:buNone/>
             </a:pPr>
             <a:r>
-              <a:rPr lang="en-US" sz="950" b="1" dirty="0">
+              <a:rPr lang="en-US" sz="1300" b="1" dirty="0">
                 <a:solidFill>
                   <a:srgbClr val="0068B7"/>
                 </a:solidFill>
@@ -14436,20 +15640,20 @@
               </a:rPr>
               <a:t>Use this for</a:t>
             </a:r>
-            <a:endParaRPr lang="en-US" sz="950" dirty="0"/>
-          </a:p>
-        </p:txBody>
-      </p:sp>
-      <p:sp>
-        <p:nvSpPr>
-          <p:cNvPr id="16" name="Text 14"/>
-          <p:cNvSpPr/>
-          <p:nvPr/>
-        </p:nvSpPr>
-        <p:spPr>
-          <a:xfrm>
-            <a:off x="8074152" y="3959352"/>
-            <a:ext cx="2825496" cy="1170432"/>
+            <a:endParaRPr lang="en-US" sz="1300" dirty="0"/>
+          </a:p>
+        </p:txBody>
+      </p:sp>
+      <p:sp>
+        <p:nvSpPr>
+          <p:cNvPr id="17" name="Text 15"/>
+          <p:cNvSpPr/>
+          <p:nvPr/>
+        </p:nvSpPr>
+        <p:spPr>
+          <a:xfrm>
+            <a:off x="8074152" y="4023360"/>
+            <a:ext cx="2825496" cy="1097280"/>
           </a:xfrm>
           <a:prstGeom prst="rect">
             <a:avLst/>
@@ -14467,7 +15671,7 @@
               <a:buNone/>
             </a:pPr>
             <a:r>
-              <a:rPr lang="en-US" sz="1250" dirty="0">
+              <a:rPr lang="en-US" sz="1550" dirty="0">
                 <a:solidFill>
                   <a:srgbClr val="17364A"/>
                 </a:solidFill>
@@ -14477,7 +15681,7 @@
               </a:rPr>
               <a:t>Connect the concept to public health decisions, safeguards, documentation, or implementation work.</a:t>
             </a:r>
-            <a:endParaRPr lang="en-US" sz="1250" dirty="0"/>
+            <a:endParaRPr lang="en-US" sz="1550" dirty="0"/>
           </a:p>
         </p:txBody>
       </p:sp>
@@ -14674,7 +15878,7 @@
                 <a:ea typeface="Aptos" pitchFamily="34" charset="-122"/>
                 <a:cs typeface="Aptos" pitchFamily="34" charset="-120"/>
               </a:rPr>
-              <a:t>© Paula Soper</a:t>
+              <a:t>Â© Paula Soper</a:t>
             </a:r>
             <a:endParaRPr lang="en-US" sz="800" dirty="0"/>
           </a:p>
@@ -14682,7 +15886,46 @@
       </p:sp>
       <p:sp>
         <p:nvSpPr>
-          <p:cNvPr id="7" name="Shape 5"/>
+          <p:cNvPr id="7" name="Text 5"/>
+          <p:cNvSpPr/>
+          <p:nvPr/>
+        </p:nvSpPr>
+        <p:spPr>
+          <a:xfrm>
+            <a:off x="11137392" y="6510528"/>
+            <a:ext cx="411480" cy="201168"/>
+          </a:xfrm>
+          <a:prstGeom prst="rect">
+            <a:avLst/>
+          </a:prstGeom>
+          <a:noFill/>
+          <a:ln/>
+        </p:spPr>
+        <p:txBody>
+          <a:bodyPr wrap="square" lIns="0" tIns="0" rIns="0" bIns="0" rtlCol="0" anchor="ctr"/>
+          <a:lstStyle/>
+          <a:p>
+            <a:pPr algn="r" indent="0" marL="0">
+              <a:buNone/>
+            </a:pPr>
+            <a:r>
+              <a:rPr lang="en-US" sz="900" dirty="0">
+                <a:solidFill>
+                  <a:srgbClr val="5F7181"/>
+                </a:solidFill>
+                <a:latin typeface="Aptos" pitchFamily="34" charset="0"/>
+                <a:ea typeface="Aptos" pitchFamily="34" charset="-122"/>
+                <a:cs typeface="Aptos" pitchFamily="34" charset="-120"/>
+              </a:rPr>
+              <a:t>8</a:t>
+            </a:r>
+            <a:endParaRPr lang="en-US" sz="900" dirty="0"/>
+          </a:p>
+        </p:txBody>
+      </p:sp>
+      <p:sp>
+        <p:nvSpPr>
+          <p:cNvPr id="8" name="Shape 6"/>
           <p:cNvSpPr/>
           <p:nvPr/>
         </p:nvSpPr>
@@ -14707,7 +15950,7 @@
       </p:sp>
       <p:sp>
         <p:nvSpPr>
-          <p:cNvPr id="8" name="Text 6"/>
+          <p:cNvPr id="9" name="Text 7"/>
           <p:cNvSpPr/>
           <p:nvPr/>
         </p:nvSpPr>
@@ -14746,14 +15989,14 @@
       </p:sp>
       <p:sp>
         <p:nvSpPr>
-          <p:cNvPr id="9" name="Text 7"/>
+          <p:cNvPr id="10" name="Text 8"/>
           <p:cNvSpPr/>
           <p:nvPr/>
         </p:nvSpPr>
         <p:spPr>
           <a:xfrm>
             <a:off x="640080" y="621792"/>
-            <a:ext cx="10881360" cy="566928"/>
+            <a:ext cx="10881360" cy="713232"/>
           </a:xfrm>
           <a:prstGeom prst="rect">
             <a:avLst/>
@@ -14771,7 +16014,7 @@
               <a:buNone/>
             </a:pPr>
             <a:r>
-              <a:rPr lang="en-US" sz="2700" b="1" dirty="0">
+              <a:rPr lang="en-US" sz="3400" b="1" dirty="0">
                 <a:solidFill>
                   <a:srgbClr val="003A63"/>
                 </a:solidFill>
@@ -14781,20 +16024,20 @@
               </a:rPr>
               <a:t>Why This Topic Matters for Public Health AI</a:t>
             </a:r>
-            <a:endParaRPr lang="en-US" sz="2700" dirty="0"/>
-          </a:p>
-        </p:txBody>
-      </p:sp>
-      <p:sp>
-        <p:nvSpPr>
-          <p:cNvPr id="10" name="Text 8"/>
-          <p:cNvSpPr/>
-          <p:nvPr/>
-        </p:nvSpPr>
-        <p:spPr>
-          <a:xfrm>
-            <a:off x="868680" y="1417320"/>
-            <a:ext cx="6675120" cy="4434840"/>
+            <a:endParaRPr lang="en-US" sz="3400" dirty="0"/>
+          </a:p>
+        </p:txBody>
+      </p:sp>
+      <p:sp>
+        <p:nvSpPr>
+          <p:cNvPr id="11" name="Text 9"/>
+          <p:cNvSpPr/>
+          <p:nvPr/>
+        </p:nvSpPr>
+        <p:spPr>
+          <a:xfrm>
+            <a:off x="868680" y="1508760"/>
+            <a:ext cx="6537960" cy="4160520"/>
           </a:xfrm>
           <a:prstGeom prst="rect">
             <a:avLst/>
@@ -14809,7 +16052,7 @@
           <a:lstStyle/>
           <a:p>
             <a:r>
-              <a:rPr lang="en-US" sz="1700" dirty="0">
+              <a:rPr lang="en-US" sz="2100" dirty="0">
                 <a:solidFill>
                   <a:srgbClr val="17364A"/>
                 </a:solidFill>
@@ -14819,11 +16062,11 @@
               </a:rPr>
               <a:t>Interoperability matters because AI tools cannot safely use data they cannot access, parse, or interpret.</a:t>
             </a:r>
-            <a:endParaRPr lang="en-US" sz="1700" dirty="0"/>
-          </a:p>
-          <a:p>
-            <a:r>
-              <a:rPr lang="en-US" sz="1700" dirty="0">
+            <a:endParaRPr lang="en-US" sz="2100" dirty="0"/>
+          </a:p>
+          <a:p>
+            <a:r>
+              <a:rPr lang="en-US" sz="2100" dirty="0">
                 <a:solidFill>
                   <a:srgbClr val="17364A"/>
                 </a:solidFill>
@@ -14833,11 +16076,11 @@
               </a:rPr>
               <a:t>A public health agency may receive data from hundreds or thousands of healthcare and laboratory partners.</a:t>
             </a:r>
-            <a:endParaRPr lang="en-US" sz="1700" dirty="0"/>
-          </a:p>
-          <a:p>
-            <a:r>
-              <a:rPr lang="en-US" sz="1700" dirty="0">
+            <a:endParaRPr lang="en-US" sz="2100" dirty="0"/>
+          </a:p>
+          <a:p>
+            <a:r>
+              <a:rPr lang="en-US" sz="2100" dirty="0">
                 <a:solidFill>
                   <a:srgbClr val="17364A"/>
                 </a:solidFill>
@@ -14845,29 +16088,15 @@
                 <a:ea typeface="Aptos" pitchFamily="34" charset="-122"/>
                 <a:cs typeface="Aptos" pitchFamily="34" charset="-120"/>
               </a:rPr>
-              <a:t>Without consistent standards, data exchange becomes a patchwork of custom interfaces, manual uploads, local workarounds,.</a:t>
-            </a:r>
-            <a:endParaRPr lang="en-US" sz="1700" dirty="0"/>
-          </a:p>
-          <a:p>
-            <a:r>
-              <a:rPr lang="en-US" sz="1700" dirty="0">
-                <a:solidFill>
-                  <a:srgbClr val="17364A"/>
-                </a:solidFill>
-                <a:latin typeface="Aptos" pitchFamily="34" charset="0"/>
-                <a:ea typeface="Aptos" pitchFamily="34" charset="-122"/>
-                <a:cs typeface="Aptos" pitchFamily="34" charset="-120"/>
-              </a:rPr>
-              <a:t>AI tools built on top of that environment may appear sophisticated while depending on fragile inputs.</a:t>
-            </a:r>
-            <a:endParaRPr lang="en-US" sz="1700" dirty="0"/>
-          </a:p>
-        </p:txBody>
-      </p:sp>
-      <p:sp>
-        <p:nvSpPr>
-          <p:cNvPr id="11" name="Shape 9"/>
+              <a:t>Without consistent standards, data exchange becomes a patchwork of custom interfaces, manual uploads,.</a:t>
+            </a:r>
+            <a:endParaRPr lang="en-US" sz="2100" dirty="0"/>
+          </a:p>
+        </p:txBody>
+      </p:sp>
+      <p:sp>
+        <p:nvSpPr>
+          <p:cNvPr id="12" name="Shape 10"/>
           <p:cNvSpPr/>
           <p:nvPr/>
         </p:nvSpPr>
@@ -14894,14 +16123,14 @@
       </p:sp>
       <p:sp>
         <p:nvSpPr>
-          <p:cNvPr id="12" name="Text 10"/>
+          <p:cNvPr id="13" name="Text 11"/>
           <p:cNvSpPr/>
           <p:nvPr/>
         </p:nvSpPr>
         <p:spPr>
           <a:xfrm>
             <a:off x="8074152" y="1563624"/>
-            <a:ext cx="2825496" cy="201168"/>
+            <a:ext cx="2825496" cy="256032"/>
           </a:xfrm>
           <a:prstGeom prst="rect">
             <a:avLst/>
@@ -14917,7 +16146,7 @@
               <a:buNone/>
             </a:pPr>
             <a:r>
-              <a:rPr lang="en-US" sz="950" b="1" dirty="0">
+              <a:rPr lang="en-US" sz="1300" b="1" dirty="0">
                 <a:solidFill>
                   <a:srgbClr val="0068B7"/>
                 </a:solidFill>
@@ -14927,20 +16156,20 @@
               </a:rPr>
               <a:t>Key idea</a:t>
             </a:r>
-            <a:endParaRPr lang="en-US" sz="950" dirty="0"/>
-          </a:p>
-        </p:txBody>
-      </p:sp>
-      <p:sp>
-        <p:nvSpPr>
-          <p:cNvPr id="13" name="Text 11"/>
-          <p:cNvSpPr/>
-          <p:nvPr/>
-        </p:nvSpPr>
-        <p:spPr>
-          <a:xfrm>
-            <a:off x="8074152" y="1856232"/>
-            <a:ext cx="2825496" cy="1261872"/>
+            <a:endParaRPr lang="en-US" sz="1300" dirty="0"/>
+          </a:p>
+        </p:txBody>
+      </p:sp>
+      <p:sp>
+        <p:nvSpPr>
+          <p:cNvPr id="14" name="Text 12"/>
+          <p:cNvSpPr/>
+          <p:nvPr/>
+        </p:nvSpPr>
+        <p:spPr>
+          <a:xfrm>
+            <a:off x="8074152" y="1920240"/>
+            <a:ext cx="2825496" cy="1188720"/>
           </a:xfrm>
           <a:prstGeom prst="rect">
             <a:avLst/>
@@ -14958,7 +16187,7 @@
               <a:buNone/>
             </a:pPr>
             <a:r>
-              <a:rPr lang="en-US" sz="1250" dirty="0">
+              <a:rPr lang="en-US" sz="1550" dirty="0">
                 <a:solidFill>
                   <a:srgbClr val="17364A"/>
                 </a:solidFill>
@@ -14968,13 +16197,13 @@
               </a:rPr>
               <a:t>Interoperability matters because AI tools cannot safely use data they cannot access, parse, or interpret.</a:t>
             </a:r>
-            <a:endParaRPr lang="en-US" sz="1250" dirty="0"/>
-          </a:p>
-        </p:txBody>
-      </p:sp>
-      <p:sp>
-        <p:nvSpPr>
-          <p:cNvPr id="14" name="Shape 12"/>
+            <a:endParaRPr lang="en-US" sz="1550" dirty="0"/>
+          </a:p>
+        </p:txBody>
+      </p:sp>
+      <p:sp>
+        <p:nvSpPr>
+          <p:cNvPr id="15" name="Shape 13"/>
           <p:cNvSpPr/>
           <p:nvPr/>
         </p:nvSpPr>
@@ -15001,14 +16230,14 @@
       </p:sp>
       <p:sp>
         <p:nvSpPr>
-          <p:cNvPr id="15" name="Text 13"/>
+          <p:cNvPr id="16" name="Text 14"/>
           <p:cNvSpPr/>
           <p:nvPr/>
         </p:nvSpPr>
         <p:spPr>
           <a:xfrm>
             <a:off x="8074152" y="3666744"/>
-            <a:ext cx="2825496" cy="201168"/>
+            <a:ext cx="2825496" cy="256032"/>
           </a:xfrm>
           <a:prstGeom prst="rect">
             <a:avLst/>
@@ -15024,7 +16253,7 @@
               <a:buNone/>
             </a:pPr>
             <a:r>
-              <a:rPr lang="en-US" sz="950" b="1" dirty="0">
+              <a:rPr lang="en-US" sz="1300" b="1" dirty="0">
                 <a:solidFill>
                   <a:srgbClr val="0068B7"/>
                 </a:solidFill>
@@ -15034,20 +16263,20 @@
               </a:rPr>
               <a:t>Use this for</a:t>
             </a:r>
-            <a:endParaRPr lang="en-US" sz="950" dirty="0"/>
-          </a:p>
-        </p:txBody>
-      </p:sp>
-      <p:sp>
-        <p:nvSpPr>
-          <p:cNvPr id="16" name="Text 14"/>
-          <p:cNvSpPr/>
-          <p:nvPr/>
-        </p:nvSpPr>
-        <p:spPr>
-          <a:xfrm>
-            <a:off x="8074152" y="3959352"/>
-            <a:ext cx="2825496" cy="1170432"/>
+            <a:endParaRPr lang="en-US" sz="1300" dirty="0"/>
+          </a:p>
+        </p:txBody>
+      </p:sp>
+      <p:sp>
+        <p:nvSpPr>
+          <p:cNvPr id="17" name="Text 15"/>
+          <p:cNvSpPr/>
+          <p:nvPr/>
+        </p:nvSpPr>
+        <p:spPr>
+          <a:xfrm>
+            <a:off x="8074152" y="4023360"/>
+            <a:ext cx="2825496" cy="1097280"/>
           </a:xfrm>
           <a:prstGeom prst="rect">
             <a:avLst/>
@@ -15065,7 +16294,7 @@
               <a:buNone/>
             </a:pPr>
             <a:r>
-              <a:rPr lang="en-US" sz="1250" dirty="0">
+              <a:rPr lang="en-US" sz="1550" dirty="0">
                 <a:solidFill>
                   <a:srgbClr val="17364A"/>
                 </a:solidFill>
@@ -15075,7 +16304,7 @@
               </a:rPr>
               <a:t>Connect the concept to public health decisions, safeguards, documentation, or implementation work.</a:t>
             </a:r>
-            <a:endParaRPr lang="en-US" sz="1250" dirty="0"/>
+            <a:endParaRPr lang="en-US" sz="1550" dirty="0"/>
           </a:p>
         </p:txBody>
       </p:sp>
@@ -15272,7 +16501,7 @@
                 <a:ea typeface="Aptos" pitchFamily="34" charset="-122"/>
                 <a:cs typeface="Aptos" pitchFamily="34" charset="-120"/>
               </a:rPr>
-              <a:t>© Paula Soper</a:t>
+              <a:t>Â© Paula Soper</a:t>
             </a:r>
             <a:endParaRPr lang="en-US" sz="800" dirty="0"/>
           </a:p>
@@ -15280,7 +16509,46 @@
       </p:sp>
       <p:sp>
         <p:nvSpPr>
-          <p:cNvPr id="7" name="Shape 5"/>
+          <p:cNvPr id="7" name="Text 5"/>
+          <p:cNvSpPr/>
+          <p:nvPr/>
+        </p:nvSpPr>
+        <p:spPr>
+          <a:xfrm>
+            <a:off x="11137392" y="6510528"/>
+            <a:ext cx="411480" cy="201168"/>
+          </a:xfrm>
+          <a:prstGeom prst="rect">
+            <a:avLst/>
+          </a:prstGeom>
+          <a:noFill/>
+          <a:ln/>
+        </p:spPr>
+        <p:txBody>
+          <a:bodyPr wrap="square" lIns="0" tIns="0" rIns="0" bIns="0" rtlCol="0" anchor="ctr"/>
+          <a:lstStyle/>
+          <a:p>
+            <a:pPr algn="r" indent="0" marL="0">
+              <a:buNone/>
+            </a:pPr>
+            <a:r>
+              <a:rPr lang="en-US" sz="900" dirty="0">
+                <a:solidFill>
+                  <a:srgbClr val="5F7181"/>
+                </a:solidFill>
+                <a:latin typeface="Aptos" pitchFamily="34" charset="0"/>
+                <a:ea typeface="Aptos" pitchFamily="34" charset="-122"/>
+                <a:cs typeface="Aptos" pitchFamily="34" charset="-120"/>
+              </a:rPr>
+              <a:t>9</a:t>
+            </a:r>
+            <a:endParaRPr lang="en-US" sz="900" dirty="0"/>
+          </a:p>
+        </p:txBody>
+      </p:sp>
+      <p:sp>
+        <p:nvSpPr>
+          <p:cNvPr id="8" name="Shape 6"/>
           <p:cNvSpPr/>
           <p:nvPr/>
         </p:nvSpPr>
@@ -15305,7 +16573,7 @@
       </p:sp>
       <p:sp>
         <p:nvSpPr>
-          <p:cNvPr id="8" name="Text 6"/>
+          <p:cNvPr id="9" name="Text 7"/>
           <p:cNvSpPr/>
           <p:nvPr/>
         </p:nvSpPr>
@@ -15344,14 +16612,14 @@
       </p:sp>
       <p:sp>
         <p:nvSpPr>
-          <p:cNvPr id="9" name="Text 7"/>
+          <p:cNvPr id="10" name="Text 8"/>
           <p:cNvSpPr/>
           <p:nvPr/>
         </p:nvSpPr>
         <p:spPr>
           <a:xfrm>
             <a:off x="640080" y="621792"/>
-            <a:ext cx="10881360" cy="566928"/>
+            <a:ext cx="10881360" cy="713232"/>
           </a:xfrm>
           <a:prstGeom prst="rect">
             <a:avLst/>
@@ -15369,7 +16637,7 @@
               <a:buNone/>
             </a:pPr>
             <a:r>
-              <a:rPr lang="en-US" sz="2700" b="1" dirty="0">
+              <a:rPr lang="en-US" sz="3400" b="1" dirty="0">
                 <a:solidFill>
                   <a:srgbClr val="003A63"/>
                 </a:solidFill>
@@ -15379,20 +16647,20 @@
               </a:rPr>
               <a:t>Core Concepts</a:t>
             </a:r>
-            <a:endParaRPr lang="en-US" sz="2700" dirty="0"/>
-          </a:p>
-        </p:txBody>
-      </p:sp>
-      <p:sp>
-        <p:nvSpPr>
-          <p:cNvPr id="10" name="Text 8"/>
-          <p:cNvSpPr/>
-          <p:nvPr/>
-        </p:nvSpPr>
-        <p:spPr>
-          <a:xfrm>
-            <a:off x="868680" y="1417320"/>
-            <a:ext cx="6675120" cy="4434840"/>
+            <a:endParaRPr lang="en-US" sz="3400" dirty="0"/>
+          </a:p>
+        </p:txBody>
+      </p:sp>
+      <p:sp>
+        <p:nvSpPr>
+          <p:cNvPr id="11" name="Text 9"/>
+          <p:cNvSpPr/>
+          <p:nvPr/>
+        </p:nvSpPr>
+        <p:spPr>
+          <a:xfrm>
+            <a:off x="868680" y="1508760"/>
+            <a:ext cx="6537960" cy="4160520"/>
           </a:xfrm>
           <a:prstGeom prst="rect">
             <a:avLst/>
@@ -15407,7 +16675,7 @@
           <a:lstStyle/>
           <a:p>
             <a:r>
-              <a:rPr lang="en-US" sz="1700" dirty="0">
+              <a:rPr lang="en-US" sz="2100" dirty="0">
                 <a:solidFill>
                   <a:srgbClr val="17364A"/>
                 </a:solidFill>
@@ -15417,11 +16685,11 @@
               </a:rPr>
               <a:t>HL7 v2.</a:t>
             </a:r>
-            <a:endParaRPr lang="en-US" sz="1700" dirty="0"/>
-          </a:p>
-          <a:p>
-            <a:r>
-              <a:rPr lang="en-US" sz="1700" dirty="0">
+            <a:endParaRPr lang="en-US" sz="2100" dirty="0"/>
+          </a:p>
+          <a:p>
+            <a:r>
+              <a:rPr lang="en-US" sz="2100" dirty="0">
                 <a:solidFill>
                   <a:srgbClr val="17364A"/>
                 </a:solidFill>
@@ -15431,11 +16699,11 @@
               </a:rPr>
               <a:t>HL7 v2 is a widely used message-based standard in healthcare and public health.</a:t>
             </a:r>
-            <a:endParaRPr lang="en-US" sz="1700" dirty="0"/>
-          </a:p>
-          <a:p>
-            <a:r>
-              <a:rPr lang="en-US" sz="1700" dirty="0">
+            <a:endParaRPr lang="en-US" sz="2100" dirty="0"/>
+          </a:p>
+          <a:p>
+            <a:r>
+              <a:rPr lang="en-US" sz="2100" dirty="0">
                 <a:solidFill>
                   <a:srgbClr val="17364A"/>
                 </a:solidFill>
@@ -15443,29 +16711,15 @@
                 <a:ea typeface="Aptos" pitchFamily="34" charset="-122"/>
                 <a:cs typeface="Aptos" pitchFamily="34" charset="-120"/>
               </a:rPr>
-              <a:t>It is common in laboratory reporting, immunization messaging, admission-discharge-transfer notifications, and other.</a:t>
-            </a:r>
-            <a:endParaRPr lang="en-US" sz="1700" dirty="0"/>
-          </a:p>
-          <a:p>
-            <a:r>
-              <a:rPr lang="en-US" sz="1700" dirty="0">
-                <a:solidFill>
-                  <a:srgbClr val="17364A"/>
-                </a:solidFill>
-                <a:latin typeface="Aptos" pitchFamily="34" charset="0"/>
-                <a:ea typeface="Aptos" pitchFamily="34" charset="-122"/>
-                <a:cs typeface="Aptos" pitchFamily="34" charset="-120"/>
-              </a:rPr>
-              <a:t>HL7 v2 is mature and widely deployed, but messages can vary by implementation, making validation and local onboarding.</a:t>
-            </a:r>
-            <a:endParaRPr lang="en-US" sz="1700" dirty="0"/>
-          </a:p>
-        </p:txBody>
-      </p:sp>
-      <p:sp>
-        <p:nvSpPr>
-          <p:cNvPr id="11" name="Shape 9"/>
+              <a:t>It is common in laboratory reporting, immunization messaging, admission-discharge-transfer.</a:t>
+            </a:r>
+            <a:endParaRPr lang="en-US" sz="2100" dirty="0"/>
+          </a:p>
+        </p:txBody>
+      </p:sp>
+      <p:sp>
+        <p:nvSpPr>
+          <p:cNvPr id="12" name="Shape 10"/>
           <p:cNvSpPr/>
           <p:nvPr/>
         </p:nvSpPr>
@@ -15492,14 +16746,14 @@
       </p:sp>
       <p:sp>
         <p:nvSpPr>
-          <p:cNvPr id="12" name="Text 10"/>
+          <p:cNvPr id="13" name="Text 11"/>
           <p:cNvSpPr/>
           <p:nvPr/>
         </p:nvSpPr>
         <p:spPr>
           <a:xfrm>
             <a:off x="8074152" y="1563624"/>
-            <a:ext cx="2825496" cy="201168"/>
+            <a:ext cx="2825496" cy="256032"/>
           </a:xfrm>
           <a:prstGeom prst="rect">
             <a:avLst/>
@@ -15515,7 +16769,7 @@
               <a:buNone/>
             </a:pPr>
             <a:r>
-              <a:rPr lang="en-US" sz="950" b="1" dirty="0">
+              <a:rPr lang="en-US" sz="1300" b="1" dirty="0">
                 <a:solidFill>
                   <a:srgbClr val="0068B7"/>
                 </a:solidFill>
@@ -15525,20 +16779,20 @@
               </a:rPr>
               <a:t>Key idea</a:t>
             </a:r>
-            <a:endParaRPr lang="en-US" sz="950" dirty="0"/>
-          </a:p>
-        </p:txBody>
-      </p:sp>
-      <p:sp>
-        <p:nvSpPr>
-          <p:cNvPr id="13" name="Text 11"/>
-          <p:cNvSpPr/>
-          <p:nvPr/>
-        </p:nvSpPr>
-        <p:spPr>
-          <a:xfrm>
-            <a:off x="8074152" y="1856232"/>
-            <a:ext cx="2825496" cy="1261872"/>
+            <a:endParaRPr lang="en-US" sz="1300" dirty="0"/>
+          </a:p>
+        </p:txBody>
+      </p:sp>
+      <p:sp>
+        <p:nvSpPr>
+          <p:cNvPr id="14" name="Text 12"/>
+          <p:cNvSpPr/>
+          <p:nvPr/>
+        </p:nvSpPr>
+        <p:spPr>
+          <a:xfrm>
+            <a:off x="8074152" y="1920240"/>
+            <a:ext cx="2825496" cy="1188720"/>
           </a:xfrm>
           <a:prstGeom prst="rect">
             <a:avLst/>
@@ -15556,7 +16810,7 @@
               <a:buNone/>
             </a:pPr>
             <a:r>
-              <a:rPr lang="en-US" sz="1250" dirty="0">
+              <a:rPr lang="en-US" sz="1550" dirty="0">
                 <a:solidFill>
                   <a:srgbClr val="17364A"/>
                 </a:solidFill>
@@ -15566,13 +16820,13 @@
               </a:rPr>
               <a:t>HL7 v2.</a:t>
             </a:r>
-            <a:endParaRPr lang="en-US" sz="1250" dirty="0"/>
-          </a:p>
-        </p:txBody>
-      </p:sp>
-      <p:sp>
-        <p:nvSpPr>
-          <p:cNvPr id="14" name="Shape 12"/>
+            <a:endParaRPr lang="en-US" sz="1550" dirty="0"/>
+          </a:p>
+        </p:txBody>
+      </p:sp>
+      <p:sp>
+        <p:nvSpPr>
+          <p:cNvPr id="15" name="Shape 13"/>
           <p:cNvSpPr/>
           <p:nvPr/>
         </p:nvSpPr>
@@ -15599,14 +16853,14 @@
       </p:sp>
       <p:sp>
         <p:nvSpPr>
-          <p:cNvPr id="15" name="Text 13"/>
+          <p:cNvPr id="16" name="Text 14"/>
           <p:cNvSpPr/>
           <p:nvPr/>
         </p:nvSpPr>
         <p:spPr>
           <a:xfrm>
             <a:off x="8074152" y="3666744"/>
-            <a:ext cx="2825496" cy="201168"/>
+            <a:ext cx="2825496" cy="256032"/>
           </a:xfrm>
           <a:prstGeom prst="rect">
             <a:avLst/>
@@ -15622,7 +16876,7 @@
               <a:buNone/>
             </a:pPr>
             <a:r>
-              <a:rPr lang="en-US" sz="950" b="1" dirty="0">
+              <a:rPr lang="en-US" sz="1300" b="1" dirty="0">
                 <a:solidFill>
                   <a:srgbClr val="0068B7"/>
                 </a:solidFill>
@@ -15632,20 +16886,20 @@
               </a:rPr>
               <a:t>Use this for</a:t>
             </a:r>
-            <a:endParaRPr lang="en-US" sz="950" dirty="0"/>
-          </a:p>
-        </p:txBody>
-      </p:sp>
-      <p:sp>
-        <p:nvSpPr>
-          <p:cNvPr id="16" name="Text 14"/>
-          <p:cNvSpPr/>
-          <p:nvPr/>
-        </p:nvSpPr>
-        <p:spPr>
-          <a:xfrm>
-            <a:off x="8074152" y="3959352"/>
-            <a:ext cx="2825496" cy="1170432"/>
+            <a:endParaRPr lang="en-US" sz="1300" dirty="0"/>
+          </a:p>
+        </p:txBody>
+      </p:sp>
+      <p:sp>
+        <p:nvSpPr>
+          <p:cNvPr id="17" name="Text 15"/>
+          <p:cNvSpPr/>
+          <p:nvPr/>
+        </p:nvSpPr>
+        <p:spPr>
+          <a:xfrm>
+            <a:off x="8074152" y="4023360"/>
+            <a:ext cx="2825496" cy="1097280"/>
           </a:xfrm>
           <a:prstGeom prst="rect">
             <a:avLst/>
@@ -15663,7 +16917,7 @@
               <a:buNone/>
             </a:pPr>
             <a:r>
-              <a:rPr lang="en-US" sz="1250" dirty="0">
+              <a:rPr lang="en-US" sz="1550" dirty="0">
                 <a:solidFill>
                   <a:srgbClr val="17364A"/>
                 </a:solidFill>
@@ -15673,7 +16927,7 @@
               </a:rPr>
               <a:t>Connect the concept to public health decisions, safeguards, documentation, or implementation work.</a:t>
             </a:r>
-            <a:endParaRPr lang="en-US" sz="1250" dirty="0"/>
+            <a:endParaRPr lang="en-US" sz="1550" dirty="0"/>
           </a:p>
         </p:txBody>
       </p:sp>
